--- a/results/nvfp4/optimumxt_findings.pptx
+++ b/results/nvfp4/optimumxt_findings.pptx
@@ -3451,8 +3451,8 @@
           <p:nvPr/>
         </p:nvGraphicFramePr>
         <p:xfrm>
-          <a:off x="822960" y="1920240"/>
-          <a:ext cx="10515600" cy="3456432"/>
+          <a:off x="822960" y="1828800"/>
+          <a:ext cx="10515600" cy="4005072"/>
         </p:xfrm>
         <a:graphic>
           <a:graphicData uri="http://schemas.openxmlformats.org/drawingml/2006/table">
@@ -3466,7 +3466,7 @@
                 <a:gridCol w="2651760"/>
                 <a:gridCol w="1554480"/>
               </a:tblGrid>
-              <a:tr h="384048">
+              <a:tr h="333756">
                 <a:tc>
                   <a:txBody>
                     <a:bodyPr/>
@@ -3560,7 +3560,7 @@
                   </a:tcPr>
                 </a:tc>
               </a:tr>
-              <a:tr h="384048">
+              <a:tr h="333756">
                 <a:tc>
                   <a:txBody>
                     <a:bodyPr/>
@@ -3568,7 +3568,7 @@
                     <a:p>
                       <a:pPr algn="l"/>
                       <a:r>
-                        <a:rPr sz="1300" b="0">
+                        <a:rPr sz="1250" b="0">
                           <a:solidFill>
                             <a:srgbClr val="26262A"/>
                           </a:solidFill>
@@ -3591,7 +3591,7 @@
                     <a:p>
                       <a:pPr algn="r"/>
                       <a:r>
-                        <a:rPr sz="1300" b="0">
+                        <a:rPr sz="1250" b="0">
                           <a:solidFill>
                             <a:srgbClr val="26262A"/>
                           </a:solidFill>
@@ -3614,7 +3614,7 @@
                     <a:p>
                       <a:pPr algn="r"/>
                       <a:r>
-                        <a:rPr sz="1300" b="0">
+                        <a:rPr sz="1250" b="0">
                           <a:solidFill>
                             <a:srgbClr val="26262A"/>
                           </a:solidFill>
@@ -3637,7 +3637,7 @@
                     <a:p>
                       <a:pPr algn="r"/>
                       <a:r>
-                        <a:rPr sz="1300" b="1">
+                        <a:rPr sz="1250" b="1">
                           <a:solidFill>
                             <a:srgbClr val="26262A"/>
                           </a:solidFill>
@@ -3654,7 +3654,7 @@
                   </a:tcPr>
                 </a:tc>
               </a:tr>
-              <a:tr h="384048">
+              <a:tr h="333756">
                 <a:tc>
                   <a:txBody>
                     <a:bodyPr/>
@@ -3662,7 +3662,7 @@
                     <a:p>
                       <a:pPr algn="l"/>
                       <a:r>
-                        <a:rPr sz="1300" b="0">
+                        <a:rPr sz="1250" b="0">
                           <a:solidFill>
                             <a:srgbClr val="26262A"/>
                           </a:solidFill>
@@ -3685,7 +3685,7 @@
                     <a:p>
                       <a:pPr algn="r"/>
                       <a:r>
-                        <a:rPr sz="1300" b="0">
+                        <a:rPr sz="1250" b="0">
                           <a:solidFill>
                             <a:srgbClr val="26262A"/>
                           </a:solidFill>
@@ -3708,7 +3708,7 @@
                     <a:p>
                       <a:pPr algn="r"/>
                       <a:r>
-                        <a:rPr sz="1300" b="0">
+                        <a:rPr sz="1250" b="0">
                           <a:solidFill>
                             <a:srgbClr val="26262A"/>
                           </a:solidFill>
@@ -3731,7 +3731,7 @@
                     <a:p>
                       <a:pPr algn="r"/>
                       <a:r>
-                        <a:rPr sz="1300" b="1">
+                        <a:rPr sz="1250" b="1">
                           <a:solidFill>
                             <a:srgbClr val="26262A"/>
                           </a:solidFill>
@@ -3748,7 +3748,7 @@
                   </a:tcPr>
                 </a:tc>
               </a:tr>
-              <a:tr h="384048">
+              <a:tr h="333756">
                 <a:tc>
                   <a:txBody>
                     <a:bodyPr/>
@@ -3756,7 +3756,7 @@
                     <a:p>
                       <a:pPr algn="l"/>
                       <a:r>
-                        <a:rPr sz="1300" b="0">
+                        <a:rPr sz="1250" b="0">
                           <a:solidFill>
                             <a:srgbClr val="26262A"/>
                           </a:solidFill>
@@ -3779,7 +3779,7 @@
                     <a:p>
                       <a:pPr algn="r"/>
                       <a:r>
-                        <a:rPr sz="1300" b="0">
+                        <a:rPr sz="1250" b="0">
                           <a:solidFill>
                             <a:srgbClr val="26262A"/>
                           </a:solidFill>
@@ -3802,7 +3802,7 @@
                     <a:p>
                       <a:pPr algn="r"/>
                       <a:r>
-                        <a:rPr sz="1300" b="0">
+                        <a:rPr sz="1250" b="0">
                           <a:solidFill>
                             <a:srgbClr val="26262A"/>
                           </a:solidFill>
@@ -3825,7 +3825,7 @@
                     <a:p>
                       <a:pPr algn="r"/>
                       <a:r>
-                        <a:rPr sz="1300" b="1">
+                        <a:rPr sz="1250" b="1">
                           <a:solidFill>
                             <a:srgbClr val="26262A"/>
                           </a:solidFill>
@@ -3842,7 +3842,7 @@
                   </a:tcPr>
                 </a:tc>
               </a:tr>
-              <a:tr h="384048">
+              <a:tr h="333756">
                 <a:tc>
                   <a:txBody>
                     <a:bodyPr/>
@@ -3850,7 +3850,289 @@
                     <a:p>
                       <a:pPr algn="l"/>
                       <a:r>
-                        <a:rPr sz="1300" b="0">
+                        <a:rPr sz="1250" b="0">
+                          <a:solidFill>
+                            <a:srgbClr val="26262A"/>
+                          </a:solidFill>
+                          <a:latin typeface="Noto Sans CJK TC"/>
+                        </a:rPr>
+                        <a:t>Prefill throughput (tok/s/user)</a:t>
+                      </a:r>
+                    </a:p>
+                  </a:txBody>
+                  <a:tcPr>
+                    <a:solidFill>
+                      <a:srgbClr val="FCFCFB"/>
+                    </a:solidFill>
+                  </a:tcPr>
+                </a:tc>
+                <a:tc>
+                  <a:txBody>
+                    <a:bodyPr/>
+                    <a:lstStyle/>
+                    <a:p>
+                      <a:pPr algn="r"/>
+                      <a:r>
+                        <a:rPr sz="1250" b="0">
+                          <a:solidFill>
+                            <a:srgbClr val="26262A"/>
+                          </a:solidFill>
+                          <a:latin typeface="Noto Sans CJK TC"/>
+                        </a:rPr>
+                        <a:t>1,747.4</a:t>
+                      </a:r>
+                    </a:p>
+                  </a:txBody>
+                  <a:tcPr>
+                    <a:solidFill>
+                      <a:srgbClr val="FCFCFB"/>
+                    </a:solidFill>
+                  </a:tcPr>
+                </a:tc>
+                <a:tc>
+                  <a:txBody>
+                    <a:bodyPr/>
+                    <a:lstStyle/>
+                    <a:p>
+                      <a:pPr algn="r"/>
+                      <a:r>
+                        <a:rPr sz="1250" b="0">
+                          <a:solidFill>
+                            <a:srgbClr val="26262A"/>
+                          </a:solidFill>
+                          <a:latin typeface="Noto Sans CJK TC"/>
+                        </a:rPr>
+                        <a:t>53.9</a:t>
+                      </a:r>
+                    </a:p>
+                  </a:txBody>
+                  <a:tcPr>
+                    <a:solidFill>
+                      <a:srgbClr val="FCFCFB"/>
+                    </a:solidFill>
+                  </a:tcPr>
+                </a:tc>
+                <a:tc>
+                  <a:txBody>
+                    <a:bodyPr/>
+                    <a:lstStyle/>
+                    <a:p>
+                      <a:pPr algn="r"/>
+                      <a:r>
+                        <a:rPr sz="1250" b="1">
+                          <a:solidFill>
+                            <a:srgbClr val="26262A"/>
+                          </a:solidFill>
+                          <a:latin typeface="Noto Sans CJK TC"/>
+                        </a:rPr>
+                        <a:t>32.40×</a:t>
+                      </a:r>
+                    </a:p>
+                  </a:txBody>
+                  <a:tcPr>
+                    <a:solidFill>
+                      <a:srgbClr val="FCFCFB"/>
+                    </a:solidFill>
+                  </a:tcPr>
+                </a:tc>
+              </a:tr>
+              <a:tr h="333756">
+                <a:tc>
+                  <a:txBody>
+                    <a:bodyPr/>
+                    <a:lstStyle/>
+                    <a:p>
+                      <a:pPr algn="l"/>
+                      <a:r>
+                        <a:rPr sz="1250" b="0">
+                          <a:solidFill>
+                            <a:srgbClr val="26262A"/>
+                          </a:solidFill>
+                          <a:latin typeface="Noto Sans CJK TC"/>
+                        </a:rPr>
+                        <a:t>Decode throughput (tok/s/user)</a:t>
+                      </a:r>
+                    </a:p>
+                  </a:txBody>
+                  <a:tcPr>
+                    <a:solidFill>
+                      <a:srgbClr val="FCFCFB"/>
+                    </a:solidFill>
+                  </a:tcPr>
+                </a:tc>
+                <a:tc>
+                  <a:txBody>
+                    <a:bodyPr/>
+                    <a:lstStyle/>
+                    <a:p>
+                      <a:pPr algn="r"/>
+                      <a:r>
+                        <a:rPr sz="1250" b="0">
+                          <a:solidFill>
+                            <a:srgbClr val="26262A"/>
+                          </a:solidFill>
+                          <a:latin typeface="Noto Sans CJK TC"/>
+                        </a:rPr>
+                        <a:t>30.50</a:t>
+                      </a:r>
+                    </a:p>
+                  </a:txBody>
+                  <a:tcPr>
+                    <a:solidFill>
+                      <a:srgbClr val="FCFCFB"/>
+                    </a:solidFill>
+                  </a:tcPr>
+                </a:tc>
+                <a:tc>
+                  <a:txBody>
+                    <a:bodyPr/>
+                    <a:lstStyle/>
+                    <a:p>
+                      <a:pPr algn="r"/>
+                      <a:r>
+                        <a:rPr sz="1250" b="0">
+                          <a:solidFill>
+                            <a:srgbClr val="26262A"/>
+                          </a:solidFill>
+                          <a:latin typeface="Noto Sans CJK TC"/>
+                        </a:rPr>
+                        <a:t>19.89</a:t>
+                      </a:r>
+                    </a:p>
+                  </a:txBody>
+                  <a:tcPr>
+                    <a:solidFill>
+                      <a:srgbClr val="FCFCFB"/>
+                    </a:solidFill>
+                  </a:tcPr>
+                </a:tc>
+                <a:tc>
+                  <a:txBody>
+                    <a:bodyPr/>
+                    <a:lstStyle/>
+                    <a:p>
+                      <a:pPr algn="r"/>
+                      <a:r>
+                        <a:rPr sz="1250" b="1">
+                          <a:solidFill>
+                            <a:srgbClr val="26262A"/>
+                          </a:solidFill>
+                          <a:latin typeface="Noto Sans CJK TC"/>
+                        </a:rPr>
+                        <a:t>1.53×</a:t>
+                      </a:r>
+                    </a:p>
+                  </a:txBody>
+                  <a:tcPr>
+                    <a:solidFill>
+                      <a:srgbClr val="FCFCFB"/>
+                    </a:solidFill>
+                  </a:tcPr>
+                </a:tc>
+              </a:tr>
+              <a:tr h="333756">
+                <a:tc>
+                  <a:txBody>
+                    <a:bodyPr/>
+                    <a:lstStyle/>
+                    <a:p>
+                      <a:pPr algn="l"/>
+                      <a:r>
+                        <a:rPr sz="1250" b="0">
+                          <a:solidFill>
+                            <a:srgbClr val="26262A"/>
+                          </a:solidFill>
+                          <a:latin typeface="Noto Sans CJK TC"/>
+                        </a:rPr>
+                        <a:t>Output throughput, system (tok/s)</a:t>
+                      </a:r>
+                    </a:p>
+                  </a:txBody>
+                  <a:tcPr>
+                    <a:solidFill>
+                      <a:srgbClr val="FCFCFB"/>
+                    </a:solidFill>
+                  </a:tcPr>
+                </a:tc>
+                <a:tc>
+                  <a:txBody>
+                    <a:bodyPr/>
+                    <a:lstStyle/>
+                    <a:p>
+                      <a:pPr algn="r"/>
+                      <a:r>
+                        <a:rPr sz="1250" b="0">
+                          <a:solidFill>
+                            <a:srgbClr val="26262A"/>
+                          </a:solidFill>
+                          <a:latin typeface="Noto Sans CJK TC"/>
+                        </a:rPr>
+                        <a:t>29.59</a:t>
+                      </a:r>
+                    </a:p>
+                  </a:txBody>
+                  <a:tcPr>
+                    <a:solidFill>
+                      <a:srgbClr val="FCFCFB"/>
+                    </a:solidFill>
+                  </a:tcPr>
+                </a:tc>
+                <a:tc>
+                  <a:txBody>
+                    <a:bodyPr/>
+                    <a:lstStyle/>
+                    <a:p>
+                      <a:pPr algn="r"/>
+                      <a:r>
+                        <a:rPr sz="1250" b="0">
+                          <a:solidFill>
+                            <a:srgbClr val="26262A"/>
+                          </a:solidFill>
+                          <a:latin typeface="Noto Sans CJK TC"/>
+                        </a:rPr>
+                        <a:t>11.95</a:t>
+                      </a:r>
+                    </a:p>
+                  </a:txBody>
+                  <a:tcPr>
+                    <a:solidFill>
+                      <a:srgbClr val="FCFCFB"/>
+                    </a:solidFill>
+                  </a:tcPr>
+                </a:tc>
+                <a:tc>
+                  <a:txBody>
+                    <a:bodyPr/>
+                    <a:lstStyle/>
+                    <a:p>
+                      <a:pPr algn="r"/>
+                      <a:r>
+                        <a:rPr sz="1250" b="1">
+                          <a:solidFill>
+                            <a:srgbClr val="26262A"/>
+                          </a:solidFill>
+                          <a:latin typeface="Noto Sans CJK TC"/>
+                        </a:rPr>
+                        <a:t>2.48×</a:t>
+                      </a:r>
+                    </a:p>
+                  </a:txBody>
+                  <a:tcPr>
+                    <a:solidFill>
+                      <a:srgbClr val="FCFCFB"/>
+                    </a:solidFill>
+                  </a:tcPr>
+                </a:tc>
+              </a:tr>
+              <a:tr h="333756">
+                <a:tc>
+                  <a:txBody>
+                    <a:bodyPr/>
+                    <a:lstStyle/>
+                    <a:p>
+                      <a:pPr algn="l"/>
+                      <a:r>
+                        <a:rPr sz="1250" b="0">
                           <a:solidFill>
                             <a:srgbClr val="26262A"/>
                           </a:solidFill>
@@ -3873,7 +4155,7 @@
                     <a:p>
                       <a:pPr algn="r"/>
                       <a:r>
-                        <a:rPr sz="1300" b="0">
+                        <a:rPr sz="1250" b="0">
                           <a:solidFill>
                             <a:srgbClr val="26262A"/>
                           </a:solidFill>
@@ -3896,7 +4178,7 @@
                     <a:p>
                       <a:pPr algn="r"/>
                       <a:r>
-                        <a:rPr sz="1300" b="0">
+                        <a:rPr sz="1250" b="0">
                           <a:solidFill>
                             <a:srgbClr val="26262A"/>
                           </a:solidFill>
@@ -3919,7 +4201,7 @@
                     <a:p>
                       <a:pPr algn="r"/>
                       <a:r>
-                        <a:rPr sz="1300" b="1">
+                        <a:rPr sz="1250" b="1">
                           <a:solidFill>
                             <a:srgbClr val="26262A"/>
                           </a:solidFill>
@@ -3936,7 +4218,7 @@
                   </a:tcPr>
                 </a:tc>
               </a:tr>
-              <a:tr h="384048">
+              <a:tr h="333756">
                 <a:tc>
                   <a:txBody>
                     <a:bodyPr/>
@@ -3944,7 +4226,7 @@
                     <a:p>
                       <a:pPr algn="l"/>
                       <a:r>
-                        <a:rPr sz="1300" b="0">
+                        <a:rPr sz="1250" b="0">
                           <a:solidFill>
                             <a:srgbClr val="26262A"/>
                           </a:solidFill>
@@ -3967,7 +4249,7 @@
                     <a:p>
                       <a:pPr algn="r"/>
                       <a:r>
-                        <a:rPr sz="1300" b="0">
+                        <a:rPr sz="1250" b="0">
                           <a:solidFill>
                             <a:srgbClr val="26262A"/>
                           </a:solidFill>
@@ -3990,7 +4272,7 @@
                     <a:p>
                       <a:pPr algn="r"/>
                       <a:r>
-                        <a:rPr sz="1300" b="0">
+                        <a:rPr sz="1250" b="0">
                           <a:solidFill>
                             <a:srgbClr val="26262A"/>
                           </a:solidFill>
@@ -4013,7 +4295,7 @@
                     <a:p>
                       <a:pPr algn="r"/>
                       <a:r>
-                        <a:rPr sz="1300" b="1">
+                        <a:rPr sz="1250" b="1">
                           <a:solidFill>
                             <a:srgbClr val="1BAF7A"/>
                           </a:solidFill>
@@ -4030,7 +4312,7 @@
                   </a:tcPr>
                 </a:tc>
               </a:tr>
-              <a:tr h="384048">
+              <a:tr h="333756">
                 <a:tc>
                   <a:txBody>
                     <a:bodyPr/>
@@ -4038,7 +4320,7 @@
                     <a:p>
                       <a:pPr algn="l"/>
                       <a:r>
-                        <a:rPr sz="1300" b="0">
+                        <a:rPr sz="1250" b="0">
                           <a:solidFill>
                             <a:srgbClr val="26262A"/>
                           </a:solidFill>
@@ -4061,7 +4343,7 @@
                     <a:p>
                       <a:pPr algn="r"/>
                       <a:r>
-                        <a:rPr sz="1300" b="0">
+                        <a:rPr sz="1250" b="0">
                           <a:solidFill>
                             <a:srgbClr val="26262A"/>
                           </a:solidFill>
@@ -4084,7 +4366,7 @@
                     <a:p>
                       <a:pPr algn="r"/>
                       <a:r>
-                        <a:rPr sz="1300" b="0">
+                        <a:rPr sz="1250" b="0">
                           <a:solidFill>
                             <a:srgbClr val="26262A"/>
                           </a:solidFill>
@@ -4107,7 +4389,7 @@
                     <a:p>
                       <a:pPr algn="r"/>
                       <a:r>
-                        <a:rPr sz="1300" b="1">
+                        <a:rPr sz="1250" b="1">
                           <a:solidFill>
                             <a:srgbClr val="1BAF7A"/>
                           </a:solidFill>
@@ -4124,7 +4406,7 @@
                   </a:tcPr>
                 </a:tc>
               </a:tr>
-              <a:tr h="384048">
+              <a:tr h="333756">
                 <a:tc>
                   <a:txBody>
                     <a:bodyPr/>
@@ -4132,7 +4414,7 @@
                     <a:p>
                       <a:pPr algn="l"/>
                       <a:r>
-                        <a:rPr sz="1300" b="0">
+                        <a:rPr sz="1250" b="0">
                           <a:solidFill>
                             <a:srgbClr val="26262A"/>
                           </a:solidFill>
@@ -4155,7 +4437,7 @@
                     <a:p>
                       <a:pPr algn="r"/>
                       <a:r>
-                        <a:rPr sz="1300" b="0">
+                        <a:rPr sz="1250" b="0">
                           <a:solidFill>
                             <a:srgbClr val="26262A"/>
                           </a:solidFill>
@@ -4178,7 +4460,7 @@
                     <a:p>
                       <a:pPr algn="r"/>
                       <a:r>
-                        <a:rPr sz="1300" b="0">
+                        <a:rPr sz="1250" b="0">
                           <a:solidFill>
                             <a:srgbClr val="26262A"/>
                           </a:solidFill>
@@ -4201,7 +4483,7 @@
                     <a:p>
                       <a:pPr algn="r"/>
                       <a:r>
-                        <a:rPr sz="1300" b="0">
+                        <a:rPr sz="1250" b="0">
                           <a:solidFill>
                             <a:srgbClr val="26262A"/>
                           </a:solidFill>
@@ -4218,7 +4500,7 @@
                   </a:tcPr>
                 </a:tc>
               </a:tr>
-              <a:tr h="384048">
+              <a:tr h="333756">
                 <a:tc>
                   <a:txBody>
                     <a:bodyPr/>
@@ -4226,7 +4508,7 @@
                     <a:p>
                       <a:pPr algn="l"/>
                       <a:r>
-                        <a:rPr sz="1300" b="0">
+                        <a:rPr sz="1250" b="0">
                           <a:solidFill>
                             <a:srgbClr val="26262A"/>
                           </a:solidFill>
@@ -4249,7 +4531,7 @@
                     <a:p>
                       <a:pPr algn="r"/>
                       <a:r>
-                        <a:rPr sz="1300" b="0">
+                        <a:rPr sz="1250" b="0">
                           <a:solidFill>
                             <a:srgbClr val="26262A"/>
                           </a:solidFill>
@@ -4272,7 +4554,7 @@
                     <a:p>
                       <a:pPr algn="r"/>
                       <a:r>
-                        <a:rPr sz="1300" b="0">
+                        <a:rPr sz="1250" b="0">
                           <a:solidFill>
                             <a:srgbClr val="26262A"/>
                           </a:solidFill>
@@ -4295,7 +4577,7 @@
                     <a:p>
                       <a:pPr algn="r"/>
                       <a:r>
-                        <a:rPr sz="1300" b="0">
+                        <a:rPr sz="1250" b="0">
                           <a:solidFill>
                             <a:srgbClr val="26262A"/>
                           </a:solidFill>
@@ -4324,7 +4606,7 @@
         </p:nvSpPr>
         <p:spPr>
           <a:xfrm>
-            <a:off x="822960" y="5605272"/>
+            <a:off x="822960" y="6016752"/>
             <a:ext cx="10515600" cy="731520"/>
           </a:xfrm>
           <a:prstGeom prst="rect">
@@ -4366,7 +4648,23 @@
                 </a:solidFill>
                 <a:latin typeface="Noto Sans CJK TC"/>
               </a:rPr>
-              <a:t>「端點 / 本機」欄位：延遲類為端點慢幾倍，吞吐類為端點剩幾成。</a:t>
+              <a:t>「端點 / 本機」欄位：延遲類為端點慢幾倍，吞吐類為本機是端點的幾倍。</a:t>
+            </a:r>
+          </a:p>
+          <a:p>
+            <a:pPr algn="l">
+              <a:spcAft>
+                <a:spcPts val="300"/>
+              </a:spcAft>
+            </a:pPr>
+            <a:r>
+              <a:rPr sz="1100" b="0">
+                <a:solidFill>
+                  <a:srgbClr val="6B6B70"/>
+                </a:solidFill>
+                <a:latin typeface="Noto Sans CJK TC"/>
+              </a:rPr>
+              <a:t>Prefill / Decode 為 per-user 速率；Output throughput, system 為伺服器整體輸出。</a:t>
             </a:r>
           </a:p>
         </p:txBody>
@@ -4528,8 +4826,8 @@
           <p:nvPr/>
         </p:nvGraphicFramePr>
         <p:xfrm>
-          <a:off x="822960" y="1920240"/>
-          <a:ext cx="10515600" cy="3456432"/>
+          <a:off x="822960" y="1828800"/>
+          <a:ext cx="10515600" cy="4005072"/>
         </p:xfrm>
         <a:graphic>
           <a:graphicData uri="http://schemas.openxmlformats.org/drawingml/2006/table">
@@ -4543,7 +4841,7 @@
                 <a:gridCol w="2651760"/>
                 <a:gridCol w="1554480"/>
               </a:tblGrid>
-              <a:tr h="384048">
+              <a:tr h="333756">
                 <a:tc>
                   <a:txBody>
                     <a:bodyPr/>
@@ -4637,7 +4935,7 @@
                   </a:tcPr>
                 </a:tc>
               </a:tr>
-              <a:tr h="384048">
+              <a:tr h="333756">
                 <a:tc>
                   <a:txBody>
                     <a:bodyPr/>
@@ -4645,7 +4943,7 @@
                     <a:p>
                       <a:pPr algn="l"/>
                       <a:r>
-                        <a:rPr sz="1300" b="0">
+                        <a:rPr sz="1250" b="0">
                           <a:solidFill>
                             <a:srgbClr val="26262A"/>
                           </a:solidFill>
@@ -4668,7 +4966,7 @@
                     <a:p>
                       <a:pPr algn="r"/>
                       <a:r>
-                        <a:rPr sz="1300" b="0">
+                        <a:rPr sz="1250" b="0">
                           <a:solidFill>
                             <a:srgbClr val="26262A"/>
                           </a:solidFill>
@@ -4691,7 +4989,7 @@
                     <a:p>
                       <a:pPr algn="r"/>
                       <a:r>
-                        <a:rPr sz="1300" b="0">
+                        <a:rPr sz="1250" b="0">
                           <a:solidFill>
                             <a:srgbClr val="26262A"/>
                           </a:solidFill>
@@ -4714,7 +5012,7 @@
                     <a:p>
                       <a:pPr algn="r"/>
                       <a:r>
-                        <a:rPr sz="1300" b="1">
+                        <a:rPr sz="1250" b="1">
                           <a:solidFill>
                             <a:srgbClr val="26262A"/>
                           </a:solidFill>
@@ -4731,7 +5029,7 @@
                   </a:tcPr>
                 </a:tc>
               </a:tr>
-              <a:tr h="384048">
+              <a:tr h="333756">
                 <a:tc>
                   <a:txBody>
                     <a:bodyPr/>
@@ -4739,7 +5037,7 @@
                     <a:p>
                       <a:pPr algn="l"/>
                       <a:r>
-                        <a:rPr sz="1300" b="0">
+                        <a:rPr sz="1250" b="0">
                           <a:solidFill>
                             <a:srgbClr val="26262A"/>
                           </a:solidFill>
@@ -4762,7 +5060,7 @@
                     <a:p>
                       <a:pPr algn="r"/>
                       <a:r>
-                        <a:rPr sz="1300" b="0">
+                        <a:rPr sz="1250" b="0">
                           <a:solidFill>
                             <a:srgbClr val="26262A"/>
                           </a:solidFill>
@@ -4785,7 +5083,7 @@
                     <a:p>
                       <a:pPr algn="r"/>
                       <a:r>
-                        <a:rPr sz="1300" b="0">
+                        <a:rPr sz="1250" b="0">
                           <a:solidFill>
                             <a:srgbClr val="26262A"/>
                           </a:solidFill>
@@ -4808,7 +5106,7 @@
                     <a:p>
                       <a:pPr algn="r"/>
                       <a:r>
-                        <a:rPr sz="1300" b="1">
+                        <a:rPr sz="1250" b="1">
                           <a:solidFill>
                             <a:srgbClr val="26262A"/>
                           </a:solidFill>
@@ -4825,7 +5123,7 @@
                   </a:tcPr>
                 </a:tc>
               </a:tr>
-              <a:tr h="384048">
+              <a:tr h="333756">
                 <a:tc>
                   <a:txBody>
                     <a:bodyPr/>
@@ -4833,7 +5131,7 @@
                     <a:p>
                       <a:pPr algn="l"/>
                       <a:r>
-                        <a:rPr sz="1300" b="0">
+                        <a:rPr sz="1250" b="0">
                           <a:solidFill>
                             <a:srgbClr val="26262A"/>
                           </a:solidFill>
@@ -4856,7 +5154,7 @@
                     <a:p>
                       <a:pPr algn="r"/>
                       <a:r>
-                        <a:rPr sz="1300" b="0">
+                        <a:rPr sz="1250" b="0">
                           <a:solidFill>
                             <a:srgbClr val="26262A"/>
                           </a:solidFill>
@@ -4879,7 +5177,7 @@
                     <a:p>
                       <a:pPr algn="r"/>
                       <a:r>
-                        <a:rPr sz="1300" b="0">
+                        <a:rPr sz="1250" b="0">
                           <a:solidFill>
                             <a:srgbClr val="26262A"/>
                           </a:solidFill>
@@ -4902,7 +5200,7 @@
                     <a:p>
                       <a:pPr algn="r"/>
                       <a:r>
-                        <a:rPr sz="1300" b="1">
+                        <a:rPr sz="1250" b="1">
                           <a:solidFill>
                             <a:srgbClr val="26262A"/>
                           </a:solidFill>
@@ -4919,7 +5217,7 @@
                   </a:tcPr>
                 </a:tc>
               </a:tr>
-              <a:tr h="384048">
+              <a:tr h="333756">
                 <a:tc>
                   <a:txBody>
                     <a:bodyPr/>
@@ -4927,7 +5225,289 @@
                     <a:p>
                       <a:pPr algn="l"/>
                       <a:r>
-                        <a:rPr sz="1300" b="0">
+                        <a:rPr sz="1250" b="0">
+                          <a:solidFill>
+                            <a:srgbClr val="26262A"/>
+                          </a:solidFill>
+                          <a:latin typeface="Noto Sans CJK TC"/>
+                        </a:rPr>
+                        <a:t>Prefill throughput (tok/s/user)</a:t>
+                      </a:r>
+                    </a:p>
+                  </a:txBody>
+                  <a:tcPr>
+                    <a:solidFill>
+                      <a:srgbClr val="FCFCFB"/>
+                    </a:solidFill>
+                  </a:tcPr>
+                </a:tc>
+                <a:tc>
+                  <a:txBody>
+                    <a:bodyPr/>
+                    <a:lstStyle/>
+                    <a:p>
+                      <a:pPr algn="r"/>
+                      <a:r>
+                        <a:rPr sz="1250" b="0">
+                          <a:solidFill>
+                            <a:srgbClr val="26262A"/>
+                          </a:solidFill>
+                          <a:latin typeface="Noto Sans CJK TC"/>
+                        </a:rPr>
+                        <a:t>2,952.8</a:t>
+                      </a:r>
+                    </a:p>
+                  </a:txBody>
+                  <a:tcPr>
+                    <a:solidFill>
+                      <a:srgbClr val="FCFCFB"/>
+                    </a:solidFill>
+                  </a:tcPr>
+                </a:tc>
+                <a:tc>
+                  <a:txBody>
+                    <a:bodyPr/>
+                    <a:lstStyle/>
+                    <a:p>
+                      <a:pPr algn="r"/>
+                      <a:r>
+                        <a:rPr sz="1250" b="0">
+                          <a:solidFill>
+                            <a:srgbClr val="26262A"/>
+                          </a:solidFill>
+                          <a:latin typeface="Noto Sans CJK TC"/>
+                        </a:rPr>
+                        <a:t>40.3</a:t>
+                      </a:r>
+                    </a:p>
+                  </a:txBody>
+                  <a:tcPr>
+                    <a:solidFill>
+                      <a:srgbClr val="FCFCFB"/>
+                    </a:solidFill>
+                  </a:tcPr>
+                </a:tc>
+                <a:tc>
+                  <a:txBody>
+                    <a:bodyPr/>
+                    <a:lstStyle/>
+                    <a:p>
+                      <a:pPr algn="r"/>
+                      <a:r>
+                        <a:rPr sz="1250" b="1">
+                          <a:solidFill>
+                            <a:srgbClr val="26262A"/>
+                          </a:solidFill>
+                          <a:latin typeface="Noto Sans CJK TC"/>
+                        </a:rPr>
+                        <a:t>73.25×</a:t>
+                      </a:r>
+                    </a:p>
+                  </a:txBody>
+                  <a:tcPr>
+                    <a:solidFill>
+                      <a:srgbClr val="FCFCFB"/>
+                    </a:solidFill>
+                  </a:tcPr>
+                </a:tc>
+              </a:tr>
+              <a:tr h="333756">
+                <a:tc>
+                  <a:txBody>
+                    <a:bodyPr/>
+                    <a:lstStyle/>
+                    <a:p>
+                      <a:pPr algn="l"/>
+                      <a:r>
+                        <a:rPr sz="1250" b="0">
+                          <a:solidFill>
+                            <a:srgbClr val="26262A"/>
+                          </a:solidFill>
+                          <a:latin typeface="Noto Sans CJK TC"/>
+                        </a:rPr>
+                        <a:t>Decode throughput (tok/s/user)</a:t>
+                      </a:r>
+                    </a:p>
+                  </a:txBody>
+                  <a:tcPr>
+                    <a:solidFill>
+                      <a:srgbClr val="FCFCFB"/>
+                    </a:solidFill>
+                  </a:tcPr>
+                </a:tc>
+                <a:tc>
+                  <a:txBody>
+                    <a:bodyPr/>
+                    <a:lstStyle/>
+                    <a:p>
+                      <a:pPr algn="r"/>
+                      <a:r>
+                        <a:rPr sz="1250" b="0">
+                          <a:solidFill>
+                            <a:srgbClr val="26262A"/>
+                          </a:solidFill>
+                          <a:latin typeface="Noto Sans CJK TC"/>
+                        </a:rPr>
+                        <a:t>23.09</a:t>
+                      </a:r>
+                    </a:p>
+                  </a:txBody>
+                  <a:tcPr>
+                    <a:solidFill>
+                      <a:srgbClr val="FCFCFB"/>
+                    </a:solidFill>
+                  </a:tcPr>
+                </a:tc>
+                <a:tc>
+                  <a:txBody>
+                    <a:bodyPr/>
+                    <a:lstStyle/>
+                    <a:p>
+                      <a:pPr algn="r"/>
+                      <a:r>
+                        <a:rPr sz="1250" b="0">
+                          <a:solidFill>
+                            <a:srgbClr val="26262A"/>
+                          </a:solidFill>
+                          <a:latin typeface="Noto Sans CJK TC"/>
+                        </a:rPr>
+                        <a:t>7.38</a:t>
+                      </a:r>
+                    </a:p>
+                  </a:txBody>
+                  <a:tcPr>
+                    <a:solidFill>
+                      <a:srgbClr val="FCFCFB"/>
+                    </a:solidFill>
+                  </a:tcPr>
+                </a:tc>
+                <a:tc>
+                  <a:txBody>
+                    <a:bodyPr/>
+                    <a:lstStyle/>
+                    <a:p>
+                      <a:pPr algn="r"/>
+                      <a:r>
+                        <a:rPr sz="1250" b="1">
+                          <a:solidFill>
+                            <a:srgbClr val="26262A"/>
+                          </a:solidFill>
+                          <a:latin typeface="Noto Sans CJK TC"/>
+                        </a:rPr>
+                        <a:t>3.13×</a:t>
+                      </a:r>
+                    </a:p>
+                  </a:txBody>
+                  <a:tcPr>
+                    <a:solidFill>
+                      <a:srgbClr val="FCFCFB"/>
+                    </a:solidFill>
+                  </a:tcPr>
+                </a:tc>
+              </a:tr>
+              <a:tr h="333756">
+                <a:tc>
+                  <a:txBody>
+                    <a:bodyPr/>
+                    <a:lstStyle/>
+                    <a:p>
+                      <a:pPr algn="l"/>
+                      <a:r>
+                        <a:rPr sz="1250" b="0">
+                          <a:solidFill>
+                            <a:srgbClr val="26262A"/>
+                          </a:solidFill>
+                          <a:latin typeface="Noto Sans CJK TC"/>
+                        </a:rPr>
+                        <a:t>Output throughput, system (tok/s)</a:t>
+                      </a:r>
+                    </a:p>
+                  </a:txBody>
+                  <a:tcPr>
+                    <a:solidFill>
+                      <a:srgbClr val="FCFCFB"/>
+                    </a:solidFill>
+                  </a:tcPr>
+                </a:tc>
+                <a:tc>
+                  <a:txBody>
+                    <a:bodyPr/>
+                    <a:lstStyle/>
+                    <a:p>
+                      <a:pPr algn="r"/>
+                      <a:r>
+                        <a:rPr sz="1250" b="0">
+                          <a:solidFill>
+                            <a:srgbClr val="26262A"/>
+                          </a:solidFill>
+                          <a:latin typeface="Noto Sans CJK TC"/>
+                        </a:rPr>
+                        <a:t>44.30</a:t>
+                      </a:r>
+                    </a:p>
+                  </a:txBody>
+                  <a:tcPr>
+                    <a:solidFill>
+                      <a:srgbClr val="FCFCFB"/>
+                    </a:solidFill>
+                  </a:tcPr>
+                </a:tc>
+                <a:tc>
+                  <a:txBody>
+                    <a:bodyPr/>
+                    <a:lstStyle/>
+                    <a:p>
+                      <a:pPr algn="r"/>
+                      <a:r>
+                        <a:rPr sz="1250" b="0">
+                          <a:solidFill>
+                            <a:srgbClr val="26262A"/>
+                          </a:solidFill>
+                          <a:latin typeface="Noto Sans CJK TC"/>
+                        </a:rPr>
+                        <a:t>9.87</a:t>
+                      </a:r>
+                    </a:p>
+                  </a:txBody>
+                  <a:tcPr>
+                    <a:solidFill>
+                      <a:srgbClr val="FCFCFB"/>
+                    </a:solidFill>
+                  </a:tcPr>
+                </a:tc>
+                <a:tc>
+                  <a:txBody>
+                    <a:bodyPr/>
+                    <a:lstStyle/>
+                    <a:p>
+                      <a:pPr algn="r"/>
+                      <a:r>
+                        <a:rPr sz="1250" b="1">
+                          <a:solidFill>
+                            <a:srgbClr val="26262A"/>
+                          </a:solidFill>
+                          <a:latin typeface="Noto Sans CJK TC"/>
+                        </a:rPr>
+                        <a:t>4.49×</a:t>
+                      </a:r>
+                    </a:p>
+                  </a:txBody>
+                  <a:tcPr>
+                    <a:solidFill>
+                      <a:srgbClr val="FCFCFB"/>
+                    </a:solidFill>
+                  </a:tcPr>
+                </a:tc>
+              </a:tr>
+              <a:tr h="333756">
+                <a:tc>
+                  <a:txBody>
+                    <a:bodyPr/>
+                    <a:lstStyle/>
+                    <a:p>
+                      <a:pPr algn="l"/>
+                      <a:r>
+                        <a:rPr sz="1250" b="0">
                           <a:solidFill>
                             <a:srgbClr val="26262A"/>
                           </a:solidFill>
@@ -4950,7 +5530,7 @@
                     <a:p>
                       <a:pPr algn="r"/>
                       <a:r>
-                        <a:rPr sz="1300" b="0">
+                        <a:rPr sz="1250" b="0">
                           <a:solidFill>
                             <a:srgbClr val="26262A"/>
                           </a:solidFill>
@@ -4973,7 +5553,7 @@
                     <a:p>
                       <a:pPr algn="r"/>
                       <a:r>
-                        <a:rPr sz="1300" b="0">
+                        <a:rPr sz="1250" b="0">
                           <a:solidFill>
                             <a:srgbClr val="26262A"/>
                           </a:solidFill>
@@ -4996,7 +5576,7 @@
                     <a:p>
                       <a:pPr algn="r"/>
                       <a:r>
-                        <a:rPr sz="1300" b="1">
+                        <a:rPr sz="1250" b="1">
                           <a:solidFill>
                             <a:srgbClr val="26262A"/>
                           </a:solidFill>
@@ -5013,7 +5593,7 @@
                   </a:tcPr>
                 </a:tc>
               </a:tr>
-              <a:tr h="384048">
+              <a:tr h="333756">
                 <a:tc>
                   <a:txBody>
                     <a:bodyPr/>
@@ -5021,7 +5601,7 @@
                     <a:p>
                       <a:pPr algn="l"/>
                       <a:r>
-                        <a:rPr sz="1300" b="0">
+                        <a:rPr sz="1250" b="0">
                           <a:solidFill>
                             <a:srgbClr val="26262A"/>
                           </a:solidFill>
@@ -5044,7 +5624,7 @@
                     <a:p>
                       <a:pPr algn="r"/>
                       <a:r>
-                        <a:rPr sz="1300" b="0">
+                        <a:rPr sz="1250" b="0">
                           <a:solidFill>
                             <a:srgbClr val="26262A"/>
                           </a:solidFill>
@@ -5067,7 +5647,7 @@
                     <a:p>
                       <a:pPr algn="r"/>
                       <a:r>
-                        <a:rPr sz="1300" b="0">
+                        <a:rPr sz="1250" b="0">
                           <a:solidFill>
                             <a:srgbClr val="26262A"/>
                           </a:solidFill>
@@ -5090,7 +5670,7 @@
                     <a:p>
                       <a:pPr algn="r"/>
                       <a:r>
-                        <a:rPr sz="1300" b="1">
+                        <a:rPr sz="1250" b="1">
                           <a:solidFill>
                             <a:srgbClr val="1BAF7A"/>
                           </a:solidFill>
@@ -5107,7 +5687,7 @@
                   </a:tcPr>
                 </a:tc>
               </a:tr>
-              <a:tr h="384048">
+              <a:tr h="333756">
                 <a:tc>
                   <a:txBody>
                     <a:bodyPr/>
@@ -5115,7 +5695,7 @@
                     <a:p>
                       <a:pPr algn="l"/>
                       <a:r>
-                        <a:rPr sz="1300" b="0">
+                        <a:rPr sz="1250" b="0">
                           <a:solidFill>
                             <a:srgbClr val="26262A"/>
                           </a:solidFill>
@@ -5138,7 +5718,7 @@
                     <a:p>
                       <a:pPr algn="r"/>
                       <a:r>
-                        <a:rPr sz="1300" b="0">
+                        <a:rPr sz="1250" b="0">
                           <a:solidFill>
                             <a:srgbClr val="26262A"/>
                           </a:solidFill>
@@ -5161,7 +5741,7 @@
                     <a:p>
                       <a:pPr algn="r"/>
                       <a:r>
-                        <a:rPr sz="1300" b="0">
+                        <a:rPr sz="1250" b="0">
                           <a:solidFill>
                             <a:srgbClr val="26262A"/>
                           </a:solidFill>
@@ -5184,7 +5764,7 @@
                     <a:p>
                       <a:pPr algn="r"/>
                       <a:r>
-                        <a:rPr sz="1300" b="1">
+                        <a:rPr sz="1250" b="1">
                           <a:solidFill>
                             <a:srgbClr val="1BAF7A"/>
                           </a:solidFill>
@@ -5201,7 +5781,7 @@
                   </a:tcPr>
                 </a:tc>
               </a:tr>
-              <a:tr h="384048">
+              <a:tr h="333756">
                 <a:tc>
                   <a:txBody>
                     <a:bodyPr/>
@@ -5209,7 +5789,7 @@
                     <a:p>
                       <a:pPr algn="l"/>
                       <a:r>
-                        <a:rPr sz="1300" b="0">
+                        <a:rPr sz="1250" b="0">
                           <a:solidFill>
                             <a:srgbClr val="26262A"/>
                           </a:solidFill>
@@ -5232,7 +5812,7 @@
                     <a:p>
                       <a:pPr algn="r"/>
                       <a:r>
-                        <a:rPr sz="1300" b="0">
+                        <a:rPr sz="1250" b="0">
                           <a:solidFill>
                             <a:srgbClr val="26262A"/>
                           </a:solidFill>
@@ -5255,7 +5835,7 @@
                     <a:p>
                       <a:pPr algn="r"/>
                       <a:r>
-                        <a:rPr sz="1300" b="0">
+                        <a:rPr sz="1250" b="0">
                           <a:solidFill>
                             <a:srgbClr val="26262A"/>
                           </a:solidFill>
@@ -5278,7 +5858,7 @@
                     <a:p>
                       <a:pPr algn="r"/>
                       <a:r>
-                        <a:rPr sz="1300" b="0">
+                        <a:rPr sz="1250" b="0">
                           <a:solidFill>
                             <a:srgbClr val="26262A"/>
                           </a:solidFill>
@@ -5295,7 +5875,7 @@
                   </a:tcPr>
                 </a:tc>
               </a:tr>
-              <a:tr h="384048">
+              <a:tr h="333756">
                 <a:tc>
                   <a:txBody>
                     <a:bodyPr/>
@@ -5303,7 +5883,7 @@
                     <a:p>
                       <a:pPr algn="l"/>
                       <a:r>
-                        <a:rPr sz="1300" b="0">
+                        <a:rPr sz="1250" b="0">
                           <a:solidFill>
                             <a:srgbClr val="26262A"/>
                           </a:solidFill>
@@ -5326,7 +5906,7 @@
                     <a:p>
                       <a:pPr algn="r"/>
                       <a:r>
-                        <a:rPr sz="1300" b="0">
+                        <a:rPr sz="1250" b="0">
                           <a:solidFill>
                             <a:srgbClr val="26262A"/>
                           </a:solidFill>
@@ -5349,7 +5929,7 @@
                     <a:p>
                       <a:pPr algn="r"/>
                       <a:r>
-                        <a:rPr sz="1300" b="0">
+                        <a:rPr sz="1250" b="0">
                           <a:solidFill>
                             <a:srgbClr val="26262A"/>
                           </a:solidFill>
@@ -5372,7 +5952,7 @@
                     <a:p>
                       <a:pPr algn="r"/>
                       <a:r>
-                        <a:rPr sz="1300" b="0">
+                        <a:rPr sz="1250" b="0">
                           <a:solidFill>
                             <a:srgbClr val="26262A"/>
                           </a:solidFill>
@@ -5401,7 +5981,7 @@
         </p:nvSpPr>
         <p:spPr>
           <a:xfrm>
-            <a:off x="822960" y="5605272"/>
+            <a:off x="822960" y="6016752"/>
             <a:ext cx="10515600" cy="731520"/>
           </a:xfrm>
           <a:prstGeom prst="rect">
@@ -5443,7 +6023,23 @@
                 </a:solidFill>
                 <a:latin typeface="Noto Sans CJK TC"/>
               </a:rPr>
-              <a:t>「端點 / 本機」欄位：延遲類為端點慢幾倍，吞吐類為端點剩幾成。</a:t>
+              <a:t>「端點 / 本機」欄位：延遲類為端點慢幾倍，吞吐類為本機是端點的幾倍。</a:t>
+            </a:r>
+          </a:p>
+          <a:p>
+            <a:pPr algn="l">
+              <a:spcAft>
+                <a:spcPts val="300"/>
+              </a:spcAft>
+            </a:pPr>
+            <a:r>
+              <a:rPr sz="1100" b="0">
+                <a:solidFill>
+                  <a:srgbClr val="6B6B70"/>
+                </a:solidFill>
+                <a:latin typeface="Noto Sans CJK TC"/>
+              </a:rPr>
+              <a:t>Prefill / Decode 為 per-user 速率；Output throughput, system 為伺服器整體輸出。</a:t>
             </a:r>
           </a:p>
         </p:txBody>
@@ -5605,8 +6201,8 @@
           <p:nvPr/>
         </p:nvGraphicFramePr>
         <p:xfrm>
-          <a:off x="822960" y="1920240"/>
-          <a:ext cx="10515600" cy="3456432"/>
+          <a:off x="822960" y="1828800"/>
+          <a:ext cx="10515600" cy="4005072"/>
         </p:xfrm>
         <a:graphic>
           <a:graphicData uri="http://schemas.openxmlformats.org/drawingml/2006/table">
@@ -5620,7 +6216,7 @@
                 <a:gridCol w="2651760"/>
                 <a:gridCol w="1554480"/>
               </a:tblGrid>
-              <a:tr h="384048">
+              <a:tr h="333756">
                 <a:tc>
                   <a:txBody>
                     <a:bodyPr/>
@@ -5714,7 +6310,7 @@
                   </a:tcPr>
                 </a:tc>
               </a:tr>
-              <a:tr h="384048">
+              <a:tr h="333756">
                 <a:tc>
                   <a:txBody>
                     <a:bodyPr/>
@@ -5722,7 +6318,7 @@
                     <a:p>
                       <a:pPr algn="l"/>
                       <a:r>
-                        <a:rPr sz="1300" b="0">
+                        <a:rPr sz="1250" b="0">
                           <a:solidFill>
                             <a:srgbClr val="26262A"/>
                           </a:solidFill>
@@ -5745,7 +6341,7 @@
                     <a:p>
                       <a:pPr algn="r"/>
                       <a:r>
-                        <a:rPr sz="1300" b="0">
+                        <a:rPr sz="1250" b="0">
                           <a:solidFill>
                             <a:srgbClr val="26262A"/>
                           </a:solidFill>
@@ -5768,7 +6364,7 @@
                     <a:p>
                       <a:pPr algn="r"/>
                       <a:r>
-                        <a:rPr sz="1300" b="0">
+                        <a:rPr sz="1250" b="0">
                           <a:solidFill>
                             <a:srgbClr val="26262A"/>
                           </a:solidFill>
@@ -5791,7 +6387,7 @@
                     <a:p>
                       <a:pPr algn="r"/>
                       <a:r>
-                        <a:rPr sz="1300" b="1">
+                        <a:rPr sz="1250" b="1">
                           <a:solidFill>
                             <a:srgbClr val="26262A"/>
                           </a:solidFill>
@@ -5808,7 +6404,7 @@
                   </a:tcPr>
                 </a:tc>
               </a:tr>
-              <a:tr h="384048">
+              <a:tr h="333756">
                 <a:tc>
                   <a:txBody>
                     <a:bodyPr/>
@@ -5816,7 +6412,7 @@
                     <a:p>
                       <a:pPr algn="l"/>
                       <a:r>
-                        <a:rPr sz="1300" b="0">
+                        <a:rPr sz="1250" b="0">
                           <a:solidFill>
                             <a:srgbClr val="26262A"/>
                           </a:solidFill>
@@ -5839,7 +6435,7 @@
                     <a:p>
                       <a:pPr algn="r"/>
                       <a:r>
-                        <a:rPr sz="1300" b="0">
+                        <a:rPr sz="1250" b="0">
                           <a:solidFill>
                             <a:srgbClr val="26262A"/>
                           </a:solidFill>
@@ -5862,7 +6458,7 @@
                     <a:p>
                       <a:pPr algn="r"/>
                       <a:r>
-                        <a:rPr sz="1300" b="0">
+                        <a:rPr sz="1250" b="0">
                           <a:solidFill>
                             <a:srgbClr val="26262A"/>
                           </a:solidFill>
@@ -5885,7 +6481,7 @@
                     <a:p>
                       <a:pPr algn="r"/>
                       <a:r>
-                        <a:rPr sz="1300" b="1">
+                        <a:rPr sz="1250" b="1">
                           <a:solidFill>
                             <a:srgbClr val="26262A"/>
                           </a:solidFill>
@@ -5902,7 +6498,7 @@
                   </a:tcPr>
                 </a:tc>
               </a:tr>
-              <a:tr h="384048">
+              <a:tr h="333756">
                 <a:tc>
                   <a:txBody>
                     <a:bodyPr/>
@@ -5910,7 +6506,7 @@
                     <a:p>
                       <a:pPr algn="l"/>
                       <a:r>
-                        <a:rPr sz="1300" b="0">
+                        <a:rPr sz="1250" b="0">
                           <a:solidFill>
                             <a:srgbClr val="26262A"/>
                           </a:solidFill>
@@ -5933,7 +6529,7 @@
                     <a:p>
                       <a:pPr algn="r"/>
                       <a:r>
-                        <a:rPr sz="1300" b="0">
+                        <a:rPr sz="1250" b="0">
                           <a:solidFill>
                             <a:srgbClr val="26262A"/>
                           </a:solidFill>
@@ -5956,7 +6552,7 @@
                     <a:p>
                       <a:pPr algn="r"/>
                       <a:r>
-                        <a:rPr sz="1300" b="0">
+                        <a:rPr sz="1250" b="0">
                           <a:solidFill>
                             <a:srgbClr val="26262A"/>
                           </a:solidFill>
@@ -5979,7 +6575,7 @@
                     <a:p>
                       <a:pPr algn="r"/>
                       <a:r>
-                        <a:rPr sz="1300" b="1">
+                        <a:rPr sz="1250" b="1">
                           <a:solidFill>
                             <a:srgbClr val="26262A"/>
                           </a:solidFill>
@@ -5996,7 +6592,7 @@
                   </a:tcPr>
                 </a:tc>
               </a:tr>
-              <a:tr h="384048">
+              <a:tr h="333756">
                 <a:tc>
                   <a:txBody>
                     <a:bodyPr/>
@@ -6004,7 +6600,289 @@
                     <a:p>
                       <a:pPr algn="l"/>
                       <a:r>
-                        <a:rPr sz="1300" b="0">
+                        <a:rPr sz="1250" b="0">
+                          <a:solidFill>
+                            <a:srgbClr val="26262A"/>
+                          </a:solidFill>
+                          <a:latin typeface="Noto Sans CJK TC"/>
+                        </a:rPr>
+                        <a:t>Prefill throughput (tok/s/user)</a:t>
+                      </a:r>
+                    </a:p>
+                  </a:txBody>
+                  <a:tcPr>
+                    <a:solidFill>
+                      <a:srgbClr val="FCFCFB"/>
+                    </a:solidFill>
+                  </a:tcPr>
+                </a:tc>
+                <a:tc>
+                  <a:txBody>
+                    <a:bodyPr/>
+                    <a:lstStyle/>
+                    <a:p>
+                      <a:pPr algn="r"/>
+                      <a:r>
+                        <a:rPr sz="1250" b="0">
+                          <a:solidFill>
+                            <a:srgbClr val="26262A"/>
+                          </a:solidFill>
+                          <a:latin typeface="Noto Sans CJK TC"/>
+                        </a:rPr>
+                        <a:t>5,845.1</a:t>
+                      </a:r>
+                    </a:p>
+                  </a:txBody>
+                  <a:tcPr>
+                    <a:solidFill>
+                      <a:srgbClr val="FCFCFB"/>
+                    </a:solidFill>
+                  </a:tcPr>
+                </a:tc>
+                <a:tc>
+                  <a:txBody>
+                    <a:bodyPr/>
+                    <a:lstStyle/>
+                    <a:p>
+                      <a:pPr algn="r"/>
+                      <a:r>
+                        <a:rPr sz="1250" b="0">
+                          <a:solidFill>
+                            <a:srgbClr val="26262A"/>
+                          </a:solidFill>
+                          <a:latin typeface="Noto Sans CJK TC"/>
+                        </a:rPr>
+                        <a:t>53.9</a:t>
+                      </a:r>
+                    </a:p>
+                  </a:txBody>
+                  <a:tcPr>
+                    <a:solidFill>
+                      <a:srgbClr val="FCFCFB"/>
+                    </a:solidFill>
+                  </a:tcPr>
+                </a:tc>
+                <a:tc>
+                  <a:txBody>
+                    <a:bodyPr/>
+                    <a:lstStyle/>
+                    <a:p>
+                      <a:pPr algn="r"/>
+                      <a:r>
+                        <a:rPr sz="1250" b="1">
+                          <a:solidFill>
+                            <a:srgbClr val="26262A"/>
+                          </a:solidFill>
+                          <a:latin typeface="Noto Sans CJK TC"/>
+                        </a:rPr>
+                        <a:t>108.48×</a:t>
+                      </a:r>
+                    </a:p>
+                  </a:txBody>
+                  <a:tcPr>
+                    <a:solidFill>
+                      <a:srgbClr val="FCFCFB"/>
+                    </a:solidFill>
+                  </a:tcPr>
+                </a:tc>
+              </a:tr>
+              <a:tr h="333756">
+                <a:tc>
+                  <a:txBody>
+                    <a:bodyPr/>
+                    <a:lstStyle/>
+                    <a:p>
+                      <a:pPr algn="l"/>
+                      <a:r>
+                        <a:rPr sz="1250" b="0">
+                          <a:solidFill>
+                            <a:srgbClr val="26262A"/>
+                          </a:solidFill>
+                          <a:latin typeface="Noto Sans CJK TC"/>
+                        </a:rPr>
+                        <a:t>Decode throughput (tok/s/user)</a:t>
+                      </a:r>
+                    </a:p>
+                  </a:txBody>
+                  <a:tcPr>
+                    <a:solidFill>
+                      <a:srgbClr val="FCFCFB"/>
+                    </a:solidFill>
+                  </a:tcPr>
+                </a:tc>
+                <a:tc>
+                  <a:txBody>
+                    <a:bodyPr/>
+                    <a:lstStyle/>
+                    <a:p>
+                      <a:pPr algn="r"/>
+                      <a:r>
+                        <a:rPr sz="1250" b="0">
+                          <a:solidFill>
+                            <a:srgbClr val="26262A"/>
+                          </a:solidFill>
+                          <a:latin typeface="Noto Sans CJK TC"/>
+                        </a:rPr>
+                        <a:t>30.48</a:t>
+                      </a:r>
+                    </a:p>
+                  </a:txBody>
+                  <a:tcPr>
+                    <a:solidFill>
+                      <a:srgbClr val="FCFCFB"/>
+                    </a:solidFill>
+                  </a:tcPr>
+                </a:tc>
+                <a:tc>
+                  <a:txBody>
+                    <a:bodyPr/>
+                    <a:lstStyle/>
+                    <a:p>
+                      <a:pPr algn="r"/>
+                      <a:r>
+                        <a:rPr sz="1250" b="0">
+                          <a:solidFill>
+                            <a:srgbClr val="26262A"/>
+                          </a:solidFill>
+                          <a:latin typeface="Noto Sans CJK TC"/>
+                        </a:rPr>
+                        <a:t>20.12</a:t>
+                      </a:r>
+                    </a:p>
+                  </a:txBody>
+                  <a:tcPr>
+                    <a:solidFill>
+                      <a:srgbClr val="FCFCFB"/>
+                    </a:solidFill>
+                  </a:tcPr>
+                </a:tc>
+                <a:tc>
+                  <a:txBody>
+                    <a:bodyPr/>
+                    <a:lstStyle/>
+                    <a:p>
+                      <a:pPr algn="r"/>
+                      <a:r>
+                        <a:rPr sz="1250" b="1">
+                          <a:solidFill>
+                            <a:srgbClr val="26262A"/>
+                          </a:solidFill>
+                          <a:latin typeface="Noto Sans CJK TC"/>
+                        </a:rPr>
+                        <a:t>1.52×</a:t>
+                      </a:r>
+                    </a:p>
+                  </a:txBody>
+                  <a:tcPr>
+                    <a:solidFill>
+                      <a:srgbClr val="FCFCFB"/>
+                    </a:solidFill>
+                  </a:tcPr>
+                </a:tc>
+              </a:tr>
+              <a:tr h="333756">
+                <a:tc>
+                  <a:txBody>
+                    <a:bodyPr/>
+                    <a:lstStyle/>
+                    <a:p>
+                      <a:pPr algn="l"/>
+                      <a:r>
+                        <a:rPr sz="1250" b="0">
+                          <a:solidFill>
+                            <a:srgbClr val="26262A"/>
+                          </a:solidFill>
+                          <a:latin typeface="Noto Sans CJK TC"/>
+                        </a:rPr>
+                        <a:t>Output throughput, system (tok/s)</a:t>
+                      </a:r>
+                    </a:p>
+                  </a:txBody>
+                  <a:tcPr>
+                    <a:solidFill>
+                      <a:srgbClr val="FCFCFB"/>
+                    </a:solidFill>
+                  </a:tcPr>
+                </a:tc>
+                <a:tc>
+                  <a:txBody>
+                    <a:bodyPr/>
+                    <a:lstStyle/>
+                    <a:p>
+                      <a:pPr algn="r"/>
+                      <a:r>
+                        <a:rPr sz="1250" b="0">
+                          <a:solidFill>
+                            <a:srgbClr val="26262A"/>
+                          </a:solidFill>
+                          <a:latin typeface="Noto Sans CJK TC"/>
+                        </a:rPr>
+                        <a:t>30.23</a:t>
+                      </a:r>
+                    </a:p>
+                  </a:txBody>
+                  <a:tcPr>
+                    <a:solidFill>
+                      <a:srgbClr val="FCFCFB"/>
+                    </a:solidFill>
+                  </a:tcPr>
+                </a:tc>
+                <a:tc>
+                  <a:txBody>
+                    <a:bodyPr/>
+                    <a:lstStyle/>
+                    <a:p>
+                      <a:pPr algn="r"/>
+                      <a:r>
+                        <a:rPr sz="1250" b="0">
+                          <a:solidFill>
+                            <a:srgbClr val="26262A"/>
+                          </a:solidFill>
+                          <a:latin typeface="Noto Sans CJK TC"/>
+                        </a:rPr>
+                        <a:t>12.04</a:t>
+                      </a:r>
+                    </a:p>
+                  </a:txBody>
+                  <a:tcPr>
+                    <a:solidFill>
+                      <a:srgbClr val="FCFCFB"/>
+                    </a:solidFill>
+                  </a:tcPr>
+                </a:tc>
+                <a:tc>
+                  <a:txBody>
+                    <a:bodyPr/>
+                    <a:lstStyle/>
+                    <a:p>
+                      <a:pPr algn="r"/>
+                      <a:r>
+                        <a:rPr sz="1250" b="1">
+                          <a:solidFill>
+                            <a:srgbClr val="26262A"/>
+                          </a:solidFill>
+                          <a:latin typeface="Noto Sans CJK TC"/>
+                        </a:rPr>
+                        <a:t>2.51×</a:t>
+                      </a:r>
+                    </a:p>
+                  </a:txBody>
+                  <a:tcPr>
+                    <a:solidFill>
+                      <a:srgbClr val="FCFCFB"/>
+                    </a:solidFill>
+                  </a:tcPr>
+                </a:tc>
+              </a:tr>
+              <a:tr h="333756">
+                <a:tc>
+                  <a:txBody>
+                    <a:bodyPr/>
+                    <a:lstStyle/>
+                    <a:p>
+                      <a:pPr algn="l"/>
+                      <a:r>
+                        <a:rPr sz="1250" b="0">
                           <a:solidFill>
                             <a:srgbClr val="26262A"/>
                           </a:solidFill>
@@ -6027,7 +6905,7 @@
                     <a:p>
                       <a:pPr algn="r"/>
                       <a:r>
-                        <a:rPr sz="1300" b="0">
+                        <a:rPr sz="1250" b="0">
                           <a:solidFill>
                             <a:srgbClr val="26262A"/>
                           </a:solidFill>
@@ -6050,7 +6928,7 @@
                     <a:p>
                       <a:pPr algn="r"/>
                       <a:r>
-                        <a:rPr sz="1300" b="0">
+                        <a:rPr sz="1250" b="0">
                           <a:solidFill>
                             <a:srgbClr val="26262A"/>
                           </a:solidFill>
@@ -6073,7 +6951,7 @@
                     <a:p>
                       <a:pPr algn="r"/>
                       <a:r>
-                        <a:rPr sz="1300" b="1">
+                        <a:rPr sz="1250" b="1">
                           <a:solidFill>
                             <a:srgbClr val="26262A"/>
                           </a:solidFill>
@@ -6090,7 +6968,7 @@
                   </a:tcPr>
                 </a:tc>
               </a:tr>
-              <a:tr h="384048">
+              <a:tr h="333756">
                 <a:tc>
                   <a:txBody>
                     <a:bodyPr/>
@@ -6098,7 +6976,7 @@
                     <a:p>
                       <a:pPr algn="l"/>
                       <a:r>
-                        <a:rPr sz="1300" b="0">
+                        <a:rPr sz="1250" b="0">
                           <a:solidFill>
                             <a:srgbClr val="26262A"/>
                           </a:solidFill>
@@ -6121,7 +6999,7 @@
                     <a:p>
                       <a:pPr algn="r"/>
                       <a:r>
-                        <a:rPr sz="1300" b="0">
+                        <a:rPr sz="1250" b="0">
                           <a:solidFill>
                             <a:srgbClr val="26262A"/>
                           </a:solidFill>
@@ -6144,7 +7022,7 @@
                     <a:p>
                       <a:pPr algn="r"/>
                       <a:r>
-                        <a:rPr sz="1300" b="0">
+                        <a:rPr sz="1250" b="0">
                           <a:solidFill>
                             <a:srgbClr val="26262A"/>
                           </a:solidFill>
@@ -6167,7 +7045,7 @@
                     <a:p>
                       <a:pPr algn="r"/>
                       <a:r>
-                        <a:rPr sz="1300" b="1">
+                        <a:rPr sz="1250" b="1">
                           <a:solidFill>
                             <a:srgbClr val="1BAF7A"/>
                           </a:solidFill>
@@ -6184,7 +7062,7 @@
                   </a:tcPr>
                 </a:tc>
               </a:tr>
-              <a:tr h="384048">
+              <a:tr h="333756">
                 <a:tc>
                   <a:txBody>
                     <a:bodyPr/>
@@ -6192,7 +7070,7 @@
                     <a:p>
                       <a:pPr algn="l"/>
                       <a:r>
-                        <a:rPr sz="1300" b="0">
+                        <a:rPr sz="1250" b="0">
                           <a:solidFill>
                             <a:srgbClr val="26262A"/>
                           </a:solidFill>
@@ -6215,7 +7093,7 @@
                     <a:p>
                       <a:pPr algn="r"/>
                       <a:r>
-                        <a:rPr sz="1300" b="0">
+                        <a:rPr sz="1250" b="0">
                           <a:solidFill>
                             <a:srgbClr val="26262A"/>
                           </a:solidFill>
@@ -6238,7 +7116,7 @@
                     <a:p>
                       <a:pPr algn="r"/>
                       <a:r>
-                        <a:rPr sz="1300" b="0">
+                        <a:rPr sz="1250" b="0">
                           <a:solidFill>
                             <a:srgbClr val="26262A"/>
                           </a:solidFill>
@@ -6261,7 +7139,7 @@
                     <a:p>
                       <a:pPr algn="r"/>
                       <a:r>
-                        <a:rPr sz="1300" b="1">
+                        <a:rPr sz="1250" b="1">
                           <a:solidFill>
                             <a:srgbClr val="1BAF7A"/>
                           </a:solidFill>
@@ -6278,7 +7156,7 @@
                   </a:tcPr>
                 </a:tc>
               </a:tr>
-              <a:tr h="384048">
+              <a:tr h="333756">
                 <a:tc>
                   <a:txBody>
                     <a:bodyPr/>
@@ -6286,7 +7164,7 @@
                     <a:p>
                       <a:pPr algn="l"/>
                       <a:r>
-                        <a:rPr sz="1300" b="0">
+                        <a:rPr sz="1250" b="0">
                           <a:solidFill>
                             <a:srgbClr val="26262A"/>
                           </a:solidFill>
@@ -6309,7 +7187,7 @@
                     <a:p>
                       <a:pPr algn="r"/>
                       <a:r>
-                        <a:rPr sz="1300" b="0">
+                        <a:rPr sz="1250" b="0">
                           <a:solidFill>
                             <a:srgbClr val="26262A"/>
                           </a:solidFill>
@@ -6332,7 +7210,7 @@
                     <a:p>
                       <a:pPr algn="r"/>
                       <a:r>
-                        <a:rPr sz="1300" b="0">
+                        <a:rPr sz="1250" b="0">
                           <a:solidFill>
                             <a:srgbClr val="26262A"/>
                           </a:solidFill>
@@ -6355,7 +7233,7 @@
                     <a:p>
                       <a:pPr algn="r"/>
                       <a:r>
-                        <a:rPr sz="1300" b="0">
+                        <a:rPr sz="1250" b="0">
                           <a:solidFill>
                             <a:srgbClr val="26262A"/>
                           </a:solidFill>
@@ -6372,7 +7250,7 @@
                   </a:tcPr>
                 </a:tc>
               </a:tr>
-              <a:tr h="384048">
+              <a:tr h="333756">
                 <a:tc>
                   <a:txBody>
                     <a:bodyPr/>
@@ -6380,7 +7258,7 @@
                     <a:p>
                       <a:pPr algn="l"/>
                       <a:r>
-                        <a:rPr sz="1300" b="0">
+                        <a:rPr sz="1250" b="0">
                           <a:solidFill>
                             <a:srgbClr val="26262A"/>
                           </a:solidFill>
@@ -6403,7 +7281,7 @@
                     <a:p>
                       <a:pPr algn="r"/>
                       <a:r>
-                        <a:rPr sz="1300" b="0">
+                        <a:rPr sz="1250" b="0">
                           <a:solidFill>
                             <a:srgbClr val="26262A"/>
                           </a:solidFill>
@@ -6426,7 +7304,7 @@
                     <a:p>
                       <a:pPr algn="r"/>
                       <a:r>
-                        <a:rPr sz="1300" b="0">
+                        <a:rPr sz="1250" b="0">
                           <a:solidFill>
                             <a:srgbClr val="26262A"/>
                           </a:solidFill>
@@ -6449,7 +7327,7 @@
                     <a:p>
                       <a:pPr algn="r"/>
                       <a:r>
-                        <a:rPr sz="1300" b="0">
+                        <a:rPr sz="1250" b="0">
                           <a:solidFill>
                             <a:srgbClr val="26262A"/>
                           </a:solidFill>
@@ -6478,7 +7356,7 @@
         </p:nvSpPr>
         <p:spPr>
           <a:xfrm>
-            <a:off x="822960" y="5605272"/>
+            <a:off x="822960" y="6016752"/>
             <a:ext cx="10515600" cy="731520"/>
           </a:xfrm>
           <a:prstGeom prst="rect">
@@ -6520,7 +7398,23 @@
                 </a:solidFill>
                 <a:latin typeface="Noto Sans CJK TC"/>
               </a:rPr>
-              <a:t>「端點 / 本機」欄位：延遲類為端點慢幾倍，吞吐類為端點剩幾成。</a:t>
+              <a:t>「端點 / 本機」欄位：延遲類為端點慢幾倍，吞吐類為本機是端點的幾倍。</a:t>
+            </a:r>
+          </a:p>
+          <a:p>
+            <a:pPr algn="l">
+              <a:spcAft>
+                <a:spcPts val="300"/>
+              </a:spcAft>
+            </a:pPr>
+            <a:r>
+              <a:rPr sz="1100" b="0">
+                <a:solidFill>
+                  <a:srgbClr val="6B6B70"/>
+                </a:solidFill>
+                <a:latin typeface="Noto Sans CJK TC"/>
+              </a:rPr>
+              <a:t>Prefill / Decode 為 per-user 速率；Output throughput, system 為伺服器整體輸出。</a:t>
             </a:r>
           </a:p>
         </p:txBody>
@@ -6682,8 +7576,8 @@
           <p:nvPr/>
         </p:nvGraphicFramePr>
         <p:xfrm>
-          <a:off x="822960" y="1920240"/>
-          <a:ext cx="10515600" cy="3456432"/>
+          <a:off x="822960" y="1828800"/>
+          <a:ext cx="10515600" cy="4005072"/>
         </p:xfrm>
         <a:graphic>
           <a:graphicData uri="http://schemas.openxmlformats.org/drawingml/2006/table">
@@ -6697,7 +7591,7 @@
                 <a:gridCol w="2651760"/>
                 <a:gridCol w="1554480"/>
               </a:tblGrid>
-              <a:tr h="384048">
+              <a:tr h="333756">
                 <a:tc>
                   <a:txBody>
                     <a:bodyPr/>
@@ -6791,7 +7685,7 @@
                   </a:tcPr>
                 </a:tc>
               </a:tr>
-              <a:tr h="384048">
+              <a:tr h="333756">
                 <a:tc>
                   <a:txBody>
                     <a:bodyPr/>
@@ -6799,7 +7693,7 @@
                     <a:p>
                       <a:pPr algn="l"/>
                       <a:r>
-                        <a:rPr sz="1300" b="0">
+                        <a:rPr sz="1250" b="0">
                           <a:solidFill>
                             <a:srgbClr val="26262A"/>
                           </a:solidFill>
@@ -6822,7 +7716,7 @@
                     <a:p>
                       <a:pPr algn="r"/>
                       <a:r>
-                        <a:rPr sz="1300" b="0">
+                        <a:rPr sz="1250" b="0">
                           <a:solidFill>
                             <a:srgbClr val="26262A"/>
                           </a:solidFill>
@@ -6845,7 +7739,7 @@
                     <a:p>
                       <a:pPr algn="r"/>
                       <a:r>
-                        <a:rPr sz="1300" b="0">
+                        <a:rPr sz="1250" b="0">
                           <a:solidFill>
                             <a:srgbClr val="26262A"/>
                           </a:solidFill>
@@ -6868,7 +7762,7 @@
                     <a:p>
                       <a:pPr algn="r"/>
                       <a:r>
-                        <a:rPr sz="1300" b="1">
+                        <a:rPr sz="1250" b="1">
                           <a:solidFill>
                             <a:srgbClr val="26262A"/>
                           </a:solidFill>
@@ -6885,7 +7779,7 @@
                   </a:tcPr>
                 </a:tc>
               </a:tr>
-              <a:tr h="384048">
+              <a:tr h="333756">
                 <a:tc>
                   <a:txBody>
                     <a:bodyPr/>
@@ -6893,7 +7787,7 @@
                     <a:p>
                       <a:pPr algn="l"/>
                       <a:r>
-                        <a:rPr sz="1300" b="0">
+                        <a:rPr sz="1250" b="0">
                           <a:solidFill>
                             <a:srgbClr val="26262A"/>
                           </a:solidFill>
@@ -6916,7 +7810,7 @@
                     <a:p>
                       <a:pPr algn="r"/>
                       <a:r>
-                        <a:rPr sz="1300" b="0">
+                        <a:rPr sz="1250" b="0">
                           <a:solidFill>
                             <a:srgbClr val="26262A"/>
                           </a:solidFill>
@@ -6939,7 +7833,7 @@
                     <a:p>
                       <a:pPr algn="r"/>
                       <a:r>
-                        <a:rPr sz="1300" b="0">
+                        <a:rPr sz="1250" b="0">
                           <a:solidFill>
                             <a:srgbClr val="26262A"/>
                           </a:solidFill>
@@ -6962,7 +7856,7 @@
                     <a:p>
                       <a:pPr algn="r"/>
                       <a:r>
-                        <a:rPr sz="1300" b="1">
+                        <a:rPr sz="1250" b="1">
                           <a:solidFill>
                             <a:srgbClr val="26262A"/>
                           </a:solidFill>
@@ -6979,7 +7873,7 @@
                   </a:tcPr>
                 </a:tc>
               </a:tr>
-              <a:tr h="384048">
+              <a:tr h="333756">
                 <a:tc>
                   <a:txBody>
                     <a:bodyPr/>
@@ -6987,7 +7881,7 @@
                     <a:p>
                       <a:pPr algn="l"/>
                       <a:r>
-                        <a:rPr sz="1300" b="0">
+                        <a:rPr sz="1250" b="0">
                           <a:solidFill>
                             <a:srgbClr val="26262A"/>
                           </a:solidFill>
@@ -7010,7 +7904,7 @@
                     <a:p>
                       <a:pPr algn="r"/>
                       <a:r>
-                        <a:rPr sz="1300" b="0">
+                        <a:rPr sz="1250" b="0">
                           <a:solidFill>
                             <a:srgbClr val="26262A"/>
                           </a:solidFill>
@@ -7033,7 +7927,7 @@
                     <a:p>
                       <a:pPr algn="r"/>
                       <a:r>
-                        <a:rPr sz="1300" b="0">
+                        <a:rPr sz="1250" b="0">
                           <a:solidFill>
                             <a:srgbClr val="26262A"/>
                           </a:solidFill>
@@ -7056,7 +7950,7 @@
                     <a:p>
                       <a:pPr algn="r"/>
                       <a:r>
-                        <a:rPr sz="1300" b="1">
+                        <a:rPr sz="1250" b="1">
                           <a:solidFill>
                             <a:srgbClr val="26262A"/>
                           </a:solidFill>
@@ -7073,7 +7967,7 @@
                   </a:tcPr>
                 </a:tc>
               </a:tr>
-              <a:tr h="384048">
+              <a:tr h="333756">
                 <a:tc>
                   <a:txBody>
                     <a:bodyPr/>
@@ -7081,7 +7975,289 @@
                     <a:p>
                       <a:pPr algn="l"/>
                       <a:r>
-                        <a:rPr sz="1300" b="0">
+                        <a:rPr sz="1250" b="0">
+                          <a:solidFill>
+                            <a:srgbClr val="26262A"/>
+                          </a:solidFill>
+                          <a:latin typeface="Noto Sans CJK TC"/>
+                        </a:rPr>
+                        <a:t>Prefill throughput (tok/s/user)</a:t>
+                      </a:r>
+                    </a:p>
+                  </a:txBody>
+                  <a:tcPr>
+                    <a:solidFill>
+                      <a:srgbClr val="FCFCFB"/>
+                    </a:solidFill>
+                  </a:tcPr>
+                </a:tc>
+                <a:tc>
+                  <a:txBody>
+                    <a:bodyPr/>
+                    <a:lstStyle/>
+                    <a:p>
+                      <a:pPr algn="r"/>
+                      <a:r>
+                        <a:rPr sz="1250" b="0">
+                          <a:solidFill>
+                            <a:srgbClr val="26262A"/>
+                          </a:solidFill>
+                          <a:latin typeface="Noto Sans CJK TC"/>
+                        </a:rPr>
+                        <a:t>5,512.9</a:t>
+                      </a:r>
+                    </a:p>
+                  </a:txBody>
+                  <a:tcPr>
+                    <a:solidFill>
+                      <a:srgbClr val="FCFCFB"/>
+                    </a:solidFill>
+                  </a:tcPr>
+                </a:tc>
+                <a:tc>
+                  <a:txBody>
+                    <a:bodyPr/>
+                    <a:lstStyle/>
+                    <a:p>
+                      <a:pPr algn="r"/>
+                      <a:r>
+                        <a:rPr sz="1250" b="0">
+                          <a:solidFill>
+                            <a:srgbClr val="26262A"/>
+                          </a:solidFill>
+                          <a:latin typeface="Noto Sans CJK TC"/>
+                        </a:rPr>
+                        <a:t>130.9</a:t>
+                      </a:r>
+                    </a:p>
+                  </a:txBody>
+                  <a:tcPr>
+                    <a:solidFill>
+                      <a:srgbClr val="FCFCFB"/>
+                    </a:solidFill>
+                  </a:tcPr>
+                </a:tc>
+                <a:tc>
+                  <a:txBody>
+                    <a:bodyPr/>
+                    <a:lstStyle/>
+                    <a:p>
+                      <a:pPr algn="r"/>
+                      <a:r>
+                        <a:rPr sz="1250" b="1">
+                          <a:solidFill>
+                            <a:srgbClr val="26262A"/>
+                          </a:solidFill>
+                          <a:latin typeface="Noto Sans CJK TC"/>
+                        </a:rPr>
+                        <a:t>42.12×</a:t>
+                      </a:r>
+                    </a:p>
+                  </a:txBody>
+                  <a:tcPr>
+                    <a:solidFill>
+                      <a:srgbClr val="FCFCFB"/>
+                    </a:solidFill>
+                  </a:tcPr>
+                </a:tc>
+              </a:tr>
+              <a:tr h="333756">
+                <a:tc>
+                  <a:txBody>
+                    <a:bodyPr/>
+                    <a:lstStyle/>
+                    <a:p>
+                      <a:pPr algn="l"/>
+                      <a:r>
+                        <a:rPr sz="1250" b="0">
+                          <a:solidFill>
+                            <a:srgbClr val="26262A"/>
+                          </a:solidFill>
+                          <a:latin typeface="Noto Sans CJK TC"/>
+                        </a:rPr>
+                        <a:t>Decode throughput (tok/s/user)</a:t>
+                      </a:r>
+                    </a:p>
+                  </a:txBody>
+                  <a:tcPr>
+                    <a:solidFill>
+                      <a:srgbClr val="FCFCFB"/>
+                    </a:solidFill>
+                  </a:tcPr>
+                </a:tc>
+                <a:tc>
+                  <a:txBody>
+                    <a:bodyPr/>
+                    <a:lstStyle/>
+                    <a:p>
+                      <a:pPr algn="r"/>
+                      <a:r>
+                        <a:rPr sz="1250" b="0">
+                          <a:solidFill>
+                            <a:srgbClr val="26262A"/>
+                          </a:solidFill>
+                          <a:latin typeface="Noto Sans CJK TC"/>
+                        </a:rPr>
+                        <a:t>30.02</a:t>
+                      </a:r>
+                    </a:p>
+                  </a:txBody>
+                  <a:tcPr>
+                    <a:solidFill>
+                      <a:srgbClr val="FCFCFB"/>
+                    </a:solidFill>
+                  </a:tcPr>
+                </a:tc>
+                <a:tc>
+                  <a:txBody>
+                    <a:bodyPr/>
+                    <a:lstStyle/>
+                    <a:p>
+                      <a:pPr algn="r"/>
+                      <a:r>
+                        <a:rPr sz="1250" b="0">
+                          <a:solidFill>
+                            <a:srgbClr val="26262A"/>
+                          </a:solidFill>
+                          <a:latin typeface="Noto Sans CJK TC"/>
+                        </a:rPr>
+                        <a:t>17.54</a:t>
+                      </a:r>
+                    </a:p>
+                  </a:txBody>
+                  <a:tcPr>
+                    <a:solidFill>
+                      <a:srgbClr val="FCFCFB"/>
+                    </a:solidFill>
+                  </a:tcPr>
+                </a:tc>
+                <a:tc>
+                  <a:txBody>
+                    <a:bodyPr/>
+                    <a:lstStyle/>
+                    <a:p>
+                      <a:pPr algn="r"/>
+                      <a:r>
+                        <a:rPr sz="1250" b="1">
+                          <a:solidFill>
+                            <a:srgbClr val="26262A"/>
+                          </a:solidFill>
+                          <a:latin typeface="Noto Sans CJK TC"/>
+                        </a:rPr>
+                        <a:t>1.71×</a:t>
+                      </a:r>
+                    </a:p>
+                  </a:txBody>
+                  <a:tcPr>
+                    <a:solidFill>
+                      <a:srgbClr val="FCFCFB"/>
+                    </a:solidFill>
+                  </a:tcPr>
+                </a:tc>
+              </a:tr>
+              <a:tr h="333756">
+                <a:tc>
+                  <a:txBody>
+                    <a:bodyPr/>
+                    <a:lstStyle/>
+                    <a:p>
+                      <a:pPr algn="l"/>
+                      <a:r>
+                        <a:rPr sz="1250" b="0">
+                          <a:solidFill>
+                            <a:srgbClr val="26262A"/>
+                          </a:solidFill>
+                          <a:latin typeface="Noto Sans CJK TC"/>
+                        </a:rPr>
+                        <a:t>Output throughput, system (tok/s)</a:t>
+                      </a:r>
+                    </a:p>
+                  </a:txBody>
+                  <a:tcPr>
+                    <a:solidFill>
+                      <a:srgbClr val="FCFCFB"/>
+                    </a:solidFill>
+                  </a:tcPr>
+                </a:tc>
+                <a:tc>
+                  <a:txBody>
+                    <a:bodyPr/>
+                    <a:lstStyle/>
+                    <a:p>
+                      <a:pPr algn="r"/>
+                      <a:r>
+                        <a:rPr sz="1250" b="0">
+                          <a:solidFill>
+                            <a:srgbClr val="26262A"/>
+                          </a:solidFill>
+                          <a:latin typeface="Noto Sans CJK TC"/>
+                        </a:rPr>
+                        <a:t>28.88</a:t>
+                      </a:r>
+                    </a:p>
+                  </a:txBody>
+                  <a:tcPr>
+                    <a:solidFill>
+                      <a:srgbClr val="FCFCFB"/>
+                    </a:solidFill>
+                  </a:tcPr>
+                </a:tc>
+                <a:tc>
+                  <a:txBody>
+                    <a:bodyPr/>
+                    <a:lstStyle/>
+                    <a:p>
+                      <a:pPr algn="r"/>
+                      <a:r>
+                        <a:rPr sz="1250" b="0">
+                          <a:solidFill>
+                            <a:srgbClr val="26262A"/>
+                          </a:solidFill>
+                          <a:latin typeface="Noto Sans CJK TC"/>
+                        </a:rPr>
+                        <a:t>7.45</a:t>
+                      </a:r>
+                    </a:p>
+                  </a:txBody>
+                  <a:tcPr>
+                    <a:solidFill>
+                      <a:srgbClr val="FCFCFB"/>
+                    </a:solidFill>
+                  </a:tcPr>
+                </a:tc>
+                <a:tc>
+                  <a:txBody>
+                    <a:bodyPr/>
+                    <a:lstStyle/>
+                    <a:p>
+                      <a:pPr algn="r"/>
+                      <a:r>
+                        <a:rPr sz="1250" b="1">
+                          <a:solidFill>
+                            <a:srgbClr val="26262A"/>
+                          </a:solidFill>
+                          <a:latin typeface="Noto Sans CJK TC"/>
+                        </a:rPr>
+                        <a:t>3.88×</a:t>
+                      </a:r>
+                    </a:p>
+                  </a:txBody>
+                  <a:tcPr>
+                    <a:solidFill>
+                      <a:srgbClr val="FCFCFB"/>
+                    </a:solidFill>
+                  </a:tcPr>
+                </a:tc>
+              </a:tr>
+              <a:tr h="333756">
+                <a:tc>
+                  <a:txBody>
+                    <a:bodyPr/>
+                    <a:lstStyle/>
+                    <a:p>
+                      <a:pPr algn="l"/>
+                      <a:r>
+                        <a:rPr sz="1250" b="0">
                           <a:solidFill>
                             <a:srgbClr val="26262A"/>
                           </a:solidFill>
@@ -7104,7 +8280,7 @@
                     <a:p>
                       <a:pPr algn="r"/>
                       <a:r>
-                        <a:rPr sz="1300" b="0">
+                        <a:rPr sz="1250" b="0">
                           <a:solidFill>
                             <a:srgbClr val="26262A"/>
                           </a:solidFill>
@@ -7127,7 +8303,7 @@
                     <a:p>
                       <a:pPr algn="r"/>
                       <a:r>
-                        <a:rPr sz="1300" b="0">
+                        <a:rPr sz="1250" b="0">
                           <a:solidFill>
                             <a:srgbClr val="26262A"/>
                           </a:solidFill>
@@ -7150,7 +8326,7 @@
                     <a:p>
                       <a:pPr algn="r"/>
                       <a:r>
-                        <a:rPr sz="1300" b="1">
+                        <a:rPr sz="1250" b="1">
                           <a:solidFill>
                             <a:srgbClr val="26262A"/>
                           </a:solidFill>
@@ -7167,7 +8343,7 @@
                   </a:tcPr>
                 </a:tc>
               </a:tr>
-              <a:tr h="384048">
+              <a:tr h="333756">
                 <a:tc>
                   <a:txBody>
                     <a:bodyPr/>
@@ -7175,7 +8351,7 @@
                     <a:p>
                       <a:pPr algn="l"/>
                       <a:r>
-                        <a:rPr sz="1300" b="0">
+                        <a:rPr sz="1250" b="0">
                           <a:solidFill>
                             <a:srgbClr val="26262A"/>
                           </a:solidFill>
@@ -7198,7 +8374,7 @@
                     <a:p>
                       <a:pPr algn="r"/>
                       <a:r>
-                        <a:rPr sz="1300" b="0">
+                        <a:rPr sz="1250" b="0">
                           <a:solidFill>
                             <a:srgbClr val="26262A"/>
                           </a:solidFill>
@@ -7221,7 +8397,7 @@
                     <a:p>
                       <a:pPr algn="r"/>
                       <a:r>
-                        <a:rPr sz="1300" b="0">
+                        <a:rPr sz="1250" b="0">
                           <a:solidFill>
                             <a:srgbClr val="26262A"/>
                           </a:solidFill>
@@ -7244,7 +8420,7 @@
                     <a:p>
                       <a:pPr algn="r"/>
                       <a:r>
-                        <a:rPr sz="1300" b="1">
+                        <a:rPr sz="1250" b="1">
                           <a:solidFill>
                             <a:srgbClr val="1BAF7A"/>
                           </a:solidFill>
@@ -7261,7 +8437,7 @@
                   </a:tcPr>
                 </a:tc>
               </a:tr>
-              <a:tr h="384048">
+              <a:tr h="333756">
                 <a:tc>
                   <a:txBody>
                     <a:bodyPr/>
@@ -7269,7 +8445,7 @@
                     <a:p>
                       <a:pPr algn="l"/>
                       <a:r>
-                        <a:rPr sz="1300" b="0">
+                        <a:rPr sz="1250" b="0">
                           <a:solidFill>
                             <a:srgbClr val="26262A"/>
                           </a:solidFill>
@@ -7292,7 +8468,7 @@
                     <a:p>
                       <a:pPr algn="r"/>
                       <a:r>
-                        <a:rPr sz="1300" b="0">
+                        <a:rPr sz="1250" b="0">
                           <a:solidFill>
                             <a:srgbClr val="26262A"/>
                           </a:solidFill>
@@ -7315,7 +8491,7 @@
                     <a:p>
                       <a:pPr algn="r"/>
                       <a:r>
-                        <a:rPr sz="1300" b="0">
+                        <a:rPr sz="1250" b="0">
                           <a:solidFill>
                             <a:srgbClr val="26262A"/>
                           </a:solidFill>
@@ -7338,7 +8514,7 @@
                     <a:p>
                       <a:pPr algn="r"/>
                       <a:r>
-                        <a:rPr sz="1300" b="1">
+                        <a:rPr sz="1250" b="1">
                           <a:solidFill>
                             <a:srgbClr val="1BAF7A"/>
                           </a:solidFill>
@@ -7355,7 +8531,7 @@
                   </a:tcPr>
                 </a:tc>
               </a:tr>
-              <a:tr h="384048">
+              <a:tr h="333756">
                 <a:tc>
                   <a:txBody>
                     <a:bodyPr/>
@@ -7363,7 +8539,7 @@
                     <a:p>
                       <a:pPr algn="l"/>
                       <a:r>
-                        <a:rPr sz="1300" b="0">
+                        <a:rPr sz="1250" b="0">
                           <a:solidFill>
                             <a:srgbClr val="26262A"/>
                           </a:solidFill>
@@ -7386,7 +8562,7 @@
                     <a:p>
                       <a:pPr algn="r"/>
                       <a:r>
-                        <a:rPr sz="1300" b="0">
+                        <a:rPr sz="1250" b="0">
                           <a:solidFill>
                             <a:srgbClr val="26262A"/>
                           </a:solidFill>
@@ -7409,7 +8585,7 @@
                     <a:p>
                       <a:pPr algn="r"/>
                       <a:r>
-                        <a:rPr sz="1300" b="0">
+                        <a:rPr sz="1250" b="0">
                           <a:solidFill>
                             <a:srgbClr val="26262A"/>
                           </a:solidFill>
@@ -7432,7 +8608,7 @@
                     <a:p>
                       <a:pPr algn="r"/>
                       <a:r>
-                        <a:rPr sz="1300" b="0">
+                        <a:rPr sz="1250" b="0">
                           <a:solidFill>
                             <a:srgbClr val="26262A"/>
                           </a:solidFill>
@@ -7449,7 +8625,7 @@
                   </a:tcPr>
                 </a:tc>
               </a:tr>
-              <a:tr h="384048">
+              <a:tr h="333756">
                 <a:tc>
                   <a:txBody>
                     <a:bodyPr/>
@@ -7457,7 +8633,7 @@
                     <a:p>
                       <a:pPr algn="l"/>
                       <a:r>
-                        <a:rPr sz="1300" b="0">
+                        <a:rPr sz="1250" b="0">
                           <a:solidFill>
                             <a:srgbClr val="26262A"/>
                           </a:solidFill>
@@ -7480,7 +8656,7 @@
                     <a:p>
                       <a:pPr algn="r"/>
                       <a:r>
-                        <a:rPr sz="1300" b="0">
+                        <a:rPr sz="1250" b="0">
                           <a:solidFill>
                             <a:srgbClr val="26262A"/>
                           </a:solidFill>
@@ -7503,7 +8679,7 @@
                     <a:p>
                       <a:pPr algn="r"/>
                       <a:r>
-                        <a:rPr sz="1300" b="0">
+                        <a:rPr sz="1250" b="0">
                           <a:solidFill>
                             <a:srgbClr val="26262A"/>
                           </a:solidFill>
@@ -7526,7 +8702,7 @@
                     <a:p>
                       <a:pPr algn="r"/>
                       <a:r>
-                        <a:rPr sz="1300" b="0">
+                        <a:rPr sz="1250" b="0">
                           <a:solidFill>
                             <a:srgbClr val="26262A"/>
                           </a:solidFill>
@@ -7555,7 +8731,7 @@
         </p:nvSpPr>
         <p:spPr>
           <a:xfrm>
-            <a:off x="822960" y="5605272"/>
+            <a:off x="822960" y="6016752"/>
             <a:ext cx="10515600" cy="731520"/>
           </a:xfrm>
           <a:prstGeom prst="rect">
@@ -7597,7 +8773,23 @@
                 </a:solidFill>
                 <a:latin typeface="Noto Sans CJK TC"/>
               </a:rPr>
-              <a:t>「端點 / 本機」欄位：延遲類為端點慢幾倍，吞吐類為端點剩幾成。</a:t>
+              <a:t>「端點 / 本機」欄位：延遲類為端點慢幾倍，吞吐類為本機是端點的幾倍。</a:t>
+            </a:r>
+          </a:p>
+          <a:p>
+            <a:pPr algn="l">
+              <a:spcAft>
+                <a:spcPts val="300"/>
+              </a:spcAft>
+            </a:pPr>
+            <a:r>
+              <a:rPr sz="1100" b="0">
+                <a:solidFill>
+                  <a:srgbClr val="6B6B70"/>
+                </a:solidFill>
+                <a:latin typeface="Noto Sans CJK TC"/>
+              </a:rPr>
+              <a:t>Prefill / Decode 為 per-user 速率；Output throughput, system 為伺服器整體輸出。</a:t>
             </a:r>
           </a:p>
         </p:txBody>
@@ -7759,8 +8951,8 @@
           <p:nvPr/>
         </p:nvGraphicFramePr>
         <p:xfrm>
-          <a:off x="822960" y="1920240"/>
-          <a:ext cx="10515600" cy="3456432"/>
+          <a:off x="822960" y="1828800"/>
+          <a:ext cx="10515600" cy="4005072"/>
         </p:xfrm>
         <a:graphic>
           <a:graphicData uri="http://schemas.openxmlformats.org/drawingml/2006/table">
@@ -7774,7 +8966,7 @@
                 <a:gridCol w="2651760"/>
                 <a:gridCol w="1554480"/>
               </a:tblGrid>
-              <a:tr h="384048">
+              <a:tr h="333756">
                 <a:tc>
                   <a:txBody>
                     <a:bodyPr/>
@@ -7868,7 +9060,7 @@
                   </a:tcPr>
                 </a:tc>
               </a:tr>
-              <a:tr h="384048">
+              <a:tr h="333756">
                 <a:tc>
                   <a:txBody>
                     <a:bodyPr/>
@@ -7876,7 +9068,7 @@
                     <a:p>
                       <a:pPr algn="l"/>
                       <a:r>
-                        <a:rPr sz="1300" b="0">
+                        <a:rPr sz="1250" b="0">
                           <a:solidFill>
                             <a:srgbClr val="26262A"/>
                           </a:solidFill>
@@ -7899,7 +9091,7 @@
                     <a:p>
                       <a:pPr algn="r"/>
                       <a:r>
-                        <a:rPr sz="1300" b="0">
+                        <a:rPr sz="1250" b="0">
                           <a:solidFill>
                             <a:srgbClr val="26262A"/>
                           </a:solidFill>
@@ -7922,7 +9114,7 @@
                     <a:p>
                       <a:pPr algn="r"/>
                       <a:r>
-                        <a:rPr sz="1300" b="0">
+                        <a:rPr sz="1250" b="0">
                           <a:solidFill>
                             <a:srgbClr val="26262A"/>
                           </a:solidFill>
@@ -7945,7 +9137,7 @@
                     <a:p>
                       <a:pPr algn="r"/>
                       <a:r>
-                        <a:rPr sz="1300" b="1">
+                        <a:rPr sz="1250" b="1">
                           <a:solidFill>
                             <a:srgbClr val="26262A"/>
                           </a:solidFill>
@@ -7962,7 +9154,7 @@
                   </a:tcPr>
                 </a:tc>
               </a:tr>
-              <a:tr h="384048">
+              <a:tr h="333756">
                 <a:tc>
                   <a:txBody>
                     <a:bodyPr/>
@@ -7970,7 +9162,7 @@
                     <a:p>
                       <a:pPr algn="l"/>
                       <a:r>
-                        <a:rPr sz="1300" b="0">
+                        <a:rPr sz="1250" b="0">
                           <a:solidFill>
                             <a:srgbClr val="26262A"/>
                           </a:solidFill>
@@ -7993,7 +9185,7 @@
                     <a:p>
                       <a:pPr algn="r"/>
                       <a:r>
-                        <a:rPr sz="1300" b="0">
+                        <a:rPr sz="1250" b="0">
                           <a:solidFill>
                             <a:srgbClr val="26262A"/>
                           </a:solidFill>
@@ -8016,7 +9208,7 @@
                     <a:p>
                       <a:pPr algn="r"/>
                       <a:r>
-                        <a:rPr sz="1300" b="0">
+                        <a:rPr sz="1250" b="0">
                           <a:solidFill>
                             <a:srgbClr val="26262A"/>
                           </a:solidFill>
@@ -8039,7 +9231,7 @@
                     <a:p>
                       <a:pPr algn="r"/>
                       <a:r>
-                        <a:rPr sz="1300" b="1">
+                        <a:rPr sz="1250" b="1">
                           <a:solidFill>
                             <a:srgbClr val="26262A"/>
                           </a:solidFill>
@@ -8056,7 +9248,7 @@
                   </a:tcPr>
                 </a:tc>
               </a:tr>
-              <a:tr h="384048">
+              <a:tr h="333756">
                 <a:tc>
                   <a:txBody>
                     <a:bodyPr/>
@@ -8064,7 +9256,7 @@
                     <a:p>
                       <a:pPr algn="l"/>
                       <a:r>
-                        <a:rPr sz="1300" b="0">
+                        <a:rPr sz="1250" b="0">
                           <a:solidFill>
                             <a:srgbClr val="26262A"/>
                           </a:solidFill>
@@ -8087,7 +9279,7 @@
                     <a:p>
                       <a:pPr algn="r"/>
                       <a:r>
-                        <a:rPr sz="1300" b="0">
+                        <a:rPr sz="1250" b="0">
                           <a:solidFill>
                             <a:srgbClr val="26262A"/>
                           </a:solidFill>
@@ -8110,7 +9302,7 @@
                     <a:p>
                       <a:pPr algn="r"/>
                       <a:r>
-                        <a:rPr sz="1300" b="0">
+                        <a:rPr sz="1250" b="0">
                           <a:solidFill>
                             <a:srgbClr val="26262A"/>
                           </a:solidFill>
@@ -8133,7 +9325,7 @@
                     <a:p>
                       <a:pPr algn="r"/>
                       <a:r>
-                        <a:rPr sz="1300" b="1">
+                        <a:rPr sz="1250" b="1">
                           <a:solidFill>
                             <a:srgbClr val="26262A"/>
                           </a:solidFill>
@@ -8150,7 +9342,7 @@
                   </a:tcPr>
                 </a:tc>
               </a:tr>
-              <a:tr h="384048">
+              <a:tr h="333756">
                 <a:tc>
                   <a:txBody>
                     <a:bodyPr/>
@@ -8158,7 +9350,289 @@
                     <a:p>
                       <a:pPr algn="l"/>
                       <a:r>
-                        <a:rPr sz="1300" b="0">
+                        <a:rPr sz="1250" b="0">
+                          <a:solidFill>
+                            <a:srgbClr val="26262A"/>
+                          </a:solidFill>
+                          <a:latin typeface="Noto Sans CJK TC"/>
+                        </a:rPr>
+                        <a:t>Prefill throughput (tok/s/user)</a:t>
+                      </a:r>
+                    </a:p>
+                  </a:txBody>
+                  <a:tcPr>
+                    <a:solidFill>
+                      <a:srgbClr val="FCFCFB"/>
+                    </a:solidFill>
+                  </a:tcPr>
+                </a:tc>
+                <a:tc>
+                  <a:txBody>
+                    <a:bodyPr/>
+                    <a:lstStyle/>
+                    <a:p>
+                      <a:pPr algn="r"/>
+                      <a:r>
+                        <a:rPr sz="1250" b="0">
+                          <a:solidFill>
+                            <a:srgbClr val="26262A"/>
+                          </a:solidFill>
+                          <a:latin typeface="Noto Sans CJK TC"/>
+                        </a:rPr>
+                        <a:t>6,312.5</a:t>
+                      </a:r>
+                    </a:p>
+                  </a:txBody>
+                  <a:tcPr>
+                    <a:solidFill>
+                      <a:srgbClr val="FCFCFB"/>
+                    </a:solidFill>
+                  </a:tcPr>
+                </a:tc>
+                <a:tc>
+                  <a:txBody>
+                    <a:bodyPr/>
+                    <a:lstStyle/>
+                    <a:p>
+                      <a:pPr algn="r"/>
+                      <a:r>
+                        <a:rPr sz="1250" b="0">
+                          <a:solidFill>
+                            <a:srgbClr val="26262A"/>
+                          </a:solidFill>
+                          <a:latin typeface="Noto Sans CJK TC"/>
+                        </a:rPr>
+                        <a:t>55.7</a:t>
+                      </a:r>
+                    </a:p>
+                  </a:txBody>
+                  <a:tcPr>
+                    <a:solidFill>
+                      <a:srgbClr val="FCFCFB"/>
+                    </a:solidFill>
+                  </a:tcPr>
+                </a:tc>
+                <a:tc>
+                  <a:txBody>
+                    <a:bodyPr/>
+                    <a:lstStyle/>
+                    <a:p>
+                      <a:pPr algn="r"/>
+                      <a:r>
+                        <a:rPr sz="1250" b="1">
+                          <a:solidFill>
+                            <a:srgbClr val="26262A"/>
+                          </a:solidFill>
+                          <a:latin typeface="Noto Sans CJK TC"/>
+                        </a:rPr>
+                        <a:t>113.39×</a:t>
+                      </a:r>
+                    </a:p>
+                  </a:txBody>
+                  <a:tcPr>
+                    <a:solidFill>
+                      <a:srgbClr val="FCFCFB"/>
+                    </a:solidFill>
+                  </a:tcPr>
+                </a:tc>
+              </a:tr>
+              <a:tr h="333756">
+                <a:tc>
+                  <a:txBody>
+                    <a:bodyPr/>
+                    <a:lstStyle/>
+                    <a:p>
+                      <a:pPr algn="l"/>
+                      <a:r>
+                        <a:rPr sz="1250" b="0">
+                          <a:solidFill>
+                            <a:srgbClr val="26262A"/>
+                          </a:solidFill>
+                          <a:latin typeface="Noto Sans CJK TC"/>
+                        </a:rPr>
+                        <a:t>Decode throughput (tok/s/user)</a:t>
+                      </a:r>
+                    </a:p>
+                  </a:txBody>
+                  <a:tcPr>
+                    <a:solidFill>
+                      <a:srgbClr val="FCFCFB"/>
+                    </a:solidFill>
+                  </a:tcPr>
+                </a:tc>
+                <a:tc>
+                  <a:txBody>
+                    <a:bodyPr/>
+                    <a:lstStyle/>
+                    <a:p>
+                      <a:pPr algn="r"/>
+                      <a:r>
+                        <a:rPr sz="1250" b="0">
+                          <a:solidFill>
+                            <a:srgbClr val="26262A"/>
+                          </a:solidFill>
+                          <a:latin typeface="Noto Sans CJK TC"/>
+                        </a:rPr>
+                        <a:t>30.48</a:t>
+                      </a:r>
+                    </a:p>
+                  </a:txBody>
+                  <a:tcPr>
+                    <a:solidFill>
+                      <a:srgbClr val="FCFCFB"/>
+                    </a:solidFill>
+                  </a:tcPr>
+                </a:tc>
+                <a:tc>
+                  <a:txBody>
+                    <a:bodyPr/>
+                    <a:lstStyle/>
+                    <a:p>
+                      <a:pPr algn="r"/>
+                      <a:r>
+                        <a:rPr sz="1250" b="0">
+                          <a:solidFill>
+                            <a:srgbClr val="26262A"/>
+                          </a:solidFill>
+                          <a:latin typeface="Noto Sans CJK TC"/>
+                        </a:rPr>
+                        <a:t>20.22</a:t>
+                      </a:r>
+                    </a:p>
+                  </a:txBody>
+                  <a:tcPr>
+                    <a:solidFill>
+                      <a:srgbClr val="FCFCFB"/>
+                    </a:solidFill>
+                  </a:tcPr>
+                </a:tc>
+                <a:tc>
+                  <a:txBody>
+                    <a:bodyPr/>
+                    <a:lstStyle/>
+                    <a:p>
+                      <a:pPr algn="r"/>
+                      <a:r>
+                        <a:rPr sz="1250" b="1">
+                          <a:solidFill>
+                            <a:srgbClr val="26262A"/>
+                          </a:solidFill>
+                          <a:latin typeface="Noto Sans CJK TC"/>
+                        </a:rPr>
+                        <a:t>1.51×</a:t>
+                      </a:r>
+                    </a:p>
+                  </a:txBody>
+                  <a:tcPr>
+                    <a:solidFill>
+                      <a:srgbClr val="FCFCFB"/>
+                    </a:solidFill>
+                  </a:tcPr>
+                </a:tc>
+              </a:tr>
+              <a:tr h="333756">
+                <a:tc>
+                  <a:txBody>
+                    <a:bodyPr/>
+                    <a:lstStyle/>
+                    <a:p>
+                      <a:pPr algn="l"/>
+                      <a:r>
+                        <a:rPr sz="1250" b="0">
+                          <a:solidFill>
+                            <a:srgbClr val="26262A"/>
+                          </a:solidFill>
+                          <a:latin typeface="Noto Sans CJK TC"/>
+                        </a:rPr>
+                        <a:t>Output throughput, system (tok/s)</a:t>
+                      </a:r>
+                    </a:p>
+                  </a:txBody>
+                  <a:tcPr>
+                    <a:solidFill>
+                      <a:srgbClr val="FCFCFB"/>
+                    </a:solidFill>
+                  </a:tcPr>
+                </a:tc>
+                <a:tc>
+                  <a:txBody>
+                    <a:bodyPr/>
+                    <a:lstStyle/>
+                    <a:p>
+                      <a:pPr algn="r"/>
+                      <a:r>
+                        <a:rPr sz="1250" b="0">
+                          <a:solidFill>
+                            <a:srgbClr val="26262A"/>
+                          </a:solidFill>
+                          <a:latin typeface="Noto Sans CJK TC"/>
+                        </a:rPr>
+                        <a:t>30.24</a:t>
+                      </a:r>
+                    </a:p>
+                  </a:txBody>
+                  <a:tcPr>
+                    <a:solidFill>
+                      <a:srgbClr val="FCFCFB"/>
+                    </a:solidFill>
+                  </a:tcPr>
+                </a:tc>
+                <a:tc>
+                  <a:txBody>
+                    <a:bodyPr/>
+                    <a:lstStyle/>
+                    <a:p>
+                      <a:pPr algn="r"/>
+                      <a:r>
+                        <a:rPr sz="1250" b="0">
+                          <a:solidFill>
+                            <a:srgbClr val="26262A"/>
+                          </a:solidFill>
+                          <a:latin typeface="Noto Sans CJK TC"/>
+                        </a:rPr>
+                        <a:t>12.65</a:t>
+                      </a:r>
+                    </a:p>
+                  </a:txBody>
+                  <a:tcPr>
+                    <a:solidFill>
+                      <a:srgbClr val="FCFCFB"/>
+                    </a:solidFill>
+                  </a:tcPr>
+                </a:tc>
+                <a:tc>
+                  <a:txBody>
+                    <a:bodyPr/>
+                    <a:lstStyle/>
+                    <a:p>
+                      <a:pPr algn="r"/>
+                      <a:r>
+                        <a:rPr sz="1250" b="1">
+                          <a:solidFill>
+                            <a:srgbClr val="26262A"/>
+                          </a:solidFill>
+                          <a:latin typeface="Noto Sans CJK TC"/>
+                        </a:rPr>
+                        <a:t>2.39×</a:t>
+                      </a:r>
+                    </a:p>
+                  </a:txBody>
+                  <a:tcPr>
+                    <a:solidFill>
+                      <a:srgbClr val="FCFCFB"/>
+                    </a:solidFill>
+                  </a:tcPr>
+                </a:tc>
+              </a:tr>
+              <a:tr h="333756">
+                <a:tc>
+                  <a:txBody>
+                    <a:bodyPr/>
+                    <a:lstStyle/>
+                    <a:p>
+                      <a:pPr algn="l"/>
+                      <a:r>
+                        <a:rPr sz="1250" b="0">
                           <a:solidFill>
                             <a:srgbClr val="26262A"/>
                           </a:solidFill>
@@ -8181,7 +9655,7 @@
                     <a:p>
                       <a:pPr algn="r"/>
                       <a:r>
-                        <a:rPr sz="1300" b="0">
+                        <a:rPr sz="1250" b="0">
                           <a:solidFill>
                             <a:srgbClr val="26262A"/>
                           </a:solidFill>
@@ -8204,7 +9678,7 @@
                     <a:p>
                       <a:pPr algn="r"/>
                       <a:r>
-                        <a:rPr sz="1300" b="0">
+                        <a:rPr sz="1250" b="0">
                           <a:solidFill>
                             <a:srgbClr val="26262A"/>
                           </a:solidFill>
@@ -8227,7 +9701,7 @@
                     <a:p>
                       <a:pPr algn="r"/>
                       <a:r>
-                        <a:rPr sz="1300" b="1">
+                        <a:rPr sz="1250" b="1">
                           <a:solidFill>
                             <a:srgbClr val="26262A"/>
                           </a:solidFill>
@@ -8244,7 +9718,7 @@
                   </a:tcPr>
                 </a:tc>
               </a:tr>
-              <a:tr h="384048">
+              <a:tr h="333756">
                 <a:tc>
                   <a:txBody>
                     <a:bodyPr/>
@@ -8252,7 +9726,7 @@
                     <a:p>
                       <a:pPr algn="l"/>
                       <a:r>
-                        <a:rPr sz="1300" b="0">
+                        <a:rPr sz="1250" b="0">
                           <a:solidFill>
                             <a:srgbClr val="26262A"/>
                           </a:solidFill>
@@ -8275,7 +9749,7 @@
                     <a:p>
                       <a:pPr algn="r"/>
                       <a:r>
-                        <a:rPr sz="1300" b="0">
+                        <a:rPr sz="1250" b="0">
                           <a:solidFill>
                             <a:srgbClr val="26262A"/>
                           </a:solidFill>
@@ -8298,7 +9772,7 @@
                     <a:p>
                       <a:pPr algn="r"/>
                       <a:r>
-                        <a:rPr sz="1300" b="0">
+                        <a:rPr sz="1250" b="0">
                           <a:solidFill>
                             <a:srgbClr val="26262A"/>
                           </a:solidFill>
@@ -8321,7 +9795,7 @@
                     <a:p>
                       <a:pPr algn="r"/>
                       <a:r>
-                        <a:rPr sz="1300" b="1">
+                        <a:rPr sz="1250" b="1">
                           <a:solidFill>
                             <a:srgbClr val="1BAF7A"/>
                           </a:solidFill>
@@ -8338,7 +9812,7 @@
                   </a:tcPr>
                 </a:tc>
               </a:tr>
-              <a:tr h="384048">
+              <a:tr h="333756">
                 <a:tc>
                   <a:txBody>
                     <a:bodyPr/>
@@ -8346,7 +9820,7 @@
                     <a:p>
                       <a:pPr algn="l"/>
                       <a:r>
-                        <a:rPr sz="1300" b="0">
+                        <a:rPr sz="1250" b="0">
                           <a:solidFill>
                             <a:srgbClr val="26262A"/>
                           </a:solidFill>
@@ -8369,7 +9843,7 @@
                     <a:p>
                       <a:pPr algn="r"/>
                       <a:r>
-                        <a:rPr sz="1300" b="0">
+                        <a:rPr sz="1250" b="0">
                           <a:solidFill>
                             <a:srgbClr val="26262A"/>
                           </a:solidFill>
@@ -8392,7 +9866,7 @@
                     <a:p>
                       <a:pPr algn="r"/>
                       <a:r>
-                        <a:rPr sz="1300" b="0">
+                        <a:rPr sz="1250" b="0">
                           <a:solidFill>
                             <a:srgbClr val="26262A"/>
                           </a:solidFill>
@@ -8415,7 +9889,7 @@
                     <a:p>
                       <a:pPr algn="r"/>
                       <a:r>
-                        <a:rPr sz="1300" b="1">
+                        <a:rPr sz="1250" b="1">
                           <a:solidFill>
                             <a:srgbClr val="1BAF7A"/>
                           </a:solidFill>
@@ -8432,7 +9906,7 @@
                   </a:tcPr>
                 </a:tc>
               </a:tr>
-              <a:tr h="384048">
+              <a:tr h="333756">
                 <a:tc>
                   <a:txBody>
                     <a:bodyPr/>
@@ -8440,7 +9914,7 @@
                     <a:p>
                       <a:pPr algn="l"/>
                       <a:r>
-                        <a:rPr sz="1300" b="0">
+                        <a:rPr sz="1250" b="0">
                           <a:solidFill>
                             <a:srgbClr val="26262A"/>
                           </a:solidFill>
@@ -8463,7 +9937,7 @@
                     <a:p>
                       <a:pPr algn="r"/>
                       <a:r>
-                        <a:rPr sz="1300" b="0">
+                        <a:rPr sz="1250" b="0">
                           <a:solidFill>
                             <a:srgbClr val="26262A"/>
                           </a:solidFill>
@@ -8486,7 +9960,7 @@
                     <a:p>
                       <a:pPr algn="r"/>
                       <a:r>
-                        <a:rPr sz="1300" b="0">
+                        <a:rPr sz="1250" b="0">
                           <a:solidFill>
                             <a:srgbClr val="26262A"/>
                           </a:solidFill>
@@ -8509,7 +9983,7 @@
                     <a:p>
                       <a:pPr algn="r"/>
                       <a:r>
-                        <a:rPr sz="1300" b="0">
+                        <a:rPr sz="1250" b="0">
                           <a:solidFill>
                             <a:srgbClr val="26262A"/>
                           </a:solidFill>
@@ -8526,7 +10000,7 @@
                   </a:tcPr>
                 </a:tc>
               </a:tr>
-              <a:tr h="384048">
+              <a:tr h="333756">
                 <a:tc>
                   <a:txBody>
                     <a:bodyPr/>
@@ -8534,7 +10008,7 @@
                     <a:p>
                       <a:pPr algn="l"/>
                       <a:r>
-                        <a:rPr sz="1300" b="0">
+                        <a:rPr sz="1250" b="0">
                           <a:solidFill>
                             <a:srgbClr val="26262A"/>
                           </a:solidFill>
@@ -8557,7 +10031,7 @@
                     <a:p>
                       <a:pPr algn="r"/>
                       <a:r>
-                        <a:rPr sz="1300" b="0">
+                        <a:rPr sz="1250" b="0">
                           <a:solidFill>
                             <a:srgbClr val="26262A"/>
                           </a:solidFill>
@@ -8580,7 +10054,7 @@
                     <a:p>
                       <a:pPr algn="r"/>
                       <a:r>
-                        <a:rPr sz="1300" b="0">
+                        <a:rPr sz="1250" b="0">
                           <a:solidFill>
                             <a:srgbClr val="26262A"/>
                           </a:solidFill>
@@ -8603,7 +10077,7 @@
                     <a:p>
                       <a:pPr algn="r"/>
                       <a:r>
-                        <a:rPr sz="1300" b="0">
+                        <a:rPr sz="1250" b="0">
                           <a:solidFill>
                             <a:srgbClr val="26262A"/>
                           </a:solidFill>
@@ -8632,7 +10106,7 @@
         </p:nvSpPr>
         <p:spPr>
           <a:xfrm>
-            <a:off x="822960" y="5605272"/>
+            <a:off x="822960" y="6016752"/>
             <a:ext cx="10515600" cy="731520"/>
           </a:xfrm>
           <a:prstGeom prst="rect">
@@ -8674,7 +10148,23 @@
                 </a:solidFill>
                 <a:latin typeface="Noto Sans CJK TC"/>
               </a:rPr>
-              <a:t>「端點 / 本機」欄位：延遲類為端點慢幾倍，吞吐類為端點剩幾成。</a:t>
+              <a:t>「端點 / 本機」欄位：延遲類為端點慢幾倍，吞吐類為本機是端點的幾倍。</a:t>
+            </a:r>
+          </a:p>
+          <a:p>
+            <a:pPr algn="l">
+              <a:spcAft>
+                <a:spcPts val="300"/>
+              </a:spcAft>
+            </a:pPr>
+            <a:r>
+              <a:rPr sz="1100" b="0">
+                <a:solidFill>
+                  <a:srgbClr val="6B6B70"/>
+                </a:solidFill>
+                <a:latin typeface="Noto Sans CJK TC"/>
+              </a:rPr>
+              <a:t>Prefill / Decode 為 per-user 速率；Output throughput, system 為伺服器整體輸出。</a:t>
             </a:r>
           </a:p>
         </p:txBody>
@@ -8836,8 +10326,8 @@
           <p:nvPr/>
         </p:nvGraphicFramePr>
         <p:xfrm>
-          <a:off x="822960" y="1920240"/>
-          <a:ext cx="10515600" cy="3456432"/>
+          <a:off x="822960" y="1828800"/>
+          <a:ext cx="10515600" cy="4005072"/>
         </p:xfrm>
         <a:graphic>
           <a:graphicData uri="http://schemas.openxmlformats.org/drawingml/2006/table">
@@ -8851,7 +10341,7 @@
                 <a:gridCol w="2651760"/>
                 <a:gridCol w="1554480"/>
               </a:tblGrid>
-              <a:tr h="384048">
+              <a:tr h="333756">
                 <a:tc>
                   <a:txBody>
                     <a:bodyPr/>
@@ -8945,7 +10435,7 @@
                   </a:tcPr>
                 </a:tc>
               </a:tr>
-              <a:tr h="384048">
+              <a:tr h="333756">
                 <a:tc>
                   <a:txBody>
                     <a:bodyPr/>
@@ -8953,7 +10443,7 @@
                     <a:p>
                       <a:pPr algn="l"/>
                       <a:r>
-                        <a:rPr sz="1300" b="0">
+                        <a:rPr sz="1250" b="0">
                           <a:solidFill>
                             <a:srgbClr val="26262A"/>
                           </a:solidFill>
@@ -8976,7 +10466,7 @@
                     <a:p>
                       <a:pPr algn="r"/>
                       <a:r>
-                        <a:rPr sz="1300" b="0">
+                        <a:rPr sz="1250" b="0">
                           <a:solidFill>
                             <a:srgbClr val="26262A"/>
                           </a:solidFill>
@@ -8999,7 +10489,7 @@
                     <a:p>
                       <a:pPr algn="r"/>
                       <a:r>
-                        <a:rPr sz="1300" b="0">
+                        <a:rPr sz="1250" b="0">
                           <a:solidFill>
                             <a:srgbClr val="26262A"/>
                           </a:solidFill>
@@ -9022,7 +10512,7 @@
                     <a:p>
                       <a:pPr algn="r"/>
                       <a:r>
-                        <a:rPr sz="1300" b="1">
+                        <a:rPr sz="1250" b="1">
                           <a:solidFill>
                             <a:srgbClr val="26262A"/>
                           </a:solidFill>
@@ -9039,7 +10529,7 @@
                   </a:tcPr>
                 </a:tc>
               </a:tr>
-              <a:tr h="384048">
+              <a:tr h="333756">
                 <a:tc>
                   <a:txBody>
                     <a:bodyPr/>
@@ -9047,7 +10537,7 @@
                     <a:p>
                       <a:pPr algn="l"/>
                       <a:r>
-                        <a:rPr sz="1300" b="0">
+                        <a:rPr sz="1250" b="0">
                           <a:solidFill>
                             <a:srgbClr val="26262A"/>
                           </a:solidFill>
@@ -9070,7 +10560,7 @@
                     <a:p>
                       <a:pPr algn="r"/>
                       <a:r>
-                        <a:rPr sz="1300" b="0">
+                        <a:rPr sz="1250" b="0">
                           <a:solidFill>
                             <a:srgbClr val="26262A"/>
                           </a:solidFill>
@@ -9093,7 +10583,7 @@
                     <a:p>
                       <a:pPr algn="r"/>
                       <a:r>
-                        <a:rPr sz="1300" b="0">
+                        <a:rPr sz="1250" b="0">
                           <a:solidFill>
                             <a:srgbClr val="26262A"/>
                           </a:solidFill>
@@ -9116,7 +10606,7 @@
                     <a:p>
                       <a:pPr algn="r"/>
                       <a:r>
-                        <a:rPr sz="1300" b="1">
+                        <a:rPr sz="1250" b="1">
                           <a:solidFill>
                             <a:srgbClr val="26262A"/>
                           </a:solidFill>
@@ -9133,7 +10623,7 @@
                   </a:tcPr>
                 </a:tc>
               </a:tr>
-              <a:tr h="384048">
+              <a:tr h="333756">
                 <a:tc>
                   <a:txBody>
                     <a:bodyPr/>
@@ -9141,7 +10631,7 @@
                     <a:p>
                       <a:pPr algn="l"/>
                       <a:r>
-                        <a:rPr sz="1300" b="0">
+                        <a:rPr sz="1250" b="0">
                           <a:solidFill>
                             <a:srgbClr val="26262A"/>
                           </a:solidFill>
@@ -9164,7 +10654,7 @@
                     <a:p>
                       <a:pPr algn="r"/>
                       <a:r>
-                        <a:rPr sz="1300" b="0">
+                        <a:rPr sz="1250" b="0">
                           <a:solidFill>
                             <a:srgbClr val="26262A"/>
                           </a:solidFill>
@@ -9187,7 +10677,7 @@
                     <a:p>
                       <a:pPr algn="r"/>
                       <a:r>
-                        <a:rPr sz="1300" b="0">
+                        <a:rPr sz="1250" b="0">
                           <a:solidFill>
                             <a:srgbClr val="26262A"/>
                           </a:solidFill>
@@ -9210,7 +10700,7 @@
                     <a:p>
                       <a:pPr algn="r"/>
                       <a:r>
-                        <a:rPr sz="1300" b="1">
+                        <a:rPr sz="1250" b="1">
                           <a:solidFill>
                             <a:srgbClr val="26262A"/>
                           </a:solidFill>
@@ -9227,7 +10717,7 @@
                   </a:tcPr>
                 </a:tc>
               </a:tr>
-              <a:tr h="384048">
+              <a:tr h="333756">
                 <a:tc>
                   <a:txBody>
                     <a:bodyPr/>
@@ -9235,7 +10725,289 @@
                     <a:p>
                       <a:pPr algn="l"/>
                       <a:r>
-                        <a:rPr sz="1300" b="0">
+                        <a:rPr sz="1250" b="0">
+                          <a:solidFill>
+                            <a:srgbClr val="26262A"/>
+                          </a:solidFill>
+                          <a:latin typeface="Noto Sans CJK TC"/>
+                        </a:rPr>
+                        <a:t>Prefill throughput (tok/s/user)</a:t>
+                      </a:r>
+                    </a:p>
+                  </a:txBody>
+                  <a:tcPr>
+                    <a:solidFill>
+                      <a:srgbClr val="FCFCFB"/>
+                    </a:solidFill>
+                  </a:tcPr>
+                </a:tc>
+                <a:tc>
+                  <a:txBody>
+                    <a:bodyPr/>
+                    <a:lstStyle/>
+                    <a:p>
+                      <a:pPr algn="r"/>
+                      <a:r>
+                        <a:rPr sz="1250" b="0">
+                          <a:solidFill>
+                            <a:srgbClr val="26262A"/>
+                          </a:solidFill>
+                          <a:latin typeface="Noto Sans CJK TC"/>
+                        </a:rPr>
+                        <a:t>14,204.8</a:t>
+                      </a:r>
+                    </a:p>
+                  </a:txBody>
+                  <a:tcPr>
+                    <a:solidFill>
+                      <a:srgbClr val="FCFCFB"/>
+                    </a:solidFill>
+                  </a:tcPr>
+                </a:tc>
+                <a:tc>
+                  <a:txBody>
+                    <a:bodyPr/>
+                    <a:lstStyle/>
+                    <a:p>
+                      <a:pPr algn="r"/>
+                      <a:r>
+                        <a:rPr sz="1250" b="0">
+                          <a:solidFill>
+                            <a:srgbClr val="26262A"/>
+                          </a:solidFill>
+                          <a:latin typeface="Noto Sans CJK TC"/>
+                        </a:rPr>
+                        <a:t>117.6</a:t>
+                      </a:r>
+                    </a:p>
+                  </a:txBody>
+                  <a:tcPr>
+                    <a:solidFill>
+                      <a:srgbClr val="FCFCFB"/>
+                    </a:solidFill>
+                  </a:tcPr>
+                </a:tc>
+                <a:tc>
+                  <a:txBody>
+                    <a:bodyPr/>
+                    <a:lstStyle/>
+                    <a:p>
+                      <a:pPr algn="r"/>
+                      <a:r>
+                        <a:rPr sz="1250" b="1">
+                          <a:solidFill>
+                            <a:srgbClr val="26262A"/>
+                          </a:solidFill>
+                          <a:latin typeface="Noto Sans CJK TC"/>
+                        </a:rPr>
+                        <a:t>120.79×</a:t>
+                      </a:r>
+                    </a:p>
+                  </a:txBody>
+                  <a:tcPr>
+                    <a:solidFill>
+                      <a:srgbClr val="FCFCFB"/>
+                    </a:solidFill>
+                  </a:tcPr>
+                </a:tc>
+              </a:tr>
+              <a:tr h="333756">
+                <a:tc>
+                  <a:txBody>
+                    <a:bodyPr/>
+                    <a:lstStyle/>
+                    <a:p>
+                      <a:pPr algn="l"/>
+                      <a:r>
+                        <a:rPr sz="1250" b="0">
+                          <a:solidFill>
+                            <a:srgbClr val="26262A"/>
+                          </a:solidFill>
+                          <a:latin typeface="Noto Sans CJK TC"/>
+                        </a:rPr>
+                        <a:t>Decode throughput (tok/s/user)</a:t>
+                      </a:r>
+                    </a:p>
+                  </a:txBody>
+                  <a:tcPr>
+                    <a:solidFill>
+                      <a:srgbClr val="FCFCFB"/>
+                    </a:solidFill>
+                  </a:tcPr>
+                </a:tc>
+                <a:tc>
+                  <a:txBody>
+                    <a:bodyPr/>
+                    <a:lstStyle/>
+                    <a:p>
+                      <a:pPr algn="r"/>
+                      <a:r>
+                        <a:rPr sz="1250" b="0">
+                          <a:solidFill>
+                            <a:srgbClr val="26262A"/>
+                          </a:solidFill>
+                          <a:latin typeface="Noto Sans CJK TC"/>
+                        </a:rPr>
+                        <a:t>30.07</a:t>
+                      </a:r>
+                    </a:p>
+                  </a:txBody>
+                  <a:tcPr>
+                    <a:solidFill>
+                      <a:srgbClr val="FCFCFB"/>
+                    </a:solidFill>
+                  </a:tcPr>
+                </a:tc>
+                <a:tc>
+                  <a:txBody>
+                    <a:bodyPr/>
+                    <a:lstStyle/>
+                    <a:p>
+                      <a:pPr algn="r"/>
+                      <a:r>
+                        <a:rPr sz="1250" b="0">
+                          <a:solidFill>
+                            <a:srgbClr val="26262A"/>
+                          </a:solidFill>
+                          <a:latin typeface="Noto Sans CJK TC"/>
+                        </a:rPr>
+                        <a:t>17.42</a:t>
+                      </a:r>
+                    </a:p>
+                  </a:txBody>
+                  <a:tcPr>
+                    <a:solidFill>
+                      <a:srgbClr val="FCFCFB"/>
+                    </a:solidFill>
+                  </a:tcPr>
+                </a:tc>
+                <a:tc>
+                  <a:txBody>
+                    <a:bodyPr/>
+                    <a:lstStyle/>
+                    <a:p>
+                      <a:pPr algn="r"/>
+                      <a:r>
+                        <a:rPr sz="1250" b="1">
+                          <a:solidFill>
+                            <a:srgbClr val="26262A"/>
+                          </a:solidFill>
+                          <a:latin typeface="Noto Sans CJK TC"/>
+                        </a:rPr>
+                        <a:t>1.73×</a:t>
+                      </a:r>
+                    </a:p>
+                  </a:txBody>
+                  <a:tcPr>
+                    <a:solidFill>
+                      <a:srgbClr val="FCFCFB"/>
+                    </a:solidFill>
+                  </a:tcPr>
+                </a:tc>
+              </a:tr>
+              <a:tr h="333756">
+                <a:tc>
+                  <a:txBody>
+                    <a:bodyPr/>
+                    <a:lstStyle/>
+                    <a:p>
+                      <a:pPr algn="l"/>
+                      <a:r>
+                        <a:rPr sz="1250" b="0">
+                          <a:solidFill>
+                            <a:srgbClr val="26262A"/>
+                          </a:solidFill>
+                          <a:latin typeface="Noto Sans CJK TC"/>
+                        </a:rPr>
+                        <a:t>Output throughput, system (tok/s)</a:t>
+                      </a:r>
+                    </a:p>
+                  </a:txBody>
+                  <a:tcPr>
+                    <a:solidFill>
+                      <a:srgbClr val="FCFCFB"/>
+                    </a:solidFill>
+                  </a:tcPr>
+                </a:tc>
+                <a:tc>
+                  <a:txBody>
+                    <a:bodyPr/>
+                    <a:lstStyle/>
+                    <a:p>
+                      <a:pPr algn="r"/>
+                      <a:r>
+                        <a:rPr sz="1250" b="0">
+                          <a:solidFill>
+                            <a:srgbClr val="26262A"/>
+                          </a:solidFill>
+                          <a:latin typeface="Noto Sans CJK TC"/>
+                        </a:rPr>
+                        <a:t>29.39</a:t>
+                      </a:r>
+                    </a:p>
+                  </a:txBody>
+                  <a:tcPr>
+                    <a:solidFill>
+                      <a:srgbClr val="FCFCFB"/>
+                    </a:solidFill>
+                  </a:tcPr>
+                </a:tc>
+                <a:tc>
+                  <a:txBody>
+                    <a:bodyPr/>
+                    <a:lstStyle/>
+                    <a:p>
+                      <a:pPr algn="r"/>
+                      <a:r>
+                        <a:rPr sz="1250" b="0">
+                          <a:solidFill>
+                            <a:srgbClr val="26262A"/>
+                          </a:solidFill>
+                          <a:latin typeface="Noto Sans CJK TC"/>
+                        </a:rPr>
+                        <a:t>6.86</a:t>
+                      </a:r>
+                    </a:p>
+                  </a:txBody>
+                  <a:tcPr>
+                    <a:solidFill>
+                      <a:srgbClr val="FCFCFB"/>
+                    </a:solidFill>
+                  </a:tcPr>
+                </a:tc>
+                <a:tc>
+                  <a:txBody>
+                    <a:bodyPr/>
+                    <a:lstStyle/>
+                    <a:p>
+                      <a:pPr algn="r"/>
+                      <a:r>
+                        <a:rPr sz="1250" b="1">
+                          <a:solidFill>
+                            <a:srgbClr val="26262A"/>
+                          </a:solidFill>
+                          <a:latin typeface="Noto Sans CJK TC"/>
+                        </a:rPr>
+                        <a:t>4.28×</a:t>
+                      </a:r>
+                    </a:p>
+                  </a:txBody>
+                  <a:tcPr>
+                    <a:solidFill>
+                      <a:srgbClr val="FCFCFB"/>
+                    </a:solidFill>
+                  </a:tcPr>
+                </a:tc>
+              </a:tr>
+              <a:tr h="333756">
+                <a:tc>
+                  <a:txBody>
+                    <a:bodyPr/>
+                    <a:lstStyle/>
+                    <a:p>
+                      <a:pPr algn="l"/>
+                      <a:r>
+                        <a:rPr sz="1250" b="0">
                           <a:solidFill>
                             <a:srgbClr val="26262A"/>
                           </a:solidFill>
@@ -9258,7 +11030,7 @@
                     <a:p>
                       <a:pPr algn="r"/>
                       <a:r>
-                        <a:rPr sz="1300" b="0">
+                        <a:rPr sz="1250" b="0">
                           <a:solidFill>
                             <a:srgbClr val="26262A"/>
                           </a:solidFill>
@@ -9281,7 +11053,7 @@
                     <a:p>
                       <a:pPr algn="r"/>
                       <a:r>
-                        <a:rPr sz="1300" b="0">
+                        <a:rPr sz="1250" b="0">
                           <a:solidFill>
                             <a:srgbClr val="26262A"/>
                           </a:solidFill>
@@ -9304,7 +11076,7 @@
                     <a:p>
                       <a:pPr algn="r"/>
                       <a:r>
-                        <a:rPr sz="1300" b="1">
+                        <a:rPr sz="1250" b="1">
                           <a:solidFill>
                             <a:srgbClr val="26262A"/>
                           </a:solidFill>
@@ -9321,7 +11093,7 @@
                   </a:tcPr>
                 </a:tc>
               </a:tr>
-              <a:tr h="384048">
+              <a:tr h="333756">
                 <a:tc>
                   <a:txBody>
                     <a:bodyPr/>
@@ -9329,7 +11101,7 @@
                     <a:p>
                       <a:pPr algn="l"/>
                       <a:r>
-                        <a:rPr sz="1300" b="0">
+                        <a:rPr sz="1250" b="0">
                           <a:solidFill>
                             <a:srgbClr val="26262A"/>
                           </a:solidFill>
@@ -9352,7 +11124,7 @@
                     <a:p>
                       <a:pPr algn="r"/>
                       <a:r>
-                        <a:rPr sz="1300" b="0">
+                        <a:rPr sz="1250" b="0">
                           <a:solidFill>
                             <a:srgbClr val="26262A"/>
                           </a:solidFill>
@@ -9375,7 +11147,7 @@
                     <a:p>
                       <a:pPr algn="r"/>
                       <a:r>
-                        <a:rPr sz="1300" b="0">
+                        <a:rPr sz="1250" b="0">
                           <a:solidFill>
                             <a:srgbClr val="26262A"/>
                           </a:solidFill>
@@ -9398,7 +11170,7 @@
                     <a:p>
                       <a:pPr algn="r"/>
                       <a:r>
-                        <a:rPr sz="1300" b="1">
+                        <a:rPr sz="1250" b="1">
                           <a:solidFill>
                             <a:srgbClr val="1BAF7A"/>
                           </a:solidFill>
@@ -9415,7 +11187,7 @@
                   </a:tcPr>
                 </a:tc>
               </a:tr>
-              <a:tr h="384048">
+              <a:tr h="333756">
                 <a:tc>
                   <a:txBody>
                     <a:bodyPr/>
@@ -9423,7 +11195,7 @@
                     <a:p>
                       <a:pPr algn="l"/>
                       <a:r>
-                        <a:rPr sz="1300" b="0">
+                        <a:rPr sz="1250" b="0">
                           <a:solidFill>
                             <a:srgbClr val="26262A"/>
                           </a:solidFill>
@@ -9446,7 +11218,7 @@
                     <a:p>
                       <a:pPr algn="r"/>
                       <a:r>
-                        <a:rPr sz="1300" b="0">
+                        <a:rPr sz="1250" b="0">
                           <a:solidFill>
                             <a:srgbClr val="26262A"/>
                           </a:solidFill>
@@ -9469,7 +11241,7 @@
                     <a:p>
                       <a:pPr algn="r"/>
                       <a:r>
-                        <a:rPr sz="1300" b="0">
+                        <a:rPr sz="1250" b="0">
                           <a:solidFill>
                             <a:srgbClr val="26262A"/>
                           </a:solidFill>
@@ -9492,7 +11264,7 @@
                     <a:p>
                       <a:pPr algn="r"/>
                       <a:r>
-                        <a:rPr sz="1300" b="1">
+                        <a:rPr sz="1250" b="1">
                           <a:solidFill>
                             <a:srgbClr val="1BAF7A"/>
                           </a:solidFill>
@@ -9509,7 +11281,7 @@
                   </a:tcPr>
                 </a:tc>
               </a:tr>
-              <a:tr h="384048">
+              <a:tr h="333756">
                 <a:tc>
                   <a:txBody>
                     <a:bodyPr/>
@@ -9517,7 +11289,7 @@
                     <a:p>
                       <a:pPr algn="l"/>
                       <a:r>
-                        <a:rPr sz="1300" b="0">
+                        <a:rPr sz="1250" b="0">
                           <a:solidFill>
                             <a:srgbClr val="26262A"/>
                           </a:solidFill>
@@ -9540,7 +11312,7 @@
                     <a:p>
                       <a:pPr algn="r"/>
                       <a:r>
-                        <a:rPr sz="1300" b="0">
+                        <a:rPr sz="1250" b="0">
                           <a:solidFill>
                             <a:srgbClr val="26262A"/>
                           </a:solidFill>
@@ -9563,7 +11335,7 @@
                     <a:p>
                       <a:pPr algn="r"/>
                       <a:r>
-                        <a:rPr sz="1300" b="0">
+                        <a:rPr sz="1250" b="0">
                           <a:solidFill>
                             <a:srgbClr val="26262A"/>
                           </a:solidFill>
@@ -9586,7 +11358,7 @@
                     <a:p>
                       <a:pPr algn="r"/>
                       <a:r>
-                        <a:rPr sz="1300" b="0">
+                        <a:rPr sz="1250" b="0">
                           <a:solidFill>
                             <a:srgbClr val="26262A"/>
                           </a:solidFill>
@@ -9603,7 +11375,7 @@
                   </a:tcPr>
                 </a:tc>
               </a:tr>
-              <a:tr h="384048">
+              <a:tr h="333756">
                 <a:tc>
                   <a:txBody>
                     <a:bodyPr/>
@@ -9611,7 +11383,7 @@
                     <a:p>
                       <a:pPr algn="l"/>
                       <a:r>
-                        <a:rPr sz="1300" b="0">
+                        <a:rPr sz="1250" b="0">
                           <a:solidFill>
                             <a:srgbClr val="26262A"/>
                           </a:solidFill>
@@ -9634,7 +11406,7 @@
                     <a:p>
                       <a:pPr algn="r"/>
                       <a:r>
-                        <a:rPr sz="1300" b="0">
+                        <a:rPr sz="1250" b="0">
                           <a:solidFill>
                             <a:srgbClr val="26262A"/>
                           </a:solidFill>
@@ -9657,7 +11429,7 @@
                     <a:p>
                       <a:pPr algn="r"/>
                       <a:r>
-                        <a:rPr sz="1300" b="0">
+                        <a:rPr sz="1250" b="0">
                           <a:solidFill>
                             <a:srgbClr val="26262A"/>
                           </a:solidFill>
@@ -9680,7 +11452,7 @@
                     <a:p>
                       <a:pPr algn="r"/>
                       <a:r>
-                        <a:rPr sz="1300" b="0">
+                        <a:rPr sz="1250" b="0">
                           <a:solidFill>
                             <a:srgbClr val="26262A"/>
                           </a:solidFill>
@@ -9709,7 +11481,7 @@
         </p:nvSpPr>
         <p:spPr>
           <a:xfrm>
-            <a:off x="822960" y="5605272"/>
+            <a:off x="822960" y="6016752"/>
             <a:ext cx="10515600" cy="731520"/>
           </a:xfrm>
           <a:prstGeom prst="rect">
@@ -9751,7 +11523,23 @@
                 </a:solidFill>
                 <a:latin typeface="Noto Sans CJK TC"/>
               </a:rPr>
-              <a:t>「端點 / 本機」欄位：延遲類為端點慢幾倍，吞吐類為端點剩幾成。</a:t>
+              <a:t>「端點 / 本機」欄位：延遲類為端點慢幾倍，吞吐類為本機是端點的幾倍。</a:t>
+            </a:r>
+          </a:p>
+          <a:p>
+            <a:pPr algn="l">
+              <a:spcAft>
+                <a:spcPts val="300"/>
+              </a:spcAft>
+            </a:pPr>
+            <a:r>
+              <a:rPr sz="1100" b="0">
+                <a:solidFill>
+                  <a:srgbClr val="6B6B70"/>
+                </a:solidFill>
+                <a:latin typeface="Noto Sans CJK TC"/>
+              </a:rPr>
+              <a:t>Prefill / Decode 為 per-user 速率；Output throughput, system 為伺服器整體輸出。</a:t>
             </a:r>
           </a:p>
         </p:txBody>
@@ -9913,8 +11701,8 @@
           <p:nvPr/>
         </p:nvGraphicFramePr>
         <p:xfrm>
-          <a:off x="822960" y="1920240"/>
-          <a:ext cx="10515600" cy="3456432"/>
+          <a:off x="822960" y="1828800"/>
+          <a:ext cx="10515600" cy="4005072"/>
         </p:xfrm>
         <a:graphic>
           <a:graphicData uri="http://schemas.openxmlformats.org/drawingml/2006/table">
@@ -9928,7 +11716,7 @@
                 <a:gridCol w="2651760"/>
                 <a:gridCol w="1554480"/>
               </a:tblGrid>
-              <a:tr h="384048">
+              <a:tr h="333756">
                 <a:tc>
                   <a:txBody>
                     <a:bodyPr/>
@@ -10022,7 +11810,7 @@
                   </a:tcPr>
                 </a:tc>
               </a:tr>
-              <a:tr h="384048">
+              <a:tr h="333756">
                 <a:tc>
                   <a:txBody>
                     <a:bodyPr/>
@@ -10030,7 +11818,7 @@
                     <a:p>
                       <a:pPr algn="l"/>
                       <a:r>
-                        <a:rPr sz="1300" b="0">
+                        <a:rPr sz="1250" b="0">
                           <a:solidFill>
                             <a:srgbClr val="26262A"/>
                           </a:solidFill>
@@ -10053,7 +11841,7 @@
                     <a:p>
                       <a:pPr algn="r"/>
                       <a:r>
-                        <a:rPr sz="1300" b="0">
+                        <a:rPr sz="1250" b="0">
                           <a:solidFill>
                             <a:srgbClr val="26262A"/>
                           </a:solidFill>
@@ -10076,7 +11864,7 @@
                     <a:p>
                       <a:pPr algn="r"/>
                       <a:r>
-                        <a:rPr sz="1300" b="0">
+                        <a:rPr sz="1250" b="0">
                           <a:solidFill>
                             <a:srgbClr val="26262A"/>
                           </a:solidFill>
@@ -10099,7 +11887,7 @@
                     <a:p>
                       <a:pPr algn="r"/>
                       <a:r>
-                        <a:rPr sz="1300" b="1">
+                        <a:rPr sz="1250" b="1">
                           <a:solidFill>
                             <a:srgbClr val="26262A"/>
                           </a:solidFill>
@@ -10116,7 +11904,7 @@
                   </a:tcPr>
                 </a:tc>
               </a:tr>
-              <a:tr h="384048">
+              <a:tr h="333756">
                 <a:tc>
                   <a:txBody>
                     <a:bodyPr/>
@@ -10124,7 +11912,7 @@
                     <a:p>
                       <a:pPr algn="l"/>
                       <a:r>
-                        <a:rPr sz="1300" b="0">
+                        <a:rPr sz="1250" b="0">
                           <a:solidFill>
                             <a:srgbClr val="26262A"/>
                           </a:solidFill>
@@ -10147,7 +11935,7 @@
                     <a:p>
                       <a:pPr algn="r"/>
                       <a:r>
-                        <a:rPr sz="1300" b="0">
+                        <a:rPr sz="1250" b="0">
                           <a:solidFill>
                             <a:srgbClr val="26262A"/>
                           </a:solidFill>
@@ -10170,7 +11958,7 @@
                     <a:p>
                       <a:pPr algn="r"/>
                       <a:r>
-                        <a:rPr sz="1300" b="0">
+                        <a:rPr sz="1250" b="0">
                           <a:solidFill>
                             <a:srgbClr val="26262A"/>
                           </a:solidFill>
@@ -10193,7 +11981,7 @@
                     <a:p>
                       <a:pPr algn="r"/>
                       <a:r>
-                        <a:rPr sz="1300" b="1">
+                        <a:rPr sz="1250" b="1">
                           <a:solidFill>
                             <a:srgbClr val="26262A"/>
                           </a:solidFill>
@@ -10210,7 +11998,7 @@
                   </a:tcPr>
                 </a:tc>
               </a:tr>
-              <a:tr h="384048">
+              <a:tr h="333756">
                 <a:tc>
                   <a:txBody>
                     <a:bodyPr/>
@@ -10218,7 +12006,7 @@
                     <a:p>
                       <a:pPr algn="l"/>
                       <a:r>
-                        <a:rPr sz="1300" b="0">
+                        <a:rPr sz="1250" b="0">
                           <a:solidFill>
                             <a:srgbClr val="26262A"/>
                           </a:solidFill>
@@ -10241,7 +12029,7 @@
                     <a:p>
                       <a:pPr algn="r"/>
                       <a:r>
-                        <a:rPr sz="1300" b="0">
+                        <a:rPr sz="1250" b="0">
                           <a:solidFill>
                             <a:srgbClr val="26262A"/>
                           </a:solidFill>
@@ -10264,7 +12052,7 @@
                     <a:p>
                       <a:pPr algn="r"/>
                       <a:r>
-                        <a:rPr sz="1300" b="0">
+                        <a:rPr sz="1250" b="0">
                           <a:solidFill>
                             <a:srgbClr val="26262A"/>
                           </a:solidFill>
@@ -10287,7 +12075,7 @@
                     <a:p>
                       <a:pPr algn="r"/>
                       <a:r>
-                        <a:rPr sz="1300" b="1">
+                        <a:rPr sz="1250" b="1">
                           <a:solidFill>
                             <a:srgbClr val="26262A"/>
                           </a:solidFill>
@@ -10304,7 +12092,7 @@
                   </a:tcPr>
                 </a:tc>
               </a:tr>
-              <a:tr h="384048">
+              <a:tr h="333756">
                 <a:tc>
                   <a:txBody>
                     <a:bodyPr/>
@@ -10312,7 +12100,289 @@
                     <a:p>
                       <a:pPr algn="l"/>
                       <a:r>
-                        <a:rPr sz="1300" b="0">
+                        <a:rPr sz="1250" b="0">
+                          <a:solidFill>
+                            <a:srgbClr val="26262A"/>
+                          </a:solidFill>
+                          <a:latin typeface="Noto Sans CJK TC"/>
+                        </a:rPr>
+                        <a:t>Prefill throughput (tok/s/user)</a:t>
+                      </a:r>
+                    </a:p>
+                  </a:txBody>
+                  <a:tcPr>
+                    <a:solidFill>
+                      <a:srgbClr val="FCFCFB"/>
+                    </a:solidFill>
+                  </a:tcPr>
+                </a:tc>
+                <a:tc>
+                  <a:txBody>
+                    <a:bodyPr/>
+                    <a:lstStyle/>
+                    <a:p>
+                      <a:pPr algn="r"/>
+                      <a:r>
+                        <a:rPr sz="1250" b="0">
+                          <a:solidFill>
+                            <a:srgbClr val="26262A"/>
+                          </a:solidFill>
+                          <a:latin typeface="Noto Sans CJK TC"/>
+                        </a:rPr>
+                        <a:t>6,419.9</a:t>
+                      </a:r>
+                    </a:p>
+                  </a:txBody>
+                  <a:tcPr>
+                    <a:solidFill>
+                      <a:srgbClr val="FCFCFB"/>
+                    </a:solidFill>
+                  </a:tcPr>
+                </a:tc>
+                <a:tc>
+                  <a:txBody>
+                    <a:bodyPr/>
+                    <a:lstStyle/>
+                    <a:p>
+                      <a:pPr algn="r"/>
+                      <a:r>
+                        <a:rPr sz="1250" b="0">
+                          <a:solidFill>
+                            <a:srgbClr val="26262A"/>
+                          </a:solidFill>
+                          <a:latin typeface="Noto Sans CJK TC"/>
+                        </a:rPr>
+                        <a:t>55.7</a:t>
+                      </a:r>
+                    </a:p>
+                  </a:txBody>
+                  <a:tcPr>
+                    <a:solidFill>
+                      <a:srgbClr val="FCFCFB"/>
+                    </a:solidFill>
+                  </a:tcPr>
+                </a:tc>
+                <a:tc>
+                  <a:txBody>
+                    <a:bodyPr/>
+                    <a:lstStyle/>
+                    <a:p>
+                      <a:pPr algn="r"/>
+                      <a:r>
+                        <a:rPr sz="1250" b="1">
+                          <a:solidFill>
+                            <a:srgbClr val="26262A"/>
+                          </a:solidFill>
+                          <a:latin typeface="Noto Sans CJK TC"/>
+                        </a:rPr>
+                        <a:t>115.31×</a:t>
+                      </a:r>
+                    </a:p>
+                  </a:txBody>
+                  <a:tcPr>
+                    <a:solidFill>
+                      <a:srgbClr val="FCFCFB"/>
+                    </a:solidFill>
+                  </a:tcPr>
+                </a:tc>
+              </a:tr>
+              <a:tr h="333756">
+                <a:tc>
+                  <a:txBody>
+                    <a:bodyPr/>
+                    <a:lstStyle/>
+                    <a:p>
+                      <a:pPr algn="l"/>
+                      <a:r>
+                        <a:rPr sz="1250" b="0">
+                          <a:solidFill>
+                            <a:srgbClr val="26262A"/>
+                          </a:solidFill>
+                          <a:latin typeface="Noto Sans CJK TC"/>
+                        </a:rPr>
+                        <a:t>Decode throughput (tok/s/user)</a:t>
+                      </a:r>
+                    </a:p>
+                  </a:txBody>
+                  <a:tcPr>
+                    <a:solidFill>
+                      <a:srgbClr val="FCFCFB"/>
+                    </a:solidFill>
+                  </a:tcPr>
+                </a:tc>
+                <a:tc>
+                  <a:txBody>
+                    <a:bodyPr/>
+                    <a:lstStyle/>
+                    <a:p>
+                      <a:pPr algn="r"/>
+                      <a:r>
+                        <a:rPr sz="1250" b="0">
+                          <a:solidFill>
+                            <a:srgbClr val="26262A"/>
+                          </a:solidFill>
+                          <a:latin typeface="Noto Sans CJK TC"/>
+                        </a:rPr>
+                        <a:t>30.50</a:t>
+                      </a:r>
+                    </a:p>
+                  </a:txBody>
+                  <a:tcPr>
+                    <a:solidFill>
+                      <a:srgbClr val="FCFCFB"/>
+                    </a:solidFill>
+                  </a:tcPr>
+                </a:tc>
+                <a:tc>
+                  <a:txBody>
+                    <a:bodyPr/>
+                    <a:lstStyle/>
+                    <a:p>
+                      <a:pPr algn="r"/>
+                      <a:r>
+                        <a:rPr sz="1250" b="0">
+                          <a:solidFill>
+                            <a:srgbClr val="26262A"/>
+                          </a:solidFill>
+                          <a:latin typeface="Noto Sans CJK TC"/>
+                        </a:rPr>
+                        <a:t>20.04</a:t>
+                      </a:r>
+                    </a:p>
+                  </a:txBody>
+                  <a:tcPr>
+                    <a:solidFill>
+                      <a:srgbClr val="FCFCFB"/>
+                    </a:solidFill>
+                  </a:tcPr>
+                </a:tc>
+                <a:tc>
+                  <a:txBody>
+                    <a:bodyPr/>
+                    <a:lstStyle/>
+                    <a:p>
+                      <a:pPr algn="r"/>
+                      <a:r>
+                        <a:rPr sz="1250" b="1">
+                          <a:solidFill>
+                            <a:srgbClr val="26262A"/>
+                          </a:solidFill>
+                          <a:latin typeface="Noto Sans CJK TC"/>
+                        </a:rPr>
+                        <a:t>1.52×</a:t>
+                      </a:r>
+                    </a:p>
+                  </a:txBody>
+                  <a:tcPr>
+                    <a:solidFill>
+                      <a:srgbClr val="FCFCFB"/>
+                    </a:solidFill>
+                  </a:tcPr>
+                </a:tc>
+              </a:tr>
+              <a:tr h="333756">
+                <a:tc>
+                  <a:txBody>
+                    <a:bodyPr/>
+                    <a:lstStyle/>
+                    <a:p>
+                      <a:pPr algn="l"/>
+                      <a:r>
+                        <a:rPr sz="1250" b="0">
+                          <a:solidFill>
+                            <a:srgbClr val="26262A"/>
+                          </a:solidFill>
+                          <a:latin typeface="Noto Sans CJK TC"/>
+                        </a:rPr>
+                        <a:t>Output throughput, system (tok/s)</a:t>
+                      </a:r>
+                    </a:p>
+                  </a:txBody>
+                  <a:tcPr>
+                    <a:solidFill>
+                      <a:srgbClr val="FCFCFB"/>
+                    </a:solidFill>
+                  </a:tcPr>
+                </a:tc>
+                <a:tc>
+                  <a:txBody>
+                    <a:bodyPr/>
+                    <a:lstStyle/>
+                    <a:p>
+                      <a:pPr algn="r"/>
+                      <a:r>
+                        <a:rPr sz="1250" b="0">
+                          <a:solidFill>
+                            <a:srgbClr val="26262A"/>
+                          </a:solidFill>
+                          <a:latin typeface="Noto Sans CJK TC"/>
+                        </a:rPr>
+                        <a:t>30.26</a:t>
+                      </a:r>
+                    </a:p>
+                  </a:txBody>
+                  <a:tcPr>
+                    <a:solidFill>
+                      <a:srgbClr val="FCFCFB"/>
+                    </a:solidFill>
+                  </a:tcPr>
+                </a:tc>
+                <a:tc>
+                  <a:txBody>
+                    <a:bodyPr/>
+                    <a:lstStyle/>
+                    <a:p>
+                      <a:pPr algn="r"/>
+                      <a:r>
+                        <a:rPr sz="1250" b="0">
+                          <a:solidFill>
+                            <a:srgbClr val="26262A"/>
+                          </a:solidFill>
+                          <a:latin typeface="Noto Sans CJK TC"/>
+                        </a:rPr>
+                        <a:t>12.59</a:t>
+                      </a:r>
+                    </a:p>
+                  </a:txBody>
+                  <a:tcPr>
+                    <a:solidFill>
+                      <a:srgbClr val="FCFCFB"/>
+                    </a:solidFill>
+                  </a:tcPr>
+                </a:tc>
+                <a:tc>
+                  <a:txBody>
+                    <a:bodyPr/>
+                    <a:lstStyle/>
+                    <a:p>
+                      <a:pPr algn="r"/>
+                      <a:r>
+                        <a:rPr sz="1250" b="1">
+                          <a:solidFill>
+                            <a:srgbClr val="26262A"/>
+                          </a:solidFill>
+                          <a:latin typeface="Noto Sans CJK TC"/>
+                        </a:rPr>
+                        <a:t>2.40×</a:t>
+                      </a:r>
+                    </a:p>
+                  </a:txBody>
+                  <a:tcPr>
+                    <a:solidFill>
+                      <a:srgbClr val="FCFCFB"/>
+                    </a:solidFill>
+                  </a:tcPr>
+                </a:tc>
+              </a:tr>
+              <a:tr h="333756">
+                <a:tc>
+                  <a:txBody>
+                    <a:bodyPr/>
+                    <a:lstStyle/>
+                    <a:p>
+                      <a:pPr algn="l"/>
+                      <a:r>
+                        <a:rPr sz="1250" b="0">
                           <a:solidFill>
                             <a:srgbClr val="26262A"/>
                           </a:solidFill>
@@ -10335,7 +12405,7 @@
                     <a:p>
                       <a:pPr algn="r"/>
                       <a:r>
-                        <a:rPr sz="1300" b="0">
+                        <a:rPr sz="1250" b="0">
                           <a:solidFill>
                             <a:srgbClr val="26262A"/>
                           </a:solidFill>
@@ -10358,7 +12428,7 @@
                     <a:p>
                       <a:pPr algn="r"/>
                       <a:r>
-                        <a:rPr sz="1300" b="0">
+                        <a:rPr sz="1250" b="0">
                           <a:solidFill>
                             <a:srgbClr val="26262A"/>
                           </a:solidFill>
@@ -10381,7 +12451,7 @@
                     <a:p>
                       <a:pPr algn="r"/>
                       <a:r>
-                        <a:rPr sz="1300" b="1">
+                        <a:rPr sz="1250" b="1">
                           <a:solidFill>
                             <a:srgbClr val="26262A"/>
                           </a:solidFill>
@@ -10398,7 +12468,7 @@
                   </a:tcPr>
                 </a:tc>
               </a:tr>
-              <a:tr h="384048">
+              <a:tr h="333756">
                 <a:tc>
                   <a:txBody>
                     <a:bodyPr/>
@@ -10406,7 +12476,7 @@
                     <a:p>
                       <a:pPr algn="l"/>
                       <a:r>
-                        <a:rPr sz="1300" b="0">
+                        <a:rPr sz="1250" b="0">
                           <a:solidFill>
                             <a:srgbClr val="26262A"/>
                           </a:solidFill>
@@ -10429,7 +12499,7 @@
                     <a:p>
                       <a:pPr algn="r"/>
                       <a:r>
-                        <a:rPr sz="1300" b="0">
+                        <a:rPr sz="1250" b="0">
                           <a:solidFill>
                             <a:srgbClr val="26262A"/>
                           </a:solidFill>
@@ -10452,7 +12522,7 @@
                     <a:p>
                       <a:pPr algn="r"/>
                       <a:r>
-                        <a:rPr sz="1300" b="0">
+                        <a:rPr sz="1250" b="0">
                           <a:solidFill>
                             <a:srgbClr val="26262A"/>
                           </a:solidFill>
@@ -10475,7 +12545,7 @@
                     <a:p>
                       <a:pPr algn="r"/>
                       <a:r>
-                        <a:rPr sz="1300" b="1">
+                        <a:rPr sz="1250" b="1">
                           <a:solidFill>
                             <a:srgbClr val="1BAF7A"/>
                           </a:solidFill>
@@ -10492,7 +12562,7 @@
                   </a:tcPr>
                 </a:tc>
               </a:tr>
-              <a:tr h="384048">
+              <a:tr h="333756">
                 <a:tc>
                   <a:txBody>
                     <a:bodyPr/>
@@ -10500,7 +12570,7 @@
                     <a:p>
                       <a:pPr algn="l"/>
                       <a:r>
-                        <a:rPr sz="1300" b="0">
+                        <a:rPr sz="1250" b="0">
                           <a:solidFill>
                             <a:srgbClr val="26262A"/>
                           </a:solidFill>
@@ -10523,7 +12593,7 @@
                     <a:p>
                       <a:pPr algn="r"/>
                       <a:r>
-                        <a:rPr sz="1300" b="0">
+                        <a:rPr sz="1250" b="0">
                           <a:solidFill>
                             <a:srgbClr val="26262A"/>
                           </a:solidFill>
@@ -10546,7 +12616,7 @@
                     <a:p>
                       <a:pPr algn="r"/>
                       <a:r>
-                        <a:rPr sz="1300" b="0">
+                        <a:rPr sz="1250" b="0">
                           <a:solidFill>
                             <a:srgbClr val="26262A"/>
                           </a:solidFill>
@@ -10569,7 +12639,7 @@
                     <a:p>
                       <a:pPr algn="r"/>
                       <a:r>
-                        <a:rPr sz="1300" b="1">
+                        <a:rPr sz="1250" b="1">
                           <a:solidFill>
                             <a:srgbClr val="1BAF7A"/>
                           </a:solidFill>
@@ -10586,7 +12656,7 @@
                   </a:tcPr>
                 </a:tc>
               </a:tr>
-              <a:tr h="384048">
+              <a:tr h="333756">
                 <a:tc>
                   <a:txBody>
                     <a:bodyPr/>
@@ -10594,7 +12664,7 @@
                     <a:p>
                       <a:pPr algn="l"/>
                       <a:r>
-                        <a:rPr sz="1300" b="0">
+                        <a:rPr sz="1250" b="0">
                           <a:solidFill>
                             <a:srgbClr val="26262A"/>
                           </a:solidFill>
@@ -10617,7 +12687,7 @@
                     <a:p>
                       <a:pPr algn="r"/>
                       <a:r>
-                        <a:rPr sz="1300" b="0">
+                        <a:rPr sz="1250" b="0">
                           <a:solidFill>
                             <a:srgbClr val="26262A"/>
                           </a:solidFill>
@@ -10640,7 +12710,7 @@
                     <a:p>
                       <a:pPr algn="r"/>
                       <a:r>
-                        <a:rPr sz="1300" b="0">
+                        <a:rPr sz="1250" b="0">
                           <a:solidFill>
                             <a:srgbClr val="26262A"/>
                           </a:solidFill>
@@ -10663,7 +12733,7 @@
                     <a:p>
                       <a:pPr algn="r"/>
                       <a:r>
-                        <a:rPr sz="1300" b="0">
+                        <a:rPr sz="1250" b="0">
                           <a:solidFill>
                             <a:srgbClr val="26262A"/>
                           </a:solidFill>
@@ -10680,7 +12750,7 @@
                   </a:tcPr>
                 </a:tc>
               </a:tr>
-              <a:tr h="384048">
+              <a:tr h="333756">
                 <a:tc>
                   <a:txBody>
                     <a:bodyPr/>
@@ -10688,7 +12758,7 @@
                     <a:p>
                       <a:pPr algn="l"/>
                       <a:r>
-                        <a:rPr sz="1300" b="0">
+                        <a:rPr sz="1250" b="0">
                           <a:solidFill>
                             <a:srgbClr val="26262A"/>
                           </a:solidFill>
@@ -10711,7 +12781,7 @@
                     <a:p>
                       <a:pPr algn="r"/>
                       <a:r>
-                        <a:rPr sz="1300" b="0">
+                        <a:rPr sz="1250" b="0">
                           <a:solidFill>
                             <a:srgbClr val="26262A"/>
                           </a:solidFill>
@@ -10734,7 +12804,7 @@
                     <a:p>
                       <a:pPr algn="r"/>
                       <a:r>
-                        <a:rPr sz="1300" b="0">
+                        <a:rPr sz="1250" b="0">
                           <a:solidFill>
                             <a:srgbClr val="26262A"/>
                           </a:solidFill>
@@ -10757,7 +12827,7 @@
                     <a:p>
                       <a:pPr algn="r"/>
                       <a:r>
-                        <a:rPr sz="1300" b="0">
+                        <a:rPr sz="1250" b="0">
                           <a:solidFill>
                             <a:srgbClr val="26262A"/>
                           </a:solidFill>
@@ -10786,7 +12856,7 @@
         </p:nvSpPr>
         <p:spPr>
           <a:xfrm>
-            <a:off x="822960" y="5605272"/>
+            <a:off x="822960" y="6016752"/>
             <a:ext cx="10515600" cy="731520"/>
           </a:xfrm>
           <a:prstGeom prst="rect">
@@ -10828,7 +12898,23 @@
                 </a:solidFill>
                 <a:latin typeface="Noto Sans CJK TC"/>
               </a:rPr>
-              <a:t>「端點 / 本機」欄位：延遲類為端點慢幾倍，吞吐類為端點剩幾成。</a:t>
+              <a:t>「端點 / 本機」欄位：延遲類為端點慢幾倍，吞吐類為本機是端點的幾倍。</a:t>
+            </a:r>
+          </a:p>
+          <a:p>
+            <a:pPr algn="l">
+              <a:spcAft>
+                <a:spcPts val="300"/>
+              </a:spcAft>
+            </a:pPr>
+            <a:r>
+              <a:rPr sz="1100" b="0">
+                <a:solidFill>
+                  <a:srgbClr val="6B6B70"/>
+                </a:solidFill>
+                <a:latin typeface="Noto Sans CJK TC"/>
+              </a:rPr>
+              <a:t>Prefill / Decode 為 per-user 速率；Output throughput, system 為伺服器整體輸出。</a:t>
             </a:r>
           </a:p>
         </p:txBody>
@@ -10990,8 +13076,8 @@
           <p:nvPr/>
         </p:nvGraphicFramePr>
         <p:xfrm>
-          <a:off x="822960" y="1920240"/>
-          <a:ext cx="10515600" cy="3456432"/>
+          <a:off x="822960" y="1828800"/>
+          <a:ext cx="10515600" cy="4005072"/>
         </p:xfrm>
         <a:graphic>
           <a:graphicData uri="http://schemas.openxmlformats.org/drawingml/2006/table">
@@ -11005,7 +13091,7 @@
                 <a:gridCol w="2651760"/>
                 <a:gridCol w="1554480"/>
               </a:tblGrid>
-              <a:tr h="384048">
+              <a:tr h="333756">
                 <a:tc>
                   <a:txBody>
                     <a:bodyPr/>
@@ -11099,7 +13185,7 @@
                   </a:tcPr>
                 </a:tc>
               </a:tr>
-              <a:tr h="384048">
+              <a:tr h="333756">
                 <a:tc>
                   <a:txBody>
                     <a:bodyPr/>
@@ -11107,7 +13193,7 @@
                     <a:p>
                       <a:pPr algn="l"/>
                       <a:r>
-                        <a:rPr sz="1300" b="0">
+                        <a:rPr sz="1250" b="0">
                           <a:solidFill>
                             <a:srgbClr val="26262A"/>
                           </a:solidFill>
@@ -11130,7 +13216,7 @@
                     <a:p>
                       <a:pPr algn="r"/>
                       <a:r>
-                        <a:rPr sz="1300" b="0">
+                        <a:rPr sz="1250" b="0">
                           <a:solidFill>
                             <a:srgbClr val="26262A"/>
                           </a:solidFill>
@@ -11153,7 +13239,7 @@
                     <a:p>
                       <a:pPr algn="r"/>
                       <a:r>
-                        <a:rPr sz="1300" b="0">
+                        <a:rPr sz="1250" b="0">
                           <a:solidFill>
                             <a:srgbClr val="26262A"/>
                           </a:solidFill>
@@ -11176,7 +13262,7 @@
                     <a:p>
                       <a:pPr algn="r"/>
                       <a:r>
-                        <a:rPr sz="1300" b="1">
+                        <a:rPr sz="1250" b="1">
                           <a:solidFill>
                             <a:srgbClr val="26262A"/>
                           </a:solidFill>
@@ -11193,7 +13279,7 @@
                   </a:tcPr>
                 </a:tc>
               </a:tr>
-              <a:tr h="384048">
+              <a:tr h="333756">
                 <a:tc>
                   <a:txBody>
                     <a:bodyPr/>
@@ -11201,7 +13287,7 @@
                     <a:p>
                       <a:pPr algn="l"/>
                       <a:r>
-                        <a:rPr sz="1300" b="0">
+                        <a:rPr sz="1250" b="0">
                           <a:solidFill>
                             <a:srgbClr val="26262A"/>
                           </a:solidFill>
@@ -11224,7 +13310,7 @@
                     <a:p>
                       <a:pPr algn="r"/>
                       <a:r>
-                        <a:rPr sz="1300" b="0">
+                        <a:rPr sz="1250" b="0">
                           <a:solidFill>
                             <a:srgbClr val="26262A"/>
                           </a:solidFill>
@@ -11247,7 +13333,7 @@
                     <a:p>
                       <a:pPr algn="r"/>
                       <a:r>
-                        <a:rPr sz="1300" b="0">
+                        <a:rPr sz="1250" b="0">
                           <a:solidFill>
                             <a:srgbClr val="26262A"/>
                           </a:solidFill>
@@ -11270,7 +13356,7 @@
                     <a:p>
                       <a:pPr algn="r"/>
                       <a:r>
-                        <a:rPr sz="1300" b="1">
+                        <a:rPr sz="1250" b="1">
                           <a:solidFill>
                             <a:srgbClr val="26262A"/>
                           </a:solidFill>
@@ -11287,7 +13373,7 @@
                   </a:tcPr>
                 </a:tc>
               </a:tr>
-              <a:tr h="384048">
+              <a:tr h="333756">
                 <a:tc>
                   <a:txBody>
                     <a:bodyPr/>
@@ -11295,7 +13381,7 @@
                     <a:p>
                       <a:pPr algn="l"/>
                       <a:r>
-                        <a:rPr sz="1300" b="0">
+                        <a:rPr sz="1250" b="0">
                           <a:solidFill>
                             <a:srgbClr val="26262A"/>
                           </a:solidFill>
@@ -11318,7 +13404,7 @@
                     <a:p>
                       <a:pPr algn="r"/>
                       <a:r>
-                        <a:rPr sz="1300" b="0">
+                        <a:rPr sz="1250" b="0">
                           <a:solidFill>
                             <a:srgbClr val="26262A"/>
                           </a:solidFill>
@@ -11341,7 +13427,7 @@
                     <a:p>
                       <a:pPr algn="r"/>
                       <a:r>
-                        <a:rPr sz="1300" b="0">
+                        <a:rPr sz="1250" b="0">
                           <a:solidFill>
                             <a:srgbClr val="26262A"/>
                           </a:solidFill>
@@ -11364,7 +13450,7 @@
                     <a:p>
                       <a:pPr algn="r"/>
                       <a:r>
-                        <a:rPr sz="1300" b="1">
+                        <a:rPr sz="1250" b="1">
                           <a:solidFill>
                             <a:srgbClr val="26262A"/>
                           </a:solidFill>
@@ -11381,7 +13467,7 @@
                   </a:tcPr>
                 </a:tc>
               </a:tr>
-              <a:tr h="384048">
+              <a:tr h="333756">
                 <a:tc>
                   <a:txBody>
                     <a:bodyPr/>
@@ -11389,7 +13475,289 @@
                     <a:p>
                       <a:pPr algn="l"/>
                       <a:r>
-                        <a:rPr sz="1300" b="0">
+                        <a:rPr sz="1250" b="0">
+                          <a:solidFill>
+                            <a:srgbClr val="26262A"/>
+                          </a:solidFill>
+                          <a:latin typeface="Noto Sans CJK TC"/>
+                        </a:rPr>
+                        <a:t>Prefill throughput (tok/s/user)</a:t>
+                      </a:r>
+                    </a:p>
+                  </a:txBody>
+                  <a:tcPr>
+                    <a:solidFill>
+                      <a:srgbClr val="FCFCFB"/>
+                    </a:solidFill>
+                  </a:tcPr>
+                </a:tc>
+                <a:tc>
+                  <a:txBody>
+                    <a:bodyPr/>
+                    <a:lstStyle/>
+                    <a:p>
+                      <a:pPr algn="r"/>
+                      <a:r>
+                        <a:rPr sz="1250" b="0">
+                          <a:solidFill>
+                            <a:srgbClr val="26262A"/>
+                          </a:solidFill>
+                          <a:latin typeface="Noto Sans CJK TC"/>
+                        </a:rPr>
+                        <a:t>7,475.8</a:t>
+                      </a:r>
+                    </a:p>
+                  </a:txBody>
+                  <a:tcPr>
+                    <a:solidFill>
+                      <a:srgbClr val="FCFCFB"/>
+                    </a:solidFill>
+                  </a:tcPr>
+                </a:tc>
+                <a:tc>
+                  <a:txBody>
+                    <a:bodyPr/>
+                    <a:lstStyle/>
+                    <a:p>
+                      <a:pPr algn="r"/>
+                      <a:r>
+                        <a:rPr sz="1250" b="0">
+                          <a:solidFill>
+                            <a:srgbClr val="26262A"/>
+                          </a:solidFill>
+                          <a:latin typeface="Noto Sans CJK TC"/>
+                        </a:rPr>
+                        <a:t>50.7</a:t>
+                      </a:r>
+                    </a:p>
+                  </a:txBody>
+                  <a:tcPr>
+                    <a:solidFill>
+                      <a:srgbClr val="FCFCFB"/>
+                    </a:solidFill>
+                  </a:tcPr>
+                </a:tc>
+                <a:tc>
+                  <a:txBody>
+                    <a:bodyPr/>
+                    <a:lstStyle/>
+                    <a:p>
+                      <a:pPr algn="r"/>
+                      <a:r>
+                        <a:rPr sz="1250" b="1">
+                          <a:solidFill>
+                            <a:srgbClr val="26262A"/>
+                          </a:solidFill>
+                          <a:latin typeface="Noto Sans CJK TC"/>
+                        </a:rPr>
+                        <a:t>147.44×</a:t>
+                      </a:r>
+                    </a:p>
+                  </a:txBody>
+                  <a:tcPr>
+                    <a:solidFill>
+                      <a:srgbClr val="FCFCFB"/>
+                    </a:solidFill>
+                  </a:tcPr>
+                </a:tc>
+              </a:tr>
+              <a:tr h="333756">
+                <a:tc>
+                  <a:txBody>
+                    <a:bodyPr/>
+                    <a:lstStyle/>
+                    <a:p>
+                      <a:pPr algn="l"/>
+                      <a:r>
+                        <a:rPr sz="1250" b="0">
+                          <a:solidFill>
+                            <a:srgbClr val="26262A"/>
+                          </a:solidFill>
+                          <a:latin typeface="Noto Sans CJK TC"/>
+                        </a:rPr>
+                        <a:t>Decode throughput (tok/s/user)</a:t>
+                      </a:r>
+                    </a:p>
+                  </a:txBody>
+                  <a:tcPr>
+                    <a:solidFill>
+                      <a:srgbClr val="FCFCFB"/>
+                    </a:solidFill>
+                  </a:tcPr>
+                </a:tc>
+                <a:tc>
+                  <a:txBody>
+                    <a:bodyPr/>
+                    <a:lstStyle/>
+                    <a:p>
+                      <a:pPr algn="r"/>
+                      <a:r>
+                        <a:rPr sz="1250" b="0">
+                          <a:solidFill>
+                            <a:srgbClr val="26262A"/>
+                          </a:solidFill>
+                          <a:latin typeface="Noto Sans CJK TC"/>
+                        </a:rPr>
+                        <a:t>13.79</a:t>
+                      </a:r>
+                    </a:p>
+                  </a:txBody>
+                  <a:tcPr>
+                    <a:solidFill>
+                      <a:srgbClr val="FCFCFB"/>
+                    </a:solidFill>
+                  </a:tcPr>
+                </a:tc>
+                <a:tc>
+                  <a:txBody>
+                    <a:bodyPr/>
+                    <a:lstStyle/>
+                    <a:p>
+                      <a:pPr algn="r"/>
+                      <a:r>
+                        <a:rPr sz="1250" b="0">
+                          <a:solidFill>
+                            <a:srgbClr val="26262A"/>
+                          </a:solidFill>
+                          <a:latin typeface="Noto Sans CJK TC"/>
+                        </a:rPr>
+                        <a:t>14.56</a:t>
+                      </a:r>
+                    </a:p>
+                  </a:txBody>
+                  <a:tcPr>
+                    <a:solidFill>
+                      <a:srgbClr val="FCFCFB"/>
+                    </a:solidFill>
+                  </a:tcPr>
+                </a:tc>
+                <a:tc>
+                  <a:txBody>
+                    <a:bodyPr/>
+                    <a:lstStyle/>
+                    <a:p>
+                      <a:pPr algn="r"/>
+                      <a:r>
+                        <a:rPr sz="1250" b="1">
+                          <a:solidFill>
+                            <a:srgbClr val="26262A"/>
+                          </a:solidFill>
+                          <a:latin typeface="Noto Sans CJK TC"/>
+                        </a:rPr>
+                        <a:t>0.95×</a:t>
+                      </a:r>
+                    </a:p>
+                  </a:txBody>
+                  <a:tcPr>
+                    <a:solidFill>
+                      <a:srgbClr val="FCFCFB"/>
+                    </a:solidFill>
+                  </a:tcPr>
+                </a:tc>
+              </a:tr>
+              <a:tr h="333756">
+                <a:tc>
+                  <a:txBody>
+                    <a:bodyPr/>
+                    <a:lstStyle/>
+                    <a:p>
+                      <a:pPr algn="l"/>
+                      <a:r>
+                        <a:rPr sz="1250" b="0">
+                          <a:solidFill>
+                            <a:srgbClr val="26262A"/>
+                          </a:solidFill>
+                          <a:latin typeface="Noto Sans CJK TC"/>
+                        </a:rPr>
+                        <a:t>Output throughput, system (tok/s)</a:t>
+                      </a:r>
+                    </a:p>
+                  </a:txBody>
+                  <a:tcPr>
+                    <a:solidFill>
+                      <a:srgbClr val="FCFCFB"/>
+                    </a:solidFill>
+                  </a:tcPr>
+                </a:tc>
+                <a:tc>
+                  <a:txBody>
+                    <a:bodyPr/>
+                    <a:lstStyle/>
+                    <a:p>
+                      <a:pPr algn="r"/>
+                      <a:r>
+                        <a:rPr sz="1250" b="0">
+                          <a:solidFill>
+                            <a:srgbClr val="26262A"/>
+                          </a:solidFill>
+                          <a:latin typeface="Noto Sans CJK TC"/>
+                        </a:rPr>
+                        <a:t>13.78</a:t>
+                      </a:r>
+                    </a:p>
+                  </a:txBody>
+                  <a:tcPr>
+                    <a:solidFill>
+                      <a:srgbClr val="FCFCFB"/>
+                    </a:solidFill>
+                  </a:tcPr>
+                </a:tc>
+                <a:tc>
+                  <a:txBody>
+                    <a:bodyPr/>
+                    <a:lstStyle/>
+                    <a:p>
+                      <a:pPr algn="r"/>
+                      <a:r>
+                        <a:rPr sz="1250" b="0">
+                          <a:solidFill>
+                            <a:srgbClr val="26262A"/>
+                          </a:solidFill>
+                          <a:latin typeface="Noto Sans CJK TC"/>
+                        </a:rPr>
+                        <a:t>9.36</a:t>
+                      </a:r>
+                    </a:p>
+                  </a:txBody>
+                  <a:tcPr>
+                    <a:solidFill>
+                      <a:srgbClr val="FCFCFB"/>
+                    </a:solidFill>
+                  </a:tcPr>
+                </a:tc>
+                <a:tc>
+                  <a:txBody>
+                    <a:bodyPr/>
+                    <a:lstStyle/>
+                    <a:p>
+                      <a:pPr algn="r"/>
+                      <a:r>
+                        <a:rPr sz="1250" b="1">
+                          <a:solidFill>
+                            <a:srgbClr val="26262A"/>
+                          </a:solidFill>
+                          <a:latin typeface="Noto Sans CJK TC"/>
+                        </a:rPr>
+                        <a:t>1.47×</a:t>
+                      </a:r>
+                    </a:p>
+                  </a:txBody>
+                  <a:tcPr>
+                    <a:solidFill>
+                      <a:srgbClr val="FCFCFB"/>
+                    </a:solidFill>
+                  </a:tcPr>
+                </a:tc>
+              </a:tr>
+              <a:tr h="333756">
+                <a:tc>
+                  <a:txBody>
+                    <a:bodyPr/>
+                    <a:lstStyle/>
+                    <a:p>
+                      <a:pPr algn="l"/>
+                      <a:r>
+                        <a:rPr sz="1250" b="0">
                           <a:solidFill>
                             <a:srgbClr val="26262A"/>
                           </a:solidFill>
@@ -11412,7 +13780,7 @@
                     <a:p>
                       <a:pPr algn="r"/>
                       <a:r>
-                        <a:rPr sz="1300" b="0">
+                        <a:rPr sz="1250" b="0">
                           <a:solidFill>
                             <a:srgbClr val="26262A"/>
                           </a:solidFill>
@@ -11435,7 +13803,7 @@
                     <a:p>
                       <a:pPr algn="r"/>
                       <a:r>
-                        <a:rPr sz="1300" b="0">
+                        <a:rPr sz="1250" b="0">
                           <a:solidFill>
                             <a:srgbClr val="26262A"/>
                           </a:solidFill>
@@ -11458,7 +13826,7 @@
                     <a:p>
                       <a:pPr algn="r"/>
                       <a:r>
-                        <a:rPr sz="1300" b="1">
+                        <a:rPr sz="1250" b="1">
                           <a:solidFill>
                             <a:srgbClr val="26262A"/>
                           </a:solidFill>
@@ -11475,7 +13843,7 @@
                   </a:tcPr>
                 </a:tc>
               </a:tr>
-              <a:tr h="384048">
+              <a:tr h="333756">
                 <a:tc>
                   <a:txBody>
                     <a:bodyPr/>
@@ -11483,7 +13851,7 @@
                     <a:p>
                       <a:pPr algn="l"/>
                       <a:r>
-                        <a:rPr sz="1300" b="0">
+                        <a:rPr sz="1250" b="0">
                           <a:solidFill>
                             <a:srgbClr val="26262A"/>
                           </a:solidFill>
@@ -11506,7 +13874,7 @@
                     <a:p>
                       <a:pPr algn="r"/>
                       <a:r>
-                        <a:rPr sz="1300" b="0">
+                        <a:rPr sz="1250" b="0">
                           <a:solidFill>
                             <a:srgbClr val="26262A"/>
                           </a:solidFill>
@@ -11529,7 +13897,7 @@
                     <a:p>
                       <a:pPr algn="r"/>
                       <a:r>
-                        <a:rPr sz="1300" b="0">
+                        <a:rPr sz="1250" b="0">
                           <a:solidFill>
                             <a:srgbClr val="26262A"/>
                           </a:solidFill>
@@ -11552,7 +13920,7 @@
                     <a:p>
                       <a:pPr algn="r"/>
                       <a:r>
-                        <a:rPr sz="1300" b="1">
+                        <a:rPr sz="1250" b="1">
                           <a:solidFill>
                             <a:srgbClr val="1BAF7A"/>
                           </a:solidFill>
@@ -11569,7 +13937,7 @@
                   </a:tcPr>
                 </a:tc>
               </a:tr>
-              <a:tr h="384048">
+              <a:tr h="333756">
                 <a:tc>
                   <a:txBody>
                     <a:bodyPr/>
@@ -11577,7 +13945,7 @@
                     <a:p>
                       <a:pPr algn="l"/>
                       <a:r>
-                        <a:rPr sz="1300" b="0">
+                        <a:rPr sz="1250" b="0">
                           <a:solidFill>
                             <a:srgbClr val="26262A"/>
                           </a:solidFill>
@@ -11600,7 +13968,7 @@
                     <a:p>
                       <a:pPr algn="r"/>
                       <a:r>
-                        <a:rPr sz="1300" b="0">
+                        <a:rPr sz="1250" b="0">
                           <a:solidFill>
                             <a:srgbClr val="26262A"/>
                           </a:solidFill>
@@ -11623,7 +13991,7 @@
                     <a:p>
                       <a:pPr algn="r"/>
                       <a:r>
-                        <a:rPr sz="1300" b="0">
+                        <a:rPr sz="1250" b="0">
                           <a:solidFill>
                             <a:srgbClr val="26262A"/>
                           </a:solidFill>
@@ -11646,7 +14014,7 @@
                     <a:p>
                       <a:pPr algn="r"/>
                       <a:r>
-                        <a:rPr sz="1300" b="1">
+                        <a:rPr sz="1250" b="1">
                           <a:solidFill>
                             <a:srgbClr val="1BAF7A"/>
                           </a:solidFill>
@@ -11663,7 +14031,7 @@
                   </a:tcPr>
                 </a:tc>
               </a:tr>
-              <a:tr h="384048">
+              <a:tr h="333756">
                 <a:tc>
                   <a:txBody>
                     <a:bodyPr/>
@@ -11671,7 +14039,7 @@
                     <a:p>
                       <a:pPr algn="l"/>
                       <a:r>
-                        <a:rPr sz="1300" b="0">
+                        <a:rPr sz="1250" b="0">
                           <a:solidFill>
                             <a:srgbClr val="26262A"/>
                           </a:solidFill>
@@ -11694,7 +14062,7 @@
                     <a:p>
                       <a:pPr algn="r"/>
                       <a:r>
-                        <a:rPr sz="1300" b="0">
+                        <a:rPr sz="1250" b="0">
                           <a:solidFill>
                             <a:srgbClr val="26262A"/>
                           </a:solidFill>
@@ -11717,7 +14085,7 @@
                     <a:p>
                       <a:pPr algn="r"/>
                       <a:r>
-                        <a:rPr sz="1300" b="0">
+                        <a:rPr sz="1250" b="0">
                           <a:solidFill>
                             <a:srgbClr val="26262A"/>
                           </a:solidFill>
@@ -11740,7 +14108,7 @@
                     <a:p>
                       <a:pPr algn="r"/>
                       <a:r>
-                        <a:rPr sz="1300" b="0">
+                        <a:rPr sz="1250" b="0">
                           <a:solidFill>
                             <a:srgbClr val="26262A"/>
                           </a:solidFill>
@@ -11757,7 +14125,7 @@
                   </a:tcPr>
                 </a:tc>
               </a:tr>
-              <a:tr h="384048">
+              <a:tr h="333756">
                 <a:tc>
                   <a:txBody>
                     <a:bodyPr/>
@@ -11765,7 +14133,7 @@
                     <a:p>
                       <a:pPr algn="l"/>
                       <a:r>
-                        <a:rPr sz="1300" b="0">
+                        <a:rPr sz="1250" b="0">
                           <a:solidFill>
                             <a:srgbClr val="26262A"/>
                           </a:solidFill>
@@ -11788,7 +14156,7 @@
                     <a:p>
                       <a:pPr algn="r"/>
                       <a:r>
-                        <a:rPr sz="1300" b="0">
+                        <a:rPr sz="1250" b="0">
                           <a:solidFill>
                             <a:srgbClr val="26262A"/>
                           </a:solidFill>
@@ -11811,7 +14179,7 @@
                     <a:p>
                       <a:pPr algn="r"/>
                       <a:r>
-                        <a:rPr sz="1300" b="0">
+                        <a:rPr sz="1250" b="0">
                           <a:solidFill>
                             <a:srgbClr val="26262A"/>
                           </a:solidFill>
@@ -11834,7 +14202,7 @@
                     <a:p>
                       <a:pPr algn="r"/>
                       <a:r>
-                        <a:rPr sz="1300" b="0">
+                        <a:rPr sz="1250" b="0">
                           <a:solidFill>
                             <a:srgbClr val="26262A"/>
                           </a:solidFill>
@@ -11863,7 +14231,7 @@
         </p:nvSpPr>
         <p:spPr>
           <a:xfrm>
-            <a:off x="822960" y="5605272"/>
+            <a:off x="822960" y="6016752"/>
             <a:ext cx="10515600" cy="731520"/>
           </a:xfrm>
           <a:prstGeom prst="rect">
@@ -11905,7 +14273,23 @@
                 </a:solidFill>
                 <a:latin typeface="Noto Sans CJK TC"/>
               </a:rPr>
-              <a:t>「端點 / 本機」欄位：延遲類為端點慢幾倍，吞吐類為端點剩幾成。</a:t>
+              <a:t>「端點 / 本機」欄位：延遲類為端點慢幾倍，吞吐類為本機是端點的幾倍。</a:t>
+            </a:r>
+          </a:p>
+          <a:p>
+            <a:pPr algn="l">
+              <a:spcAft>
+                <a:spcPts val="300"/>
+              </a:spcAft>
+            </a:pPr>
+            <a:r>
+              <a:rPr sz="1100" b="0">
+                <a:solidFill>
+                  <a:srgbClr val="6B6B70"/>
+                </a:solidFill>
+                <a:latin typeface="Noto Sans CJK TC"/>
+              </a:rPr>
+              <a:t>Prefill / Decode 為 per-user 速率；Output throughput, system 為伺服器整體輸出。</a:t>
             </a:r>
           </a:p>
         </p:txBody>
@@ -12067,8 +14451,8 @@
           <p:nvPr/>
         </p:nvGraphicFramePr>
         <p:xfrm>
-          <a:off x="822960" y="1920240"/>
-          <a:ext cx="10515600" cy="3456432"/>
+          <a:off x="822960" y="1828800"/>
+          <a:ext cx="10515600" cy="4005072"/>
         </p:xfrm>
         <a:graphic>
           <a:graphicData uri="http://schemas.openxmlformats.org/drawingml/2006/table">
@@ -12082,7 +14466,7 @@
                 <a:gridCol w="2651760"/>
                 <a:gridCol w="1554480"/>
               </a:tblGrid>
-              <a:tr h="384048">
+              <a:tr h="333756">
                 <a:tc>
                   <a:txBody>
                     <a:bodyPr/>
@@ -12176,7 +14560,7 @@
                   </a:tcPr>
                 </a:tc>
               </a:tr>
-              <a:tr h="384048">
+              <a:tr h="333756">
                 <a:tc>
                   <a:txBody>
                     <a:bodyPr/>
@@ -12184,7 +14568,7 @@
                     <a:p>
                       <a:pPr algn="l"/>
                       <a:r>
-                        <a:rPr sz="1300" b="0">
+                        <a:rPr sz="1250" b="0">
                           <a:solidFill>
                             <a:srgbClr val="26262A"/>
                           </a:solidFill>
@@ -12207,7 +14591,7 @@
                     <a:p>
                       <a:pPr algn="r"/>
                       <a:r>
-                        <a:rPr sz="1300" b="0">
+                        <a:rPr sz="1250" b="0">
                           <a:solidFill>
                             <a:srgbClr val="26262A"/>
                           </a:solidFill>
@@ -12230,7 +14614,7 @@
                     <a:p>
                       <a:pPr algn="r"/>
                       <a:r>
-                        <a:rPr sz="1300" b="0">
+                        <a:rPr sz="1250" b="0">
                           <a:solidFill>
                             <a:srgbClr val="26262A"/>
                           </a:solidFill>
@@ -12253,7 +14637,7 @@
                     <a:p>
                       <a:pPr algn="r"/>
                       <a:r>
-                        <a:rPr sz="1300" b="1">
+                        <a:rPr sz="1250" b="1">
                           <a:solidFill>
                             <a:srgbClr val="26262A"/>
                           </a:solidFill>
@@ -12270,7 +14654,7 @@
                   </a:tcPr>
                 </a:tc>
               </a:tr>
-              <a:tr h="384048">
+              <a:tr h="333756">
                 <a:tc>
                   <a:txBody>
                     <a:bodyPr/>
@@ -12278,7 +14662,7 @@
                     <a:p>
                       <a:pPr algn="l"/>
                       <a:r>
-                        <a:rPr sz="1300" b="0">
+                        <a:rPr sz="1250" b="0">
                           <a:solidFill>
                             <a:srgbClr val="26262A"/>
                           </a:solidFill>
@@ -12301,7 +14685,7 @@
                     <a:p>
                       <a:pPr algn="r"/>
                       <a:r>
-                        <a:rPr sz="1300" b="0">
+                        <a:rPr sz="1250" b="0">
                           <a:solidFill>
                             <a:srgbClr val="26262A"/>
                           </a:solidFill>
@@ -12324,7 +14708,7 @@
                     <a:p>
                       <a:pPr algn="r"/>
                       <a:r>
-                        <a:rPr sz="1300" b="0">
+                        <a:rPr sz="1250" b="0">
                           <a:solidFill>
                             <a:srgbClr val="26262A"/>
                           </a:solidFill>
@@ -12347,7 +14731,7 @@
                     <a:p>
                       <a:pPr algn="r"/>
                       <a:r>
-                        <a:rPr sz="1300" b="1">
+                        <a:rPr sz="1250" b="1">
                           <a:solidFill>
                             <a:srgbClr val="26262A"/>
                           </a:solidFill>
@@ -12364,7 +14748,7 @@
                   </a:tcPr>
                 </a:tc>
               </a:tr>
-              <a:tr h="384048">
+              <a:tr h="333756">
                 <a:tc>
                   <a:txBody>
                     <a:bodyPr/>
@@ -12372,7 +14756,7 @@
                     <a:p>
                       <a:pPr algn="l"/>
                       <a:r>
-                        <a:rPr sz="1300" b="0">
+                        <a:rPr sz="1250" b="0">
                           <a:solidFill>
                             <a:srgbClr val="26262A"/>
                           </a:solidFill>
@@ -12395,7 +14779,7 @@
                     <a:p>
                       <a:pPr algn="r"/>
                       <a:r>
-                        <a:rPr sz="1300" b="0">
+                        <a:rPr sz="1250" b="0">
                           <a:solidFill>
                             <a:srgbClr val="26262A"/>
                           </a:solidFill>
@@ -12418,7 +14802,7 @@
                     <a:p>
                       <a:pPr algn="r"/>
                       <a:r>
-                        <a:rPr sz="1300" b="0">
+                        <a:rPr sz="1250" b="0">
                           <a:solidFill>
                             <a:srgbClr val="26262A"/>
                           </a:solidFill>
@@ -12441,7 +14825,7 @@
                     <a:p>
                       <a:pPr algn="r"/>
                       <a:r>
-                        <a:rPr sz="1300" b="1">
+                        <a:rPr sz="1250" b="1">
                           <a:solidFill>
                             <a:srgbClr val="26262A"/>
                           </a:solidFill>
@@ -12458,7 +14842,7 @@
                   </a:tcPr>
                 </a:tc>
               </a:tr>
-              <a:tr h="384048">
+              <a:tr h="333756">
                 <a:tc>
                   <a:txBody>
                     <a:bodyPr/>
@@ -12466,7 +14850,289 @@
                     <a:p>
                       <a:pPr algn="l"/>
                       <a:r>
-                        <a:rPr sz="1300" b="0">
+                        <a:rPr sz="1250" b="0">
+                          <a:solidFill>
+                            <a:srgbClr val="26262A"/>
+                          </a:solidFill>
+                          <a:latin typeface="Noto Sans CJK TC"/>
+                        </a:rPr>
+                        <a:t>Prefill throughput (tok/s/user)</a:t>
+                      </a:r>
+                    </a:p>
+                  </a:txBody>
+                  <a:tcPr>
+                    <a:solidFill>
+                      <a:srgbClr val="FCFCFB"/>
+                    </a:solidFill>
+                  </a:tcPr>
+                </a:tc>
+                <a:tc>
+                  <a:txBody>
+                    <a:bodyPr/>
+                    <a:lstStyle/>
+                    <a:p>
+                      <a:pPr algn="r"/>
+                      <a:r>
+                        <a:rPr sz="1250" b="0">
+                          <a:solidFill>
+                            <a:srgbClr val="26262A"/>
+                          </a:solidFill>
+                          <a:latin typeface="Noto Sans CJK TC"/>
+                        </a:rPr>
+                        <a:t>16,659.7</a:t>
+                      </a:r>
+                    </a:p>
+                  </a:txBody>
+                  <a:tcPr>
+                    <a:solidFill>
+                      <a:srgbClr val="FCFCFB"/>
+                    </a:solidFill>
+                  </a:tcPr>
+                </a:tc>
+                <a:tc>
+                  <a:txBody>
+                    <a:bodyPr/>
+                    <a:lstStyle/>
+                    <a:p>
+                      <a:pPr algn="r"/>
+                      <a:r>
+                        <a:rPr sz="1250" b="0">
+                          <a:solidFill>
+                            <a:srgbClr val="26262A"/>
+                          </a:solidFill>
+                          <a:latin typeface="Noto Sans CJK TC"/>
+                        </a:rPr>
+                        <a:t>94.3</a:t>
+                      </a:r>
+                    </a:p>
+                  </a:txBody>
+                  <a:tcPr>
+                    <a:solidFill>
+                      <a:srgbClr val="FCFCFB"/>
+                    </a:solidFill>
+                  </a:tcPr>
+                </a:tc>
+                <a:tc>
+                  <a:txBody>
+                    <a:bodyPr/>
+                    <a:lstStyle/>
+                    <a:p>
+                      <a:pPr algn="r"/>
+                      <a:r>
+                        <a:rPr sz="1250" b="1">
+                          <a:solidFill>
+                            <a:srgbClr val="26262A"/>
+                          </a:solidFill>
+                          <a:latin typeface="Noto Sans CJK TC"/>
+                        </a:rPr>
+                        <a:t>176.60×</a:t>
+                      </a:r>
+                    </a:p>
+                  </a:txBody>
+                  <a:tcPr>
+                    <a:solidFill>
+                      <a:srgbClr val="FCFCFB"/>
+                    </a:solidFill>
+                  </a:tcPr>
+                </a:tc>
+              </a:tr>
+              <a:tr h="333756">
+                <a:tc>
+                  <a:txBody>
+                    <a:bodyPr/>
+                    <a:lstStyle/>
+                    <a:p>
+                      <a:pPr algn="l"/>
+                      <a:r>
+                        <a:rPr sz="1250" b="0">
+                          <a:solidFill>
+                            <a:srgbClr val="26262A"/>
+                          </a:solidFill>
+                          <a:latin typeface="Noto Sans CJK TC"/>
+                        </a:rPr>
+                        <a:t>Decode throughput (tok/s/user)</a:t>
+                      </a:r>
+                    </a:p>
+                  </a:txBody>
+                  <a:tcPr>
+                    <a:solidFill>
+                      <a:srgbClr val="FCFCFB"/>
+                    </a:solidFill>
+                  </a:tcPr>
+                </a:tc>
+                <a:tc>
+                  <a:txBody>
+                    <a:bodyPr/>
+                    <a:lstStyle/>
+                    <a:p>
+                      <a:pPr algn="r"/>
+                      <a:r>
+                        <a:rPr sz="1250" b="0">
+                          <a:solidFill>
+                            <a:srgbClr val="26262A"/>
+                          </a:solidFill>
+                          <a:latin typeface="Noto Sans CJK TC"/>
+                        </a:rPr>
+                        <a:t>13.66</a:t>
+                      </a:r>
+                    </a:p>
+                  </a:txBody>
+                  <a:tcPr>
+                    <a:solidFill>
+                      <a:srgbClr val="FCFCFB"/>
+                    </a:solidFill>
+                  </a:tcPr>
+                </a:tc>
+                <a:tc>
+                  <a:txBody>
+                    <a:bodyPr/>
+                    <a:lstStyle/>
+                    <a:p>
+                      <a:pPr algn="r"/>
+                      <a:r>
+                        <a:rPr sz="1250" b="0">
+                          <a:solidFill>
+                            <a:srgbClr val="26262A"/>
+                          </a:solidFill>
+                          <a:latin typeface="Noto Sans CJK TC"/>
+                        </a:rPr>
+                        <a:t>13.94</a:t>
+                      </a:r>
+                    </a:p>
+                  </a:txBody>
+                  <a:tcPr>
+                    <a:solidFill>
+                      <a:srgbClr val="FCFCFB"/>
+                    </a:solidFill>
+                  </a:tcPr>
+                </a:tc>
+                <a:tc>
+                  <a:txBody>
+                    <a:bodyPr/>
+                    <a:lstStyle/>
+                    <a:p>
+                      <a:pPr algn="r"/>
+                      <a:r>
+                        <a:rPr sz="1250" b="1">
+                          <a:solidFill>
+                            <a:srgbClr val="26262A"/>
+                          </a:solidFill>
+                          <a:latin typeface="Noto Sans CJK TC"/>
+                        </a:rPr>
+                        <a:t>0.98×</a:t>
+                      </a:r>
+                    </a:p>
+                  </a:txBody>
+                  <a:tcPr>
+                    <a:solidFill>
+                      <a:srgbClr val="FCFCFB"/>
+                    </a:solidFill>
+                  </a:tcPr>
+                </a:tc>
+              </a:tr>
+              <a:tr h="333756">
+                <a:tc>
+                  <a:txBody>
+                    <a:bodyPr/>
+                    <a:lstStyle/>
+                    <a:p>
+                      <a:pPr algn="l"/>
+                      <a:r>
+                        <a:rPr sz="1250" b="0">
+                          <a:solidFill>
+                            <a:srgbClr val="26262A"/>
+                          </a:solidFill>
+                          <a:latin typeface="Noto Sans CJK TC"/>
+                        </a:rPr>
+                        <a:t>Output throughput, system (tok/s)</a:t>
+                      </a:r>
+                    </a:p>
+                  </a:txBody>
+                  <a:tcPr>
+                    <a:solidFill>
+                      <a:srgbClr val="FCFCFB"/>
+                    </a:solidFill>
+                  </a:tcPr>
+                </a:tc>
+                <a:tc>
+                  <a:txBody>
+                    <a:bodyPr/>
+                    <a:lstStyle/>
+                    <a:p>
+                      <a:pPr algn="r"/>
+                      <a:r>
+                        <a:rPr sz="1250" b="0">
+                          <a:solidFill>
+                            <a:srgbClr val="26262A"/>
+                          </a:solidFill>
+                          <a:latin typeface="Noto Sans CJK TC"/>
+                        </a:rPr>
+                        <a:t>13.61</a:t>
+                      </a:r>
+                    </a:p>
+                  </a:txBody>
+                  <a:tcPr>
+                    <a:solidFill>
+                      <a:srgbClr val="FCFCFB"/>
+                    </a:solidFill>
+                  </a:tcPr>
+                </a:tc>
+                <a:tc>
+                  <a:txBody>
+                    <a:bodyPr/>
+                    <a:lstStyle/>
+                    <a:p>
+                      <a:pPr algn="r"/>
+                      <a:r>
+                        <a:rPr sz="1250" b="0">
+                          <a:solidFill>
+                            <a:srgbClr val="26262A"/>
+                          </a:solidFill>
+                          <a:latin typeface="Noto Sans CJK TC"/>
+                        </a:rPr>
+                        <a:t>5.44</a:t>
+                      </a:r>
+                    </a:p>
+                  </a:txBody>
+                  <a:tcPr>
+                    <a:solidFill>
+                      <a:srgbClr val="FCFCFB"/>
+                    </a:solidFill>
+                  </a:tcPr>
+                </a:tc>
+                <a:tc>
+                  <a:txBody>
+                    <a:bodyPr/>
+                    <a:lstStyle/>
+                    <a:p>
+                      <a:pPr algn="r"/>
+                      <a:r>
+                        <a:rPr sz="1250" b="1">
+                          <a:solidFill>
+                            <a:srgbClr val="26262A"/>
+                          </a:solidFill>
+                          <a:latin typeface="Noto Sans CJK TC"/>
+                        </a:rPr>
+                        <a:t>2.50×</a:t>
+                      </a:r>
+                    </a:p>
+                  </a:txBody>
+                  <a:tcPr>
+                    <a:solidFill>
+                      <a:srgbClr val="FCFCFB"/>
+                    </a:solidFill>
+                  </a:tcPr>
+                </a:tc>
+              </a:tr>
+              <a:tr h="333756">
+                <a:tc>
+                  <a:txBody>
+                    <a:bodyPr/>
+                    <a:lstStyle/>
+                    <a:p>
+                      <a:pPr algn="l"/>
+                      <a:r>
+                        <a:rPr sz="1250" b="0">
                           <a:solidFill>
                             <a:srgbClr val="26262A"/>
                           </a:solidFill>
@@ -12489,7 +15155,7 @@
                     <a:p>
                       <a:pPr algn="r"/>
                       <a:r>
-                        <a:rPr sz="1300" b="0">
+                        <a:rPr sz="1250" b="0">
                           <a:solidFill>
                             <a:srgbClr val="26262A"/>
                           </a:solidFill>
@@ -12512,7 +15178,7 @@
                     <a:p>
                       <a:pPr algn="r"/>
                       <a:r>
-                        <a:rPr sz="1300" b="0">
+                        <a:rPr sz="1250" b="0">
                           <a:solidFill>
                             <a:srgbClr val="26262A"/>
                           </a:solidFill>
@@ -12535,7 +15201,7 @@
                     <a:p>
                       <a:pPr algn="r"/>
                       <a:r>
-                        <a:rPr sz="1300" b="1">
+                        <a:rPr sz="1250" b="1">
                           <a:solidFill>
                             <a:srgbClr val="26262A"/>
                           </a:solidFill>
@@ -12552,7 +15218,7 @@
                   </a:tcPr>
                 </a:tc>
               </a:tr>
-              <a:tr h="384048">
+              <a:tr h="333756">
                 <a:tc>
                   <a:txBody>
                     <a:bodyPr/>
@@ -12560,7 +15226,7 @@
                     <a:p>
                       <a:pPr algn="l"/>
                       <a:r>
-                        <a:rPr sz="1300" b="0">
+                        <a:rPr sz="1250" b="0">
                           <a:solidFill>
                             <a:srgbClr val="26262A"/>
                           </a:solidFill>
@@ -12583,7 +15249,7 @@
                     <a:p>
                       <a:pPr algn="r"/>
                       <a:r>
-                        <a:rPr sz="1300" b="0">
+                        <a:rPr sz="1250" b="0">
                           <a:solidFill>
                             <a:srgbClr val="26262A"/>
                           </a:solidFill>
@@ -12606,7 +15272,7 @@
                     <a:p>
                       <a:pPr algn="r"/>
                       <a:r>
-                        <a:rPr sz="1300" b="0">
+                        <a:rPr sz="1250" b="0">
                           <a:solidFill>
                             <a:srgbClr val="26262A"/>
                           </a:solidFill>
@@ -12629,7 +15295,7 @@
                     <a:p>
                       <a:pPr algn="r"/>
                       <a:r>
-                        <a:rPr sz="1300" b="1">
+                        <a:rPr sz="1250" b="1">
                           <a:solidFill>
                             <a:srgbClr val="1BAF7A"/>
                           </a:solidFill>
@@ -12646,7 +15312,7 @@
                   </a:tcPr>
                 </a:tc>
               </a:tr>
-              <a:tr h="384048">
+              <a:tr h="333756">
                 <a:tc>
                   <a:txBody>
                     <a:bodyPr/>
@@ -12654,7 +15320,7 @@
                     <a:p>
                       <a:pPr algn="l"/>
                       <a:r>
-                        <a:rPr sz="1300" b="0">
+                        <a:rPr sz="1250" b="0">
                           <a:solidFill>
                             <a:srgbClr val="26262A"/>
                           </a:solidFill>
@@ -12677,7 +15343,7 @@
                     <a:p>
                       <a:pPr algn="r"/>
                       <a:r>
-                        <a:rPr sz="1300" b="0">
+                        <a:rPr sz="1250" b="0">
                           <a:solidFill>
                             <a:srgbClr val="26262A"/>
                           </a:solidFill>
@@ -12700,7 +15366,7 @@
                     <a:p>
                       <a:pPr algn="r"/>
                       <a:r>
-                        <a:rPr sz="1300" b="0">
+                        <a:rPr sz="1250" b="0">
                           <a:solidFill>
                             <a:srgbClr val="26262A"/>
                           </a:solidFill>
@@ -12723,7 +15389,7 @@
                     <a:p>
                       <a:pPr algn="r"/>
                       <a:r>
-                        <a:rPr sz="1300" b="1">
+                        <a:rPr sz="1250" b="1">
                           <a:solidFill>
                             <a:srgbClr val="1BAF7A"/>
                           </a:solidFill>
@@ -12740,7 +15406,7 @@
                   </a:tcPr>
                 </a:tc>
               </a:tr>
-              <a:tr h="384048">
+              <a:tr h="333756">
                 <a:tc>
                   <a:txBody>
                     <a:bodyPr/>
@@ -12748,7 +15414,7 @@
                     <a:p>
                       <a:pPr algn="l"/>
                       <a:r>
-                        <a:rPr sz="1300" b="0">
+                        <a:rPr sz="1250" b="0">
                           <a:solidFill>
                             <a:srgbClr val="26262A"/>
                           </a:solidFill>
@@ -12771,7 +15437,7 @@
                     <a:p>
                       <a:pPr algn="r"/>
                       <a:r>
-                        <a:rPr sz="1300" b="0">
+                        <a:rPr sz="1250" b="0">
                           <a:solidFill>
                             <a:srgbClr val="26262A"/>
                           </a:solidFill>
@@ -12794,7 +15460,7 @@
                     <a:p>
                       <a:pPr algn="r"/>
                       <a:r>
-                        <a:rPr sz="1300" b="0">
+                        <a:rPr sz="1250" b="0">
                           <a:solidFill>
                             <a:srgbClr val="26262A"/>
                           </a:solidFill>
@@ -12817,7 +15483,7 @@
                     <a:p>
                       <a:pPr algn="r"/>
                       <a:r>
-                        <a:rPr sz="1300" b="0">
+                        <a:rPr sz="1250" b="0">
                           <a:solidFill>
                             <a:srgbClr val="26262A"/>
                           </a:solidFill>
@@ -12834,7 +15500,7 @@
                   </a:tcPr>
                 </a:tc>
               </a:tr>
-              <a:tr h="384048">
+              <a:tr h="333756">
                 <a:tc>
                   <a:txBody>
                     <a:bodyPr/>
@@ -12842,7 +15508,7 @@
                     <a:p>
                       <a:pPr algn="l"/>
                       <a:r>
-                        <a:rPr sz="1300" b="0">
+                        <a:rPr sz="1250" b="0">
                           <a:solidFill>
                             <a:srgbClr val="26262A"/>
                           </a:solidFill>
@@ -12865,7 +15531,7 @@
                     <a:p>
                       <a:pPr algn="r"/>
                       <a:r>
-                        <a:rPr sz="1300" b="0">
+                        <a:rPr sz="1250" b="0">
                           <a:solidFill>
                             <a:srgbClr val="26262A"/>
                           </a:solidFill>
@@ -12888,7 +15554,7 @@
                     <a:p>
                       <a:pPr algn="r"/>
                       <a:r>
-                        <a:rPr sz="1300" b="0">
+                        <a:rPr sz="1250" b="0">
                           <a:solidFill>
                             <a:srgbClr val="26262A"/>
                           </a:solidFill>
@@ -12911,7 +15577,7 @@
                     <a:p>
                       <a:pPr algn="r"/>
                       <a:r>
-                        <a:rPr sz="1300" b="0">
+                        <a:rPr sz="1250" b="0">
                           <a:solidFill>
                             <a:srgbClr val="26262A"/>
                           </a:solidFill>
@@ -12940,7 +15606,7 @@
         </p:nvSpPr>
         <p:spPr>
           <a:xfrm>
-            <a:off x="822960" y="5605272"/>
+            <a:off x="822960" y="6016752"/>
             <a:ext cx="10515600" cy="731520"/>
           </a:xfrm>
           <a:prstGeom prst="rect">
@@ -12982,7 +15648,23 @@
                 </a:solidFill>
                 <a:latin typeface="Noto Sans CJK TC"/>
               </a:rPr>
-              <a:t>「端點 / 本機」欄位：延遲類為端點慢幾倍，吞吐類為端點剩幾成。</a:t>
+              <a:t>「端點 / 本機」欄位：延遲類為端點慢幾倍，吞吐類為本機是端點的幾倍。</a:t>
+            </a:r>
+          </a:p>
+          <a:p>
+            <a:pPr algn="l">
+              <a:spcAft>
+                <a:spcPts val="300"/>
+              </a:spcAft>
+            </a:pPr>
+            <a:r>
+              <a:rPr sz="1100" b="0">
+                <a:solidFill>
+                  <a:srgbClr val="6B6B70"/>
+                </a:solidFill>
+                <a:latin typeface="Noto Sans CJK TC"/>
+              </a:rPr>
+              <a:t>Prefill / Decode 為 per-user 速率；Output throughput, system 為伺服器整體輸出。</a:t>
             </a:r>
           </a:p>
         </p:txBody>
@@ -13144,8 +15826,8 @@
           <p:nvPr/>
         </p:nvGraphicFramePr>
         <p:xfrm>
-          <a:off x="822960" y="1920240"/>
-          <a:ext cx="10515600" cy="3456432"/>
+          <a:off x="822960" y="1828800"/>
+          <a:ext cx="10515600" cy="4005072"/>
         </p:xfrm>
         <a:graphic>
           <a:graphicData uri="http://schemas.openxmlformats.org/drawingml/2006/table">
@@ -13159,7 +15841,7 @@
                 <a:gridCol w="2651760"/>
                 <a:gridCol w="1554480"/>
               </a:tblGrid>
-              <a:tr h="384048">
+              <a:tr h="333756">
                 <a:tc>
                   <a:txBody>
                     <a:bodyPr/>
@@ -13253,7 +15935,7 @@
                   </a:tcPr>
                 </a:tc>
               </a:tr>
-              <a:tr h="384048">
+              <a:tr h="333756">
                 <a:tc>
                   <a:txBody>
                     <a:bodyPr/>
@@ -13261,7 +15943,7 @@
                     <a:p>
                       <a:pPr algn="l"/>
                       <a:r>
-                        <a:rPr sz="1300" b="0">
+                        <a:rPr sz="1250" b="0">
                           <a:solidFill>
                             <a:srgbClr val="26262A"/>
                           </a:solidFill>
@@ -13284,7 +15966,7 @@
                     <a:p>
                       <a:pPr algn="r"/>
                       <a:r>
-                        <a:rPr sz="1300" b="0">
+                        <a:rPr sz="1250" b="0">
                           <a:solidFill>
                             <a:srgbClr val="26262A"/>
                           </a:solidFill>
@@ -13307,7 +15989,7 @@
                     <a:p>
                       <a:pPr algn="r"/>
                       <a:r>
-                        <a:rPr sz="1300" b="0">
+                        <a:rPr sz="1250" b="0">
                           <a:solidFill>
                             <a:srgbClr val="26262A"/>
                           </a:solidFill>
@@ -13330,7 +16012,7 @@
                     <a:p>
                       <a:pPr algn="r"/>
                       <a:r>
-                        <a:rPr sz="1300" b="1">
+                        <a:rPr sz="1250" b="1">
                           <a:solidFill>
                             <a:srgbClr val="26262A"/>
                           </a:solidFill>
@@ -13347,7 +16029,7 @@
                   </a:tcPr>
                 </a:tc>
               </a:tr>
-              <a:tr h="384048">
+              <a:tr h="333756">
                 <a:tc>
                   <a:txBody>
                     <a:bodyPr/>
@@ -13355,7 +16037,7 @@
                     <a:p>
                       <a:pPr algn="l"/>
                       <a:r>
-                        <a:rPr sz="1300" b="0">
+                        <a:rPr sz="1250" b="0">
                           <a:solidFill>
                             <a:srgbClr val="26262A"/>
                           </a:solidFill>
@@ -13378,7 +16060,7 @@
                     <a:p>
                       <a:pPr algn="r"/>
                       <a:r>
-                        <a:rPr sz="1300" b="0">
+                        <a:rPr sz="1250" b="0">
                           <a:solidFill>
                             <a:srgbClr val="26262A"/>
                           </a:solidFill>
@@ -13401,7 +16083,7 @@
                     <a:p>
                       <a:pPr algn="r"/>
                       <a:r>
-                        <a:rPr sz="1300" b="0">
+                        <a:rPr sz="1250" b="0">
                           <a:solidFill>
                             <a:srgbClr val="26262A"/>
                           </a:solidFill>
@@ -13424,7 +16106,7 @@
                     <a:p>
                       <a:pPr algn="r"/>
                       <a:r>
-                        <a:rPr sz="1300" b="1">
+                        <a:rPr sz="1250" b="1">
                           <a:solidFill>
                             <a:srgbClr val="26262A"/>
                           </a:solidFill>
@@ -13441,7 +16123,7 @@
                   </a:tcPr>
                 </a:tc>
               </a:tr>
-              <a:tr h="384048">
+              <a:tr h="333756">
                 <a:tc>
                   <a:txBody>
                     <a:bodyPr/>
@@ -13449,7 +16131,7 @@
                     <a:p>
                       <a:pPr algn="l"/>
                       <a:r>
-                        <a:rPr sz="1300" b="0">
+                        <a:rPr sz="1250" b="0">
                           <a:solidFill>
                             <a:srgbClr val="26262A"/>
                           </a:solidFill>
@@ -13472,7 +16154,7 @@
                     <a:p>
                       <a:pPr algn="r"/>
                       <a:r>
-                        <a:rPr sz="1300" b="0">
+                        <a:rPr sz="1250" b="0">
                           <a:solidFill>
                             <a:srgbClr val="26262A"/>
                           </a:solidFill>
@@ -13495,7 +16177,7 @@
                     <a:p>
                       <a:pPr algn="r"/>
                       <a:r>
-                        <a:rPr sz="1300" b="0">
+                        <a:rPr sz="1250" b="0">
                           <a:solidFill>
                             <a:srgbClr val="26262A"/>
                           </a:solidFill>
@@ -13518,7 +16200,7 @@
                     <a:p>
                       <a:pPr algn="r"/>
                       <a:r>
-                        <a:rPr sz="1300" b="1">
+                        <a:rPr sz="1250" b="1">
                           <a:solidFill>
                             <a:srgbClr val="26262A"/>
                           </a:solidFill>
@@ -13535,7 +16217,7 @@
                   </a:tcPr>
                 </a:tc>
               </a:tr>
-              <a:tr h="384048">
+              <a:tr h="333756">
                 <a:tc>
                   <a:txBody>
                     <a:bodyPr/>
@@ -13543,7 +16225,289 @@
                     <a:p>
                       <a:pPr algn="l"/>
                       <a:r>
-                        <a:rPr sz="1300" b="0">
+                        <a:rPr sz="1250" b="0">
+                          <a:solidFill>
+                            <a:srgbClr val="26262A"/>
+                          </a:solidFill>
+                          <a:latin typeface="Noto Sans CJK TC"/>
+                        </a:rPr>
+                        <a:t>Prefill throughput (tok/s/user)</a:t>
+                      </a:r>
+                    </a:p>
+                  </a:txBody>
+                  <a:tcPr>
+                    <a:solidFill>
+                      <a:srgbClr val="FCFCFB"/>
+                    </a:solidFill>
+                  </a:tcPr>
+                </a:tc>
+                <a:tc>
+                  <a:txBody>
+                    <a:bodyPr/>
+                    <a:lstStyle/>
+                    <a:p>
+                      <a:pPr algn="r"/>
+                      <a:r>
+                        <a:rPr sz="1250" b="0">
+                          <a:solidFill>
+                            <a:srgbClr val="26262A"/>
+                          </a:solidFill>
+                          <a:latin typeface="Noto Sans CJK TC"/>
+                        </a:rPr>
+                        <a:t>7,474.3</a:t>
+                      </a:r>
+                    </a:p>
+                  </a:txBody>
+                  <a:tcPr>
+                    <a:solidFill>
+                      <a:srgbClr val="FCFCFB"/>
+                    </a:solidFill>
+                  </a:tcPr>
+                </a:tc>
+                <a:tc>
+                  <a:txBody>
+                    <a:bodyPr/>
+                    <a:lstStyle/>
+                    <a:p>
+                      <a:pPr algn="r"/>
+                      <a:r>
+                        <a:rPr sz="1250" b="0">
+                          <a:solidFill>
+                            <a:srgbClr val="26262A"/>
+                          </a:solidFill>
+                          <a:latin typeface="Noto Sans CJK TC"/>
+                        </a:rPr>
+                        <a:t>51.8</a:t>
+                      </a:r>
+                    </a:p>
+                  </a:txBody>
+                  <a:tcPr>
+                    <a:solidFill>
+                      <a:srgbClr val="FCFCFB"/>
+                    </a:solidFill>
+                  </a:tcPr>
+                </a:tc>
+                <a:tc>
+                  <a:txBody>
+                    <a:bodyPr/>
+                    <a:lstStyle/>
+                    <a:p>
+                      <a:pPr algn="r"/>
+                      <a:r>
+                        <a:rPr sz="1250" b="1">
+                          <a:solidFill>
+                            <a:srgbClr val="26262A"/>
+                          </a:solidFill>
+                          <a:latin typeface="Noto Sans CJK TC"/>
+                        </a:rPr>
+                        <a:t>144.24×</a:t>
+                      </a:r>
+                    </a:p>
+                  </a:txBody>
+                  <a:tcPr>
+                    <a:solidFill>
+                      <a:srgbClr val="FCFCFB"/>
+                    </a:solidFill>
+                  </a:tcPr>
+                </a:tc>
+              </a:tr>
+              <a:tr h="333756">
+                <a:tc>
+                  <a:txBody>
+                    <a:bodyPr/>
+                    <a:lstStyle/>
+                    <a:p>
+                      <a:pPr algn="l"/>
+                      <a:r>
+                        <a:rPr sz="1250" b="0">
+                          <a:solidFill>
+                            <a:srgbClr val="26262A"/>
+                          </a:solidFill>
+                          <a:latin typeface="Noto Sans CJK TC"/>
+                        </a:rPr>
+                        <a:t>Decode throughput (tok/s/user)</a:t>
+                      </a:r>
+                    </a:p>
+                  </a:txBody>
+                  <a:tcPr>
+                    <a:solidFill>
+                      <a:srgbClr val="FCFCFB"/>
+                    </a:solidFill>
+                  </a:tcPr>
+                </a:tc>
+                <a:tc>
+                  <a:txBody>
+                    <a:bodyPr/>
+                    <a:lstStyle/>
+                    <a:p>
+                      <a:pPr algn="r"/>
+                      <a:r>
+                        <a:rPr sz="1250" b="0">
+                          <a:solidFill>
+                            <a:srgbClr val="26262A"/>
+                          </a:solidFill>
+                          <a:latin typeface="Noto Sans CJK TC"/>
+                        </a:rPr>
+                        <a:t>13.76</a:t>
+                      </a:r>
+                    </a:p>
+                  </a:txBody>
+                  <a:tcPr>
+                    <a:solidFill>
+                      <a:srgbClr val="FCFCFB"/>
+                    </a:solidFill>
+                  </a:tcPr>
+                </a:tc>
+                <a:tc>
+                  <a:txBody>
+                    <a:bodyPr/>
+                    <a:lstStyle/>
+                    <a:p>
+                      <a:pPr algn="r"/>
+                      <a:r>
+                        <a:rPr sz="1250" b="0">
+                          <a:solidFill>
+                            <a:srgbClr val="26262A"/>
+                          </a:solidFill>
+                          <a:latin typeface="Noto Sans CJK TC"/>
+                        </a:rPr>
+                        <a:t>14.86</a:t>
+                      </a:r>
+                    </a:p>
+                  </a:txBody>
+                  <a:tcPr>
+                    <a:solidFill>
+                      <a:srgbClr val="FCFCFB"/>
+                    </a:solidFill>
+                  </a:tcPr>
+                </a:tc>
+                <a:tc>
+                  <a:txBody>
+                    <a:bodyPr/>
+                    <a:lstStyle/>
+                    <a:p>
+                      <a:pPr algn="r"/>
+                      <a:r>
+                        <a:rPr sz="1250" b="1">
+                          <a:solidFill>
+                            <a:srgbClr val="26262A"/>
+                          </a:solidFill>
+                          <a:latin typeface="Noto Sans CJK TC"/>
+                        </a:rPr>
+                        <a:t>0.93×</a:t>
+                      </a:r>
+                    </a:p>
+                  </a:txBody>
+                  <a:tcPr>
+                    <a:solidFill>
+                      <a:srgbClr val="FCFCFB"/>
+                    </a:solidFill>
+                  </a:tcPr>
+                </a:tc>
+              </a:tr>
+              <a:tr h="333756">
+                <a:tc>
+                  <a:txBody>
+                    <a:bodyPr/>
+                    <a:lstStyle/>
+                    <a:p>
+                      <a:pPr algn="l"/>
+                      <a:r>
+                        <a:rPr sz="1250" b="0">
+                          <a:solidFill>
+                            <a:srgbClr val="26262A"/>
+                          </a:solidFill>
+                          <a:latin typeface="Noto Sans CJK TC"/>
+                        </a:rPr>
+                        <a:t>Output throughput, system (tok/s)</a:t>
+                      </a:r>
+                    </a:p>
+                  </a:txBody>
+                  <a:tcPr>
+                    <a:solidFill>
+                      <a:srgbClr val="FCFCFB"/>
+                    </a:solidFill>
+                  </a:tcPr>
+                </a:tc>
+                <a:tc>
+                  <a:txBody>
+                    <a:bodyPr/>
+                    <a:lstStyle/>
+                    <a:p>
+                      <a:pPr algn="r"/>
+                      <a:r>
+                        <a:rPr sz="1250" b="0">
+                          <a:solidFill>
+                            <a:srgbClr val="26262A"/>
+                          </a:solidFill>
+                          <a:latin typeface="Noto Sans CJK TC"/>
+                        </a:rPr>
+                        <a:t>13.75</a:t>
+                      </a:r>
+                    </a:p>
+                  </a:txBody>
+                  <a:tcPr>
+                    <a:solidFill>
+                      <a:srgbClr val="FCFCFB"/>
+                    </a:solidFill>
+                  </a:tcPr>
+                </a:tc>
+                <a:tc>
+                  <a:txBody>
+                    <a:bodyPr/>
+                    <a:lstStyle/>
+                    <a:p>
+                      <a:pPr algn="r"/>
+                      <a:r>
+                        <a:rPr sz="1250" b="0">
+                          <a:solidFill>
+                            <a:srgbClr val="26262A"/>
+                          </a:solidFill>
+                          <a:latin typeface="Noto Sans CJK TC"/>
+                        </a:rPr>
+                        <a:t>9.54</a:t>
+                      </a:r>
+                    </a:p>
+                  </a:txBody>
+                  <a:tcPr>
+                    <a:solidFill>
+                      <a:srgbClr val="FCFCFB"/>
+                    </a:solidFill>
+                  </a:tcPr>
+                </a:tc>
+                <a:tc>
+                  <a:txBody>
+                    <a:bodyPr/>
+                    <a:lstStyle/>
+                    <a:p>
+                      <a:pPr algn="r"/>
+                      <a:r>
+                        <a:rPr sz="1250" b="1">
+                          <a:solidFill>
+                            <a:srgbClr val="26262A"/>
+                          </a:solidFill>
+                          <a:latin typeface="Noto Sans CJK TC"/>
+                        </a:rPr>
+                        <a:t>1.44×</a:t>
+                      </a:r>
+                    </a:p>
+                  </a:txBody>
+                  <a:tcPr>
+                    <a:solidFill>
+                      <a:srgbClr val="FCFCFB"/>
+                    </a:solidFill>
+                  </a:tcPr>
+                </a:tc>
+              </a:tr>
+              <a:tr h="333756">
+                <a:tc>
+                  <a:txBody>
+                    <a:bodyPr/>
+                    <a:lstStyle/>
+                    <a:p>
+                      <a:pPr algn="l"/>
+                      <a:r>
+                        <a:rPr sz="1250" b="0">
                           <a:solidFill>
                             <a:srgbClr val="26262A"/>
                           </a:solidFill>
@@ -13566,7 +16530,7 @@
                     <a:p>
                       <a:pPr algn="r"/>
                       <a:r>
-                        <a:rPr sz="1300" b="0">
+                        <a:rPr sz="1250" b="0">
                           <a:solidFill>
                             <a:srgbClr val="26262A"/>
                           </a:solidFill>
@@ -13589,7 +16553,7 @@
                     <a:p>
                       <a:pPr algn="r"/>
                       <a:r>
-                        <a:rPr sz="1300" b="0">
+                        <a:rPr sz="1250" b="0">
                           <a:solidFill>
                             <a:srgbClr val="26262A"/>
                           </a:solidFill>
@@ -13612,7 +16576,7 @@
                     <a:p>
                       <a:pPr algn="r"/>
                       <a:r>
-                        <a:rPr sz="1300" b="1">
+                        <a:rPr sz="1250" b="1">
                           <a:solidFill>
                             <a:srgbClr val="26262A"/>
                           </a:solidFill>
@@ -13629,7 +16593,7 @@
                   </a:tcPr>
                 </a:tc>
               </a:tr>
-              <a:tr h="384048">
+              <a:tr h="333756">
                 <a:tc>
                   <a:txBody>
                     <a:bodyPr/>
@@ -13637,7 +16601,7 @@
                     <a:p>
                       <a:pPr algn="l"/>
                       <a:r>
-                        <a:rPr sz="1300" b="0">
+                        <a:rPr sz="1250" b="0">
                           <a:solidFill>
                             <a:srgbClr val="26262A"/>
                           </a:solidFill>
@@ -13660,7 +16624,7 @@
                     <a:p>
                       <a:pPr algn="r"/>
                       <a:r>
-                        <a:rPr sz="1300" b="0">
+                        <a:rPr sz="1250" b="0">
                           <a:solidFill>
                             <a:srgbClr val="26262A"/>
                           </a:solidFill>
@@ -13683,7 +16647,7 @@
                     <a:p>
                       <a:pPr algn="r"/>
                       <a:r>
-                        <a:rPr sz="1300" b="0">
+                        <a:rPr sz="1250" b="0">
                           <a:solidFill>
                             <a:srgbClr val="26262A"/>
                           </a:solidFill>
@@ -13706,7 +16670,7 @@
                     <a:p>
                       <a:pPr algn="r"/>
                       <a:r>
-                        <a:rPr sz="1300" b="1">
+                        <a:rPr sz="1250" b="1">
                           <a:solidFill>
                             <a:srgbClr val="1BAF7A"/>
                           </a:solidFill>
@@ -13723,7 +16687,7 @@
                   </a:tcPr>
                 </a:tc>
               </a:tr>
-              <a:tr h="384048">
+              <a:tr h="333756">
                 <a:tc>
                   <a:txBody>
                     <a:bodyPr/>
@@ -13731,7 +16695,7 @@
                     <a:p>
                       <a:pPr algn="l"/>
                       <a:r>
-                        <a:rPr sz="1300" b="0">
+                        <a:rPr sz="1250" b="0">
                           <a:solidFill>
                             <a:srgbClr val="26262A"/>
                           </a:solidFill>
@@ -13754,7 +16718,7 @@
                     <a:p>
                       <a:pPr algn="r"/>
                       <a:r>
-                        <a:rPr sz="1300" b="0">
+                        <a:rPr sz="1250" b="0">
                           <a:solidFill>
                             <a:srgbClr val="26262A"/>
                           </a:solidFill>
@@ -13777,7 +16741,7 @@
                     <a:p>
                       <a:pPr algn="r"/>
                       <a:r>
-                        <a:rPr sz="1300" b="0">
+                        <a:rPr sz="1250" b="0">
                           <a:solidFill>
                             <a:srgbClr val="26262A"/>
                           </a:solidFill>
@@ -13800,7 +16764,7 @@
                     <a:p>
                       <a:pPr algn="r"/>
                       <a:r>
-                        <a:rPr sz="1300" b="1">
+                        <a:rPr sz="1250" b="1">
                           <a:solidFill>
                             <a:srgbClr val="1BAF7A"/>
                           </a:solidFill>
@@ -13817,7 +16781,7 @@
                   </a:tcPr>
                 </a:tc>
               </a:tr>
-              <a:tr h="384048">
+              <a:tr h="333756">
                 <a:tc>
                   <a:txBody>
                     <a:bodyPr/>
@@ -13825,7 +16789,7 @@
                     <a:p>
                       <a:pPr algn="l"/>
                       <a:r>
-                        <a:rPr sz="1300" b="0">
+                        <a:rPr sz="1250" b="0">
                           <a:solidFill>
                             <a:srgbClr val="26262A"/>
                           </a:solidFill>
@@ -13848,7 +16812,7 @@
                     <a:p>
                       <a:pPr algn="r"/>
                       <a:r>
-                        <a:rPr sz="1300" b="0">
+                        <a:rPr sz="1250" b="0">
                           <a:solidFill>
                             <a:srgbClr val="26262A"/>
                           </a:solidFill>
@@ -13871,7 +16835,7 @@
                     <a:p>
                       <a:pPr algn="r"/>
                       <a:r>
-                        <a:rPr sz="1300" b="0">
+                        <a:rPr sz="1250" b="0">
                           <a:solidFill>
                             <a:srgbClr val="26262A"/>
                           </a:solidFill>
@@ -13894,7 +16858,7 @@
                     <a:p>
                       <a:pPr algn="r"/>
                       <a:r>
-                        <a:rPr sz="1300" b="0">
+                        <a:rPr sz="1250" b="0">
                           <a:solidFill>
                             <a:srgbClr val="26262A"/>
                           </a:solidFill>
@@ -13911,7 +16875,7 @@
                   </a:tcPr>
                 </a:tc>
               </a:tr>
-              <a:tr h="384048">
+              <a:tr h="333756">
                 <a:tc>
                   <a:txBody>
                     <a:bodyPr/>
@@ -13919,7 +16883,7 @@
                     <a:p>
                       <a:pPr algn="l"/>
                       <a:r>
-                        <a:rPr sz="1300" b="0">
+                        <a:rPr sz="1250" b="0">
                           <a:solidFill>
                             <a:srgbClr val="26262A"/>
                           </a:solidFill>
@@ -13942,7 +16906,7 @@
                     <a:p>
                       <a:pPr algn="r"/>
                       <a:r>
-                        <a:rPr sz="1300" b="0">
+                        <a:rPr sz="1250" b="0">
                           <a:solidFill>
                             <a:srgbClr val="26262A"/>
                           </a:solidFill>
@@ -13965,7 +16929,7 @@
                     <a:p>
                       <a:pPr algn="r"/>
                       <a:r>
-                        <a:rPr sz="1300" b="0">
+                        <a:rPr sz="1250" b="0">
                           <a:solidFill>
                             <a:srgbClr val="26262A"/>
                           </a:solidFill>
@@ -13988,7 +16952,7 @@
                     <a:p>
                       <a:pPr algn="r"/>
                       <a:r>
-                        <a:rPr sz="1300" b="0">
+                        <a:rPr sz="1250" b="0">
                           <a:solidFill>
                             <a:srgbClr val="26262A"/>
                           </a:solidFill>
@@ -14017,7 +16981,7 @@
         </p:nvSpPr>
         <p:spPr>
           <a:xfrm>
-            <a:off x="822960" y="5605272"/>
+            <a:off x="822960" y="6016752"/>
             <a:ext cx="10515600" cy="731520"/>
           </a:xfrm>
           <a:prstGeom prst="rect">
@@ -14059,7 +17023,23 @@
                 </a:solidFill>
                 <a:latin typeface="Noto Sans CJK TC"/>
               </a:rPr>
-              <a:t>「端點 / 本機」欄位：延遲類為端點慢幾倍，吞吐類為端點剩幾成。</a:t>
+              <a:t>「端點 / 本機」欄位：延遲類為端點慢幾倍，吞吐類為本機是端點的幾倍。</a:t>
+            </a:r>
+          </a:p>
+          <a:p>
+            <a:pPr algn="l">
+              <a:spcAft>
+                <a:spcPts val="300"/>
+              </a:spcAft>
+            </a:pPr>
+            <a:r>
+              <a:rPr sz="1100" b="0">
+                <a:solidFill>
+                  <a:srgbClr val="6B6B70"/>
+                </a:solidFill>
+                <a:latin typeface="Noto Sans CJK TC"/>
+              </a:rPr>
+              <a:t>Prefill / Decode 為 per-user 速率；Output throughput, system 為伺服器整體輸出。</a:t>
             </a:r>
           </a:p>
         </p:txBody>
@@ -14766,8 +17746,8 @@
           <p:nvPr/>
         </p:nvGraphicFramePr>
         <p:xfrm>
-          <a:off x="822960" y="1920240"/>
-          <a:ext cx="10515600" cy="3456432"/>
+          <a:off x="822960" y="1828800"/>
+          <a:ext cx="10515600" cy="4005072"/>
         </p:xfrm>
         <a:graphic>
           <a:graphicData uri="http://schemas.openxmlformats.org/drawingml/2006/table">
@@ -14781,7 +17761,7 @@
                 <a:gridCol w="2651760"/>
                 <a:gridCol w="1554480"/>
               </a:tblGrid>
-              <a:tr h="384048">
+              <a:tr h="333756">
                 <a:tc>
                   <a:txBody>
                     <a:bodyPr/>
@@ -14875,7 +17855,7 @@
                   </a:tcPr>
                 </a:tc>
               </a:tr>
-              <a:tr h="384048">
+              <a:tr h="333756">
                 <a:tc>
                   <a:txBody>
                     <a:bodyPr/>
@@ -14883,7 +17863,7 @@
                     <a:p>
                       <a:pPr algn="l"/>
                       <a:r>
-                        <a:rPr sz="1300" b="0">
+                        <a:rPr sz="1250" b="0">
                           <a:solidFill>
                             <a:srgbClr val="26262A"/>
                           </a:solidFill>
@@ -14906,7 +17886,7 @@
                     <a:p>
                       <a:pPr algn="r"/>
                       <a:r>
-                        <a:rPr sz="1300" b="0">
+                        <a:rPr sz="1250" b="0">
                           <a:solidFill>
                             <a:srgbClr val="26262A"/>
                           </a:solidFill>
@@ -14929,7 +17909,7 @@
                     <a:p>
                       <a:pPr algn="r"/>
                       <a:r>
-                        <a:rPr sz="1300" b="0">
+                        <a:rPr sz="1250" b="0">
                           <a:solidFill>
                             <a:srgbClr val="26262A"/>
                           </a:solidFill>
@@ -14952,7 +17932,7 @@
                     <a:p>
                       <a:pPr algn="r"/>
                       <a:r>
-                        <a:rPr sz="1300" b="1">
+                        <a:rPr sz="1250" b="1">
                           <a:solidFill>
                             <a:srgbClr val="26262A"/>
                           </a:solidFill>
@@ -14969,7 +17949,7 @@
                   </a:tcPr>
                 </a:tc>
               </a:tr>
-              <a:tr h="384048">
+              <a:tr h="333756">
                 <a:tc>
                   <a:txBody>
                     <a:bodyPr/>
@@ -14977,7 +17957,7 @@
                     <a:p>
                       <a:pPr algn="l"/>
                       <a:r>
-                        <a:rPr sz="1300" b="0">
+                        <a:rPr sz="1250" b="0">
                           <a:solidFill>
                             <a:srgbClr val="26262A"/>
                           </a:solidFill>
@@ -15000,7 +17980,7 @@
                     <a:p>
                       <a:pPr algn="r"/>
                       <a:r>
-                        <a:rPr sz="1300" b="0">
+                        <a:rPr sz="1250" b="0">
                           <a:solidFill>
                             <a:srgbClr val="26262A"/>
                           </a:solidFill>
@@ -15023,7 +18003,7 @@
                     <a:p>
                       <a:pPr algn="r"/>
                       <a:r>
-                        <a:rPr sz="1300" b="0">
+                        <a:rPr sz="1250" b="0">
                           <a:solidFill>
                             <a:srgbClr val="26262A"/>
                           </a:solidFill>
@@ -15046,7 +18026,7 @@
                     <a:p>
                       <a:pPr algn="r"/>
                       <a:r>
-                        <a:rPr sz="1300" b="1">
+                        <a:rPr sz="1250" b="1">
                           <a:solidFill>
                             <a:srgbClr val="26262A"/>
                           </a:solidFill>
@@ -15063,7 +18043,7 @@
                   </a:tcPr>
                 </a:tc>
               </a:tr>
-              <a:tr h="384048">
+              <a:tr h="333756">
                 <a:tc>
                   <a:txBody>
                     <a:bodyPr/>
@@ -15071,7 +18051,7 @@
                     <a:p>
                       <a:pPr algn="l"/>
                       <a:r>
-                        <a:rPr sz="1300" b="0">
+                        <a:rPr sz="1250" b="0">
                           <a:solidFill>
                             <a:srgbClr val="26262A"/>
                           </a:solidFill>
@@ -15094,7 +18074,7 @@
                     <a:p>
                       <a:pPr algn="r"/>
                       <a:r>
-                        <a:rPr sz="1300" b="0">
+                        <a:rPr sz="1250" b="0">
                           <a:solidFill>
                             <a:srgbClr val="26262A"/>
                           </a:solidFill>
@@ -15117,7 +18097,7 @@
                     <a:p>
                       <a:pPr algn="r"/>
                       <a:r>
-                        <a:rPr sz="1300" b="0">
+                        <a:rPr sz="1250" b="0">
                           <a:solidFill>
                             <a:srgbClr val="26262A"/>
                           </a:solidFill>
@@ -15140,7 +18120,7 @@
                     <a:p>
                       <a:pPr algn="r"/>
                       <a:r>
-                        <a:rPr sz="1300" b="1">
+                        <a:rPr sz="1250" b="1">
                           <a:solidFill>
                             <a:srgbClr val="26262A"/>
                           </a:solidFill>
@@ -15157,7 +18137,7 @@
                   </a:tcPr>
                 </a:tc>
               </a:tr>
-              <a:tr h="384048">
+              <a:tr h="333756">
                 <a:tc>
                   <a:txBody>
                     <a:bodyPr/>
@@ -15165,7 +18145,289 @@
                     <a:p>
                       <a:pPr algn="l"/>
                       <a:r>
-                        <a:rPr sz="1300" b="0">
+                        <a:rPr sz="1250" b="0">
+                          <a:solidFill>
+                            <a:srgbClr val="26262A"/>
+                          </a:solidFill>
+                          <a:latin typeface="Noto Sans CJK TC"/>
+                        </a:rPr>
+                        <a:t>Prefill throughput (tok/s/user)</a:t>
+                      </a:r>
+                    </a:p>
+                  </a:txBody>
+                  <a:tcPr>
+                    <a:solidFill>
+                      <a:srgbClr val="FCFCFB"/>
+                    </a:solidFill>
+                  </a:tcPr>
+                </a:tc>
+                <a:tc>
+                  <a:txBody>
+                    <a:bodyPr/>
+                    <a:lstStyle/>
+                    <a:p>
+                      <a:pPr algn="r"/>
+                      <a:r>
+                        <a:rPr sz="1250" b="0">
+                          <a:solidFill>
+                            <a:srgbClr val="26262A"/>
+                          </a:solidFill>
+                          <a:latin typeface="Noto Sans CJK TC"/>
+                        </a:rPr>
+                        <a:t>6,553.6</a:t>
+                      </a:r>
+                    </a:p>
+                  </a:txBody>
+                  <a:tcPr>
+                    <a:solidFill>
+                      <a:srgbClr val="FCFCFB"/>
+                    </a:solidFill>
+                  </a:tcPr>
+                </a:tc>
+                <a:tc>
+                  <a:txBody>
+                    <a:bodyPr/>
+                    <a:lstStyle/>
+                    <a:p>
+                      <a:pPr algn="r"/>
+                      <a:r>
+                        <a:rPr sz="1250" b="0">
+                          <a:solidFill>
+                            <a:srgbClr val="26262A"/>
+                          </a:solidFill>
+                          <a:latin typeface="Noto Sans CJK TC"/>
+                        </a:rPr>
+                        <a:t>64.8</a:t>
+                      </a:r>
+                    </a:p>
+                  </a:txBody>
+                  <a:tcPr>
+                    <a:solidFill>
+                      <a:srgbClr val="FCFCFB"/>
+                    </a:solidFill>
+                  </a:tcPr>
+                </a:tc>
+                <a:tc>
+                  <a:txBody>
+                    <a:bodyPr/>
+                    <a:lstStyle/>
+                    <a:p>
+                      <a:pPr algn="r"/>
+                      <a:r>
+                        <a:rPr sz="1250" b="1">
+                          <a:solidFill>
+                            <a:srgbClr val="26262A"/>
+                          </a:solidFill>
+                          <a:latin typeface="Noto Sans CJK TC"/>
+                        </a:rPr>
+                        <a:t>101.13×</a:t>
+                      </a:r>
+                    </a:p>
+                  </a:txBody>
+                  <a:tcPr>
+                    <a:solidFill>
+                      <a:srgbClr val="FCFCFB"/>
+                    </a:solidFill>
+                  </a:tcPr>
+                </a:tc>
+              </a:tr>
+              <a:tr h="333756">
+                <a:tc>
+                  <a:txBody>
+                    <a:bodyPr/>
+                    <a:lstStyle/>
+                    <a:p>
+                      <a:pPr algn="l"/>
+                      <a:r>
+                        <a:rPr sz="1250" b="0">
+                          <a:solidFill>
+                            <a:srgbClr val="26262A"/>
+                          </a:solidFill>
+                          <a:latin typeface="Noto Sans CJK TC"/>
+                        </a:rPr>
+                        <a:t>Decode throughput (tok/s/user)</a:t>
+                      </a:r>
+                    </a:p>
+                  </a:txBody>
+                  <a:tcPr>
+                    <a:solidFill>
+                      <a:srgbClr val="FCFCFB"/>
+                    </a:solidFill>
+                  </a:tcPr>
+                </a:tc>
+                <a:tc>
+                  <a:txBody>
+                    <a:bodyPr/>
+                    <a:lstStyle/>
+                    <a:p>
+                      <a:pPr algn="r"/>
+                      <a:r>
+                        <a:rPr sz="1250" b="0">
+                          <a:solidFill>
+                            <a:srgbClr val="26262A"/>
+                          </a:solidFill>
+                          <a:latin typeface="Noto Sans CJK TC"/>
+                        </a:rPr>
+                        <a:t>13.76</a:t>
+                      </a:r>
+                    </a:p>
+                  </a:txBody>
+                  <a:tcPr>
+                    <a:solidFill>
+                      <a:srgbClr val="FCFCFB"/>
+                    </a:solidFill>
+                  </a:tcPr>
+                </a:tc>
+                <a:tc>
+                  <a:txBody>
+                    <a:bodyPr/>
+                    <a:lstStyle/>
+                    <a:p>
+                      <a:pPr algn="r"/>
+                      <a:r>
+                        <a:rPr sz="1250" b="0">
+                          <a:solidFill>
+                            <a:srgbClr val="26262A"/>
+                          </a:solidFill>
+                          <a:latin typeface="Noto Sans CJK TC"/>
+                        </a:rPr>
+                        <a:t>14.86</a:t>
+                      </a:r>
+                    </a:p>
+                  </a:txBody>
+                  <a:tcPr>
+                    <a:solidFill>
+                      <a:srgbClr val="FCFCFB"/>
+                    </a:solidFill>
+                  </a:tcPr>
+                </a:tc>
+                <a:tc>
+                  <a:txBody>
+                    <a:bodyPr/>
+                    <a:lstStyle/>
+                    <a:p>
+                      <a:pPr algn="r"/>
+                      <a:r>
+                        <a:rPr sz="1250" b="1">
+                          <a:solidFill>
+                            <a:srgbClr val="26262A"/>
+                          </a:solidFill>
+                          <a:latin typeface="Noto Sans CJK TC"/>
+                        </a:rPr>
+                        <a:t>0.93×</a:t>
+                      </a:r>
+                    </a:p>
+                  </a:txBody>
+                  <a:tcPr>
+                    <a:solidFill>
+                      <a:srgbClr val="FCFCFB"/>
+                    </a:solidFill>
+                  </a:tcPr>
+                </a:tc>
+              </a:tr>
+              <a:tr h="333756">
+                <a:tc>
+                  <a:txBody>
+                    <a:bodyPr/>
+                    <a:lstStyle/>
+                    <a:p>
+                      <a:pPr algn="l"/>
+                      <a:r>
+                        <a:rPr sz="1250" b="0">
+                          <a:solidFill>
+                            <a:srgbClr val="26262A"/>
+                          </a:solidFill>
+                          <a:latin typeface="Noto Sans CJK TC"/>
+                        </a:rPr>
+                        <a:t>Output throughput, system (tok/s)</a:t>
+                      </a:r>
+                    </a:p>
+                  </a:txBody>
+                  <a:tcPr>
+                    <a:solidFill>
+                      <a:srgbClr val="FCFCFB"/>
+                    </a:solidFill>
+                  </a:tcPr>
+                </a:tc>
+                <a:tc>
+                  <a:txBody>
+                    <a:bodyPr/>
+                    <a:lstStyle/>
+                    <a:p>
+                      <a:pPr algn="r"/>
+                      <a:r>
+                        <a:rPr sz="1250" b="0">
+                          <a:solidFill>
+                            <a:srgbClr val="26262A"/>
+                          </a:solidFill>
+                          <a:latin typeface="Noto Sans CJK TC"/>
+                        </a:rPr>
+                        <a:t>13.74</a:t>
+                      </a:r>
+                    </a:p>
+                  </a:txBody>
+                  <a:tcPr>
+                    <a:solidFill>
+                      <a:srgbClr val="FCFCFB"/>
+                    </a:solidFill>
+                  </a:tcPr>
+                </a:tc>
+                <a:tc>
+                  <a:txBody>
+                    <a:bodyPr/>
+                    <a:lstStyle/>
+                    <a:p>
+                      <a:pPr algn="r"/>
+                      <a:r>
+                        <a:rPr sz="1250" b="0">
+                          <a:solidFill>
+                            <a:srgbClr val="26262A"/>
+                          </a:solidFill>
+                          <a:latin typeface="Noto Sans CJK TC"/>
+                        </a:rPr>
+                        <a:t>8.97</a:t>
+                      </a:r>
+                    </a:p>
+                  </a:txBody>
+                  <a:tcPr>
+                    <a:solidFill>
+                      <a:srgbClr val="FCFCFB"/>
+                    </a:solidFill>
+                  </a:tcPr>
+                </a:tc>
+                <a:tc>
+                  <a:txBody>
+                    <a:bodyPr/>
+                    <a:lstStyle/>
+                    <a:p>
+                      <a:pPr algn="r"/>
+                      <a:r>
+                        <a:rPr sz="1250" b="1">
+                          <a:solidFill>
+                            <a:srgbClr val="26262A"/>
+                          </a:solidFill>
+                          <a:latin typeface="Noto Sans CJK TC"/>
+                        </a:rPr>
+                        <a:t>1.53×</a:t>
+                      </a:r>
+                    </a:p>
+                  </a:txBody>
+                  <a:tcPr>
+                    <a:solidFill>
+                      <a:srgbClr val="FCFCFB"/>
+                    </a:solidFill>
+                  </a:tcPr>
+                </a:tc>
+              </a:tr>
+              <a:tr h="333756">
+                <a:tc>
+                  <a:txBody>
+                    <a:bodyPr/>
+                    <a:lstStyle/>
+                    <a:p>
+                      <a:pPr algn="l"/>
+                      <a:r>
+                        <a:rPr sz="1250" b="0">
                           <a:solidFill>
                             <a:srgbClr val="26262A"/>
                           </a:solidFill>
@@ -15188,7 +18450,7 @@
                     <a:p>
                       <a:pPr algn="r"/>
                       <a:r>
-                        <a:rPr sz="1300" b="0">
+                        <a:rPr sz="1250" b="0">
                           <a:solidFill>
                             <a:srgbClr val="26262A"/>
                           </a:solidFill>
@@ -15211,7 +18473,7 @@
                     <a:p>
                       <a:pPr algn="r"/>
                       <a:r>
-                        <a:rPr sz="1300" b="0">
+                        <a:rPr sz="1250" b="0">
                           <a:solidFill>
                             <a:srgbClr val="26262A"/>
                           </a:solidFill>
@@ -15234,7 +18496,7 @@
                     <a:p>
                       <a:pPr algn="r"/>
                       <a:r>
-                        <a:rPr sz="1300" b="1">
+                        <a:rPr sz="1250" b="1">
                           <a:solidFill>
                             <a:srgbClr val="26262A"/>
                           </a:solidFill>
@@ -15251,7 +18513,7 @@
                   </a:tcPr>
                 </a:tc>
               </a:tr>
-              <a:tr h="384048">
+              <a:tr h="333756">
                 <a:tc>
                   <a:txBody>
                     <a:bodyPr/>
@@ -15259,7 +18521,7 @@
                     <a:p>
                       <a:pPr algn="l"/>
                       <a:r>
-                        <a:rPr sz="1300" b="0">
+                        <a:rPr sz="1250" b="0">
                           <a:solidFill>
                             <a:srgbClr val="26262A"/>
                           </a:solidFill>
@@ -15282,7 +18544,7 @@
                     <a:p>
                       <a:pPr algn="r"/>
                       <a:r>
-                        <a:rPr sz="1300" b="0">
+                        <a:rPr sz="1250" b="0">
                           <a:solidFill>
                             <a:srgbClr val="26262A"/>
                           </a:solidFill>
@@ -15305,7 +18567,7 @@
                     <a:p>
                       <a:pPr algn="r"/>
                       <a:r>
-                        <a:rPr sz="1300" b="0">
+                        <a:rPr sz="1250" b="0">
                           <a:solidFill>
                             <a:srgbClr val="26262A"/>
                           </a:solidFill>
@@ -15328,7 +18590,7 @@
                     <a:p>
                       <a:pPr algn="r"/>
                       <a:r>
-                        <a:rPr sz="1300" b="1">
+                        <a:rPr sz="1250" b="1">
                           <a:solidFill>
                             <a:srgbClr val="1BAF7A"/>
                           </a:solidFill>
@@ -15345,7 +18607,7 @@
                   </a:tcPr>
                 </a:tc>
               </a:tr>
-              <a:tr h="384048">
+              <a:tr h="333756">
                 <a:tc>
                   <a:txBody>
                     <a:bodyPr/>
@@ -15353,7 +18615,7 @@
                     <a:p>
                       <a:pPr algn="l"/>
                       <a:r>
-                        <a:rPr sz="1300" b="0">
+                        <a:rPr sz="1250" b="0">
                           <a:solidFill>
                             <a:srgbClr val="26262A"/>
                           </a:solidFill>
@@ -15376,7 +18638,7 @@
                     <a:p>
                       <a:pPr algn="r"/>
                       <a:r>
-                        <a:rPr sz="1300" b="0">
+                        <a:rPr sz="1250" b="0">
                           <a:solidFill>
                             <a:srgbClr val="26262A"/>
                           </a:solidFill>
@@ -15399,7 +18661,7 @@
                     <a:p>
                       <a:pPr algn="r"/>
                       <a:r>
-                        <a:rPr sz="1300" b="0">
+                        <a:rPr sz="1250" b="0">
                           <a:solidFill>
                             <a:srgbClr val="26262A"/>
                           </a:solidFill>
@@ -15422,7 +18684,7 @@
                     <a:p>
                       <a:pPr algn="r"/>
                       <a:r>
-                        <a:rPr sz="1300" b="1">
+                        <a:rPr sz="1250" b="1">
                           <a:solidFill>
                             <a:srgbClr val="1BAF7A"/>
                           </a:solidFill>
@@ -15439,7 +18701,7 @@
                   </a:tcPr>
                 </a:tc>
               </a:tr>
-              <a:tr h="384048">
+              <a:tr h="333756">
                 <a:tc>
                   <a:txBody>
                     <a:bodyPr/>
@@ -15447,7 +18709,7 @@
                     <a:p>
                       <a:pPr algn="l"/>
                       <a:r>
-                        <a:rPr sz="1300" b="0">
+                        <a:rPr sz="1250" b="0">
                           <a:solidFill>
                             <a:srgbClr val="26262A"/>
                           </a:solidFill>
@@ -15470,7 +18732,7 @@
                     <a:p>
                       <a:pPr algn="r"/>
                       <a:r>
-                        <a:rPr sz="1300" b="0">
+                        <a:rPr sz="1250" b="0">
                           <a:solidFill>
                             <a:srgbClr val="26262A"/>
                           </a:solidFill>
@@ -15493,7 +18755,7 @@
                     <a:p>
                       <a:pPr algn="r"/>
                       <a:r>
-                        <a:rPr sz="1300" b="0">
+                        <a:rPr sz="1250" b="0">
                           <a:solidFill>
                             <a:srgbClr val="26262A"/>
                           </a:solidFill>
@@ -15516,7 +18778,7 @@
                     <a:p>
                       <a:pPr algn="r"/>
                       <a:r>
-                        <a:rPr sz="1300" b="0">
+                        <a:rPr sz="1250" b="0">
                           <a:solidFill>
                             <a:srgbClr val="26262A"/>
                           </a:solidFill>
@@ -15533,7 +18795,7 @@
                   </a:tcPr>
                 </a:tc>
               </a:tr>
-              <a:tr h="384048">
+              <a:tr h="333756">
                 <a:tc>
                   <a:txBody>
                     <a:bodyPr/>
@@ -15541,7 +18803,7 @@
                     <a:p>
                       <a:pPr algn="l"/>
                       <a:r>
-                        <a:rPr sz="1300" b="0">
+                        <a:rPr sz="1250" b="0">
                           <a:solidFill>
                             <a:srgbClr val="26262A"/>
                           </a:solidFill>
@@ -15564,7 +18826,7 @@
                     <a:p>
                       <a:pPr algn="r"/>
                       <a:r>
-                        <a:rPr sz="1300" b="0">
+                        <a:rPr sz="1250" b="0">
                           <a:solidFill>
                             <a:srgbClr val="26262A"/>
                           </a:solidFill>
@@ -15587,7 +18849,7 @@
                     <a:p>
                       <a:pPr algn="r"/>
                       <a:r>
-                        <a:rPr sz="1300" b="0">
+                        <a:rPr sz="1250" b="0">
                           <a:solidFill>
                             <a:srgbClr val="26262A"/>
                           </a:solidFill>
@@ -15610,7 +18872,7 @@
                     <a:p>
                       <a:pPr algn="r"/>
                       <a:r>
-                        <a:rPr sz="1300" b="0">
+                        <a:rPr sz="1250" b="0">
                           <a:solidFill>
                             <a:srgbClr val="26262A"/>
                           </a:solidFill>
@@ -15639,7 +18901,7 @@
         </p:nvSpPr>
         <p:spPr>
           <a:xfrm>
-            <a:off x="822960" y="5605272"/>
+            <a:off x="822960" y="6016752"/>
             <a:ext cx="10515600" cy="731520"/>
           </a:xfrm>
           <a:prstGeom prst="rect">
@@ -15681,7 +18943,23 @@
                 </a:solidFill>
                 <a:latin typeface="Noto Sans CJK TC"/>
               </a:rPr>
-              <a:t>「端點 / 本機」欄位：延遲類為端點慢幾倍，吞吐類為端點剩幾成。</a:t>
+              <a:t>「端點 / 本機」欄位：延遲類為端點慢幾倍，吞吐類為本機是端點的幾倍。</a:t>
+            </a:r>
+          </a:p>
+          <a:p>
+            <a:pPr algn="l">
+              <a:spcAft>
+                <a:spcPts val="300"/>
+              </a:spcAft>
+            </a:pPr>
+            <a:r>
+              <a:rPr sz="1100" b="0">
+                <a:solidFill>
+                  <a:srgbClr val="6B6B70"/>
+                </a:solidFill>
+                <a:latin typeface="Noto Sans CJK TC"/>
+              </a:rPr>
+              <a:t>Prefill / Decode 為 per-user 速率；Output throughput, system 為伺服器整體輸出。</a:t>
             </a:r>
           </a:p>
         </p:txBody>
@@ -15843,8 +19121,8 @@
           <p:nvPr/>
         </p:nvGraphicFramePr>
         <p:xfrm>
-          <a:off x="822960" y="1920240"/>
-          <a:ext cx="10515600" cy="3456432"/>
+          <a:off x="822960" y="1828800"/>
+          <a:ext cx="10515600" cy="4005072"/>
         </p:xfrm>
         <a:graphic>
           <a:graphicData uri="http://schemas.openxmlformats.org/drawingml/2006/table">
@@ -15858,7 +19136,7 @@
                 <a:gridCol w="2651760"/>
                 <a:gridCol w="1554480"/>
               </a:tblGrid>
-              <a:tr h="384048">
+              <a:tr h="333756">
                 <a:tc>
                   <a:txBody>
                     <a:bodyPr/>
@@ -15952,7 +19230,7 @@
                   </a:tcPr>
                 </a:tc>
               </a:tr>
-              <a:tr h="384048">
+              <a:tr h="333756">
                 <a:tc>
                   <a:txBody>
                     <a:bodyPr/>
@@ -15960,7 +19238,7 @@
                     <a:p>
                       <a:pPr algn="l"/>
                       <a:r>
-                        <a:rPr sz="1300" b="0">
+                        <a:rPr sz="1250" b="0">
                           <a:solidFill>
                             <a:srgbClr val="26262A"/>
                           </a:solidFill>
@@ -15983,7 +19261,7 @@
                     <a:p>
                       <a:pPr algn="r"/>
                       <a:r>
-                        <a:rPr sz="1300" b="0">
+                        <a:rPr sz="1250" b="0">
                           <a:solidFill>
                             <a:srgbClr val="26262A"/>
                           </a:solidFill>
@@ -16006,7 +19284,7 @@
                     <a:p>
                       <a:pPr algn="r"/>
                       <a:r>
-                        <a:rPr sz="1300" b="0">
+                        <a:rPr sz="1250" b="0">
                           <a:solidFill>
                             <a:srgbClr val="26262A"/>
                           </a:solidFill>
@@ -16029,7 +19307,7 @@
                     <a:p>
                       <a:pPr algn="r"/>
                       <a:r>
-                        <a:rPr sz="1300" b="1">
+                        <a:rPr sz="1250" b="1">
                           <a:solidFill>
                             <a:srgbClr val="26262A"/>
                           </a:solidFill>
@@ -16046,7 +19324,7 @@
                   </a:tcPr>
                 </a:tc>
               </a:tr>
-              <a:tr h="384048">
+              <a:tr h="333756">
                 <a:tc>
                   <a:txBody>
                     <a:bodyPr/>
@@ -16054,7 +19332,7 @@
                     <a:p>
                       <a:pPr algn="l"/>
                       <a:r>
-                        <a:rPr sz="1300" b="0">
+                        <a:rPr sz="1250" b="0">
                           <a:solidFill>
                             <a:srgbClr val="26262A"/>
                           </a:solidFill>
@@ -16077,7 +19355,7 @@
                     <a:p>
                       <a:pPr algn="r"/>
                       <a:r>
-                        <a:rPr sz="1300" b="0">
+                        <a:rPr sz="1250" b="0">
                           <a:solidFill>
                             <a:srgbClr val="26262A"/>
                           </a:solidFill>
@@ -16100,7 +19378,7 @@
                     <a:p>
                       <a:pPr algn="r"/>
                       <a:r>
-                        <a:rPr sz="1300" b="0">
+                        <a:rPr sz="1250" b="0">
                           <a:solidFill>
                             <a:srgbClr val="26262A"/>
                           </a:solidFill>
@@ -16123,7 +19401,7 @@
                     <a:p>
                       <a:pPr algn="r"/>
                       <a:r>
-                        <a:rPr sz="1300" b="1">
+                        <a:rPr sz="1250" b="1">
                           <a:solidFill>
                             <a:srgbClr val="26262A"/>
                           </a:solidFill>
@@ -16140,7 +19418,7 @@
                   </a:tcPr>
                 </a:tc>
               </a:tr>
-              <a:tr h="384048">
+              <a:tr h="333756">
                 <a:tc>
                   <a:txBody>
                     <a:bodyPr/>
@@ -16148,7 +19426,7 @@
                     <a:p>
                       <a:pPr algn="l"/>
                       <a:r>
-                        <a:rPr sz="1300" b="0">
+                        <a:rPr sz="1250" b="0">
                           <a:solidFill>
                             <a:srgbClr val="26262A"/>
                           </a:solidFill>
@@ -16171,7 +19449,7 @@
                     <a:p>
                       <a:pPr algn="r"/>
                       <a:r>
-                        <a:rPr sz="1300" b="0">
+                        <a:rPr sz="1250" b="0">
                           <a:solidFill>
                             <a:srgbClr val="26262A"/>
                           </a:solidFill>
@@ -16194,7 +19472,7 @@
                     <a:p>
                       <a:pPr algn="r"/>
                       <a:r>
-                        <a:rPr sz="1300" b="0">
+                        <a:rPr sz="1250" b="0">
                           <a:solidFill>
                             <a:srgbClr val="26262A"/>
                           </a:solidFill>
@@ -16217,7 +19495,7 @@
                     <a:p>
                       <a:pPr algn="r"/>
                       <a:r>
-                        <a:rPr sz="1300" b="1">
+                        <a:rPr sz="1250" b="1">
                           <a:solidFill>
                             <a:srgbClr val="26262A"/>
                           </a:solidFill>
@@ -16234,7 +19512,7 @@
                   </a:tcPr>
                 </a:tc>
               </a:tr>
-              <a:tr h="384048">
+              <a:tr h="333756">
                 <a:tc>
                   <a:txBody>
                     <a:bodyPr/>
@@ -16242,7 +19520,289 @@
                     <a:p>
                       <a:pPr algn="l"/>
                       <a:r>
-                        <a:rPr sz="1300" b="0">
+                        <a:rPr sz="1250" b="0">
+                          <a:solidFill>
+                            <a:srgbClr val="26262A"/>
+                          </a:solidFill>
+                          <a:latin typeface="Noto Sans CJK TC"/>
+                        </a:rPr>
+                        <a:t>Prefill throughput (tok/s/user)</a:t>
+                      </a:r>
+                    </a:p>
+                  </a:txBody>
+                  <a:tcPr>
+                    <a:solidFill>
+                      <a:srgbClr val="FCFCFB"/>
+                    </a:solidFill>
+                  </a:tcPr>
+                </a:tc>
+                <a:tc>
+                  <a:txBody>
+                    <a:bodyPr/>
+                    <a:lstStyle/>
+                    <a:p>
+                      <a:pPr algn="r"/>
+                      <a:r>
+                        <a:rPr sz="1250" b="0">
+                          <a:solidFill>
+                            <a:srgbClr val="26262A"/>
+                          </a:solidFill>
+                          <a:latin typeface="Noto Sans CJK TC"/>
+                        </a:rPr>
+                        <a:t>3,095.8</a:t>
+                      </a:r>
+                    </a:p>
+                  </a:txBody>
+                  <a:tcPr>
+                    <a:solidFill>
+                      <a:srgbClr val="FCFCFB"/>
+                    </a:solidFill>
+                  </a:tcPr>
+                </a:tc>
+                <a:tc>
+                  <a:txBody>
+                    <a:bodyPr/>
+                    <a:lstStyle/>
+                    <a:p>
+                      <a:pPr algn="r"/>
+                      <a:r>
+                        <a:rPr sz="1250" b="0">
+                          <a:solidFill>
+                            <a:srgbClr val="26262A"/>
+                          </a:solidFill>
+                          <a:latin typeface="Noto Sans CJK TC"/>
+                        </a:rPr>
+                        <a:t>48.5</a:t>
+                      </a:r>
+                    </a:p>
+                  </a:txBody>
+                  <a:tcPr>
+                    <a:solidFill>
+                      <a:srgbClr val="FCFCFB"/>
+                    </a:solidFill>
+                  </a:tcPr>
+                </a:tc>
+                <a:tc>
+                  <a:txBody>
+                    <a:bodyPr/>
+                    <a:lstStyle/>
+                    <a:p>
+                      <a:pPr algn="r"/>
+                      <a:r>
+                        <a:rPr sz="1250" b="1">
+                          <a:solidFill>
+                            <a:srgbClr val="26262A"/>
+                          </a:solidFill>
+                          <a:latin typeface="Noto Sans CJK TC"/>
+                        </a:rPr>
+                        <a:t>63.80×</a:t>
+                      </a:r>
+                    </a:p>
+                  </a:txBody>
+                  <a:tcPr>
+                    <a:solidFill>
+                      <a:srgbClr val="FCFCFB"/>
+                    </a:solidFill>
+                  </a:tcPr>
+                </a:tc>
+              </a:tr>
+              <a:tr h="333756">
+                <a:tc>
+                  <a:txBody>
+                    <a:bodyPr/>
+                    <a:lstStyle/>
+                    <a:p>
+                      <a:pPr algn="l"/>
+                      <a:r>
+                        <a:rPr sz="1250" b="0">
+                          <a:solidFill>
+                            <a:srgbClr val="26262A"/>
+                          </a:solidFill>
+                          <a:latin typeface="Noto Sans CJK TC"/>
+                        </a:rPr>
+                        <a:t>Decode throughput (tok/s/user)</a:t>
+                      </a:r>
+                    </a:p>
+                  </a:txBody>
+                  <a:tcPr>
+                    <a:solidFill>
+                      <a:srgbClr val="FCFCFB"/>
+                    </a:solidFill>
+                  </a:tcPr>
+                </a:tc>
+                <a:tc>
+                  <a:txBody>
+                    <a:bodyPr/>
+                    <a:lstStyle/>
+                    <a:p>
+                      <a:pPr algn="r"/>
+                      <a:r>
+                        <a:rPr sz="1250" b="0">
+                          <a:solidFill>
+                            <a:srgbClr val="26262A"/>
+                          </a:solidFill>
+                          <a:latin typeface="Noto Sans CJK TC"/>
+                        </a:rPr>
+                        <a:t>14.57</a:t>
+                      </a:r>
+                    </a:p>
+                  </a:txBody>
+                  <a:tcPr>
+                    <a:solidFill>
+                      <a:srgbClr val="FCFCFB"/>
+                    </a:solidFill>
+                  </a:tcPr>
+                </a:tc>
+                <a:tc>
+                  <a:txBody>
+                    <a:bodyPr/>
+                    <a:lstStyle/>
+                    <a:p>
+                      <a:pPr algn="r"/>
+                      <a:r>
+                        <a:rPr sz="1250" b="0">
+                          <a:solidFill>
+                            <a:srgbClr val="26262A"/>
+                          </a:solidFill>
+                          <a:latin typeface="Noto Sans CJK TC"/>
+                        </a:rPr>
+                        <a:t>6.62</a:t>
+                      </a:r>
+                    </a:p>
+                  </a:txBody>
+                  <a:tcPr>
+                    <a:solidFill>
+                      <a:srgbClr val="FCFCFB"/>
+                    </a:solidFill>
+                  </a:tcPr>
+                </a:tc>
+                <a:tc>
+                  <a:txBody>
+                    <a:bodyPr/>
+                    <a:lstStyle/>
+                    <a:p>
+                      <a:pPr algn="r"/>
+                      <a:r>
+                        <a:rPr sz="1250" b="1">
+                          <a:solidFill>
+                            <a:srgbClr val="26262A"/>
+                          </a:solidFill>
+                          <a:latin typeface="Noto Sans CJK TC"/>
+                        </a:rPr>
+                        <a:t>2.20×</a:t>
+                      </a:r>
+                    </a:p>
+                  </a:txBody>
+                  <a:tcPr>
+                    <a:solidFill>
+                      <a:srgbClr val="FCFCFB"/>
+                    </a:solidFill>
+                  </a:tcPr>
+                </a:tc>
+              </a:tr>
+              <a:tr h="333756">
+                <a:tc>
+                  <a:txBody>
+                    <a:bodyPr/>
+                    <a:lstStyle/>
+                    <a:p>
+                      <a:pPr algn="l"/>
+                      <a:r>
+                        <a:rPr sz="1250" b="0">
+                          <a:solidFill>
+                            <a:srgbClr val="26262A"/>
+                          </a:solidFill>
+                          <a:latin typeface="Noto Sans CJK TC"/>
+                        </a:rPr>
+                        <a:t>Output throughput, system (tok/s)</a:t>
+                      </a:r>
+                    </a:p>
+                  </a:txBody>
+                  <a:tcPr>
+                    <a:solidFill>
+                      <a:srgbClr val="FCFCFB"/>
+                    </a:solidFill>
+                  </a:tcPr>
+                </a:tc>
+                <a:tc>
+                  <a:txBody>
+                    <a:bodyPr/>
+                    <a:lstStyle/>
+                    <a:p>
+                      <a:pPr algn="r"/>
+                      <a:r>
+                        <a:rPr sz="1250" b="0">
+                          <a:solidFill>
+                            <a:srgbClr val="26262A"/>
+                          </a:solidFill>
+                          <a:latin typeface="Noto Sans CJK TC"/>
+                        </a:rPr>
+                        <a:t>28.75</a:t>
+                      </a:r>
+                    </a:p>
+                  </a:txBody>
+                  <a:tcPr>
+                    <a:solidFill>
+                      <a:srgbClr val="FCFCFB"/>
+                    </a:solidFill>
+                  </a:tcPr>
+                </a:tc>
+                <a:tc>
+                  <a:txBody>
+                    <a:bodyPr/>
+                    <a:lstStyle/>
+                    <a:p>
+                      <a:pPr algn="r"/>
+                      <a:r>
+                        <a:rPr sz="1250" b="0">
+                          <a:solidFill>
+                            <a:srgbClr val="26262A"/>
+                          </a:solidFill>
+                          <a:latin typeface="Noto Sans CJK TC"/>
+                        </a:rPr>
+                        <a:t>7.89</a:t>
+                      </a:r>
+                    </a:p>
+                  </a:txBody>
+                  <a:tcPr>
+                    <a:solidFill>
+                      <a:srgbClr val="FCFCFB"/>
+                    </a:solidFill>
+                  </a:tcPr>
+                </a:tc>
+                <a:tc>
+                  <a:txBody>
+                    <a:bodyPr/>
+                    <a:lstStyle/>
+                    <a:p>
+                      <a:pPr algn="r"/>
+                      <a:r>
+                        <a:rPr sz="1250" b="1">
+                          <a:solidFill>
+                            <a:srgbClr val="26262A"/>
+                          </a:solidFill>
+                          <a:latin typeface="Noto Sans CJK TC"/>
+                        </a:rPr>
+                        <a:t>3.64×</a:t>
+                      </a:r>
+                    </a:p>
+                  </a:txBody>
+                  <a:tcPr>
+                    <a:solidFill>
+                      <a:srgbClr val="FCFCFB"/>
+                    </a:solidFill>
+                  </a:tcPr>
+                </a:tc>
+              </a:tr>
+              <a:tr h="333756">
+                <a:tc>
+                  <a:txBody>
+                    <a:bodyPr/>
+                    <a:lstStyle/>
+                    <a:p>
+                      <a:pPr algn="l"/>
+                      <a:r>
+                        <a:rPr sz="1250" b="0">
                           <a:solidFill>
                             <a:srgbClr val="26262A"/>
                           </a:solidFill>
@@ -16265,7 +19825,7 @@
                     <a:p>
                       <a:pPr algn="r"/>
                       <a:r>
-                        <a:rPr sz="1300" b="0">
+                        <a:rPr sz="1250" b="0">
                           <a:solidFill>
                             <a:srgbClr val="26262A"/>
                           </a:solidFill>
@@ -16288,7 +19848,7 @@
                     <a:p>
                       <a:pPr algn="r"/>
                       <a:r>
-                        <a:rPr sz="1300" b="0">
+                        <a:rPr sz="1250" b="0">
                           <a:solidFill>
                             <a:srgbClr val="26262A"/>
                           </a:solidFill>
@@ -16311,7 +19871,7 @@
                     <a:p>
                       <a:pPr algn="r"/>
                       <a:r>
-                        <a:rPr sz="1300" b="1">
+                        <a:rPr sz="1250" b="1">
                           <a:solidFill>
                             <a:srgbClr val="26262A"/>
                           </a:solidFill>
@@ -16328,7 +19888,7 @@
                   </a:tcPr>
                 </a:tc>
               </a:tr>
-              <a:tr h="384048">
+              <a:tr h="333756">
                 <a:tc>
                   <a:txBody>
                     <a:bodyPr/>
@@ -16336,7 +19896,7 @@
                     <a:p>
                       <a:pPr algn="l"/>
                       <a:r>
-                        <a:rPr sz="1300" b="0">
+                        <a:rPr sz="1250" b="0">
                           <a:solidFill>
                             <a:srgbClr val="26262A"/>
                           </a:solidFill>
@@ -16359,7 +19919,7 @@
                     <a:p>
                       <a:pPr algn="r"/>
                       <a:r>
-                        <a:rPr sz="1300" b="0">
+                        <a:rPr sz="1250" b="0">
                           <a:solidFill>
                             <a:srgbClr val="26262A"/>
                           </a:solidFill>
@@ -16382,7 +19942,7 @@
                     <a:p>
                       <a:pPr algn="r"/>
                       <a:r>
-                        <a:rPr sz="1300" b="0">
+                        <a:rPr sz="1250" b="0">
                           <a:solidFill>
                             <a:srgbClr val="26262A"/>
                           </a:solidFill>
@@ -16405,7 +19965,7 @@
                     <a:p>
                       <a:pPr algn="r"/>
                       <a:r>
-                        <a:rPr sz="1300" b="1">
+                        <a:rPr sz="1250" b="1">
                           <a:solidFill>
                             <a:srgbClr val="1BAF7A"/>
                           </a:solidFill>
@@ -16422,7 +19982,7 @@
                   </a:tcPr>
                 </a:tc>
               </a:tr>
-              <a:tr h="384048">
+              <a:tr h="333756">
                 <a:tc>
                   <a:txBody>
                     <a:bodyPr/>
@@ -16430,7 +19990,7 @@
                     <a:p>
                       <a:pPr algn="l"/>
                       <a:r>
-                        <a:rPr sz="1300" b="0">
+                        <a:rPr sz="1250" b="0">
                           <a:solidFill>
                             <a:srgbClr val="26262A"/>
                           </a:solidFill>
@@ -16453,7 +20013,7 @@
                     <a:p>
                       <a:pPr algn="r"/>
                       <a:r>
-                        <a:rPr sz="1300" b="0">
+                        <a:rPr sz="1250" b="0">
                           <a:solidFill>
                             <a:srgbClr val="26262A"/>
                           </a:solidFill>
@@ -16476,7 +20036,7 @@
                     <a:p>
                       <a:pPr algn="r"/>
                       <a:r>
-                        <a:rPr sz="1300" b="0">
+                        <a:rPr sz="1250" b="0">
                           <a:solidFill>
                             <a:srgbClr val="26262A"/>
                           </a:solidFill>
@@ -16499,7 +20059,7 @@
                     <a:p>
                       <a:pPr algn="r"/>
                       <a:r>
-                        <a:rPr sz="1300" b="1">
+                        <a:rPr sz="1250" b="1">
                           <a:solidFill>
                             <a:srgbClr val="1BAF7A"/>
                           </a:solidFill>
@@ -16516,7 +20076,7 @@
                   </a:tcPr>
                 </a:tc>
               </a:tr>
-              <a:tr h="384048">
+              <a:tr h="333756">
                 <a:tc>
                   <a:txBody>
                     <a:bodyPr/>
@@ -16524,7 +20084,7 @@
                     <a:p>
                       <a:pPr algn="l"/>
                       <a:r>
-                        <a:rPr sz="1300" b="0">
+                        <a:rPr sz="1250" b="0">
                           <a:solidFill>
                             <a:srgbClr val="26262A"/>
                           </a:solidFill>
@@ -16547,7 +20107,7 @@
                     <a:p>
                       <a:pPr algn="r"/>
                       <a:r>
-                        <a:rPr sz="1300" b="0">
+                        <a:rPr sz="1250" b="0">
                           <a:solidFill>
                             <a:srgbClr val="26262A"/>
                           </a:solidFill>
@@ -16570,7 +20130,7 @@
                     <a:p>
                       <a:pPr algn="r"/>
                       <a:r>
-                        <a:rPr sz="1300" b="0">
+                        <a:rPr sz="1250" b="0">
                           <a:solidFill>
                             <a:srgbClr val="26262A"/>
                           </a:solidFill>
@@ -16593,7 +20153,7 @@
                     <a:p>
                       <a:pPr algn="r"/>
                       <a:r>
-                        <a:rPr sz="1300" b="0">
+                        <a:rPr sz="1250" b="0">
                           <a:solidFill>
                             <a:srgbClr val="26262A"/>
                           </a:solidFill>
@@ -16610,7 +20170,7 @@
                   </a:tcPr>
                 </a:tc>
               </a:tr>
-              <a:tr h="384048">
+              <a:tr h="333756">
                 <a:tc>
                   <a:txBody>
                     <a:bodyPr/>
@@ -16618,7 +20178,7 @@
                     <a:p>
                       <a:pPr algn="l"/>
                       <a:r>
-                        <a:rPr sz="1300" b="0">
+                        <a:rPr sz="1250" b="0">
                           <a:solidFill>
                             <a:srgbClr val="26262A"/>
                           </a:solidFill>
@@ -16641,7 +20201,7 @@
                     <a:p>
                       <a:pPr algn="r"/>
                       <a:r>
-                        <a:rPr sz="1300" b="0">
+                        <a:rPr sz="1250" b="0">
                           <a:solidFill>
                             <a:srgbClr val="26262A"/>
                           </a:solidFill>
@@ -16664,7 +20224,7 @@
                     <a:p>
                       <a:pPr algn="r"/>
                       <a:r>
-                        <a:rPr sz="1300" b="0">
+                        <a:rPr sz="1250" b="0">
                           <a:solidFill>
                             <a:srgbClr val="26262A"/>
                           </a:solidFill>
@@ -16687,7 +20247,7 @@
                     <a:p>
                       <a:pPr algn="r"/>
                       <a:r>
-                        <a:rPr sz="1300" b="0">
+                        <a:rPr sz="1250" b="0">
                           <a:solidFill>
                             <a:srgbClr val="26262A"/>
                           </a:solidFill>
@@ -16716,7 +20276,7 @@
         </p:nvSpPr>
         <p:spPr>
           <a:xfrm>
-            <a:off x="822960" y="5605272"/>
+            <a:off x="822960" y="6016752"/>
             <a:ext cx="10515600" cy="731520"/>
           </a:xfrm>
           <a:prstGeom prst="rect">
@@ -16758,7 +20318,23 @@
                 </a:solidFill>
                 <a:latin typeface="Noto Sans CJK TC"/>
               </a:rPr>
-              <a:t>「端點 / 本機」欄位：延遲類為端點慢幾倍，吞吐類為端點剩幾成。</a:t>
+              <a:t>「端點 / 本機」欄位：延遲類為端點慢幾倍，吞吐類為本機是端點的幾倍。</a:t>
+            </a:r>
+          </a:p>
+          <a:p>
+            <a:pPr algn="l">
+              <a:spcAft>
+                <a:spcPts val="300"/>
+              </a:spcAft>
+            </a:pPr>
+            <a:r>
+              <a:rPr sz="1100" b="0">
+                <a:solidFill>
+                  <a:srgbClr val="6B6B70"/>
+                </a:solidFill>
+                <a:latin typeface="Noto Sans CJK TC"/>
+              </a:rPr>
+              <a:t>Prefill / Decode 為 per-user 速率；Output throughput, system 為伺服器整體輸出。</a:t>
             </a:r>
           </a:p>
         </p:txBody>

--- a/results/nvfp4/optimumxt_findings.pptx
+++ b/results/nvfp4/optimumxt_findings.pptx
@@ -43,6 +43,8 @@
     <p:sldId id="291" r:id="rId42"/>
     <p:sldId id="292" r:id="rId43"/>
     <p:sldId id="293" r:id="rId44"/>
+    <p:sldId id="294" r:id="rId45"/>
+    <p:sldId id="295" r:id="rId46"/>
   </p:sldIdLst>
   <p:sldSz cx="12191695" cy="6858000" type="screen4x3"/>
   <p:notesSz cx="6858000" cy="9144000"/>
@@ -39106,6 +39108,1537 @@
 </p:sld>
 </file>
 
+<file path=ppt/slides/slide39.xml><?xml version="1.0" encoding="utf-8"?>
+<p:sld xmlns:a="http://schemas.openxmlformats.org/drawingml/2006/main" xmlns:p="http://schemas.openxmlformats.org/presentationml/2006/main" xmlns:r="http://schemas.openxmlformats.org/officeDocument/2006/relationships">
+  <p:cSld>
+    <p:bg>
+      <p:bgPr>
+        <a:solidFill>
+          <a:srgbClr val="FCFCFB"/>
+        </a:solidFill>
+        <a:effectLst/>
+      </p:bgPr>
+    </p:bg>
+    <p:spTree>
+      <p:nvGrpSpPr>
+        <p:cNvPr id="1" name=""/>
+        <p:cNvGrpSpPr/>
+        <p:nvPr/>
+      </p:nvGrpSpPr>
+      <p:grpSpPr/>
+      <p:sp>
+        <p:nvSpPr>
+          <p:cNvPr id="2" name="TextBox 1"/>
+          <p:cNvSpPr txBox="1"/>
+          <p:nvPr/>
+        </p:nvSpPr>
+        <p:spPr>
+          <a:xfrm>
+            <a:off x="822960" y="502920"/>
+            <a:ext cx="10515600" cy="320040"/>
+          </a:xfrm>
+          <a:prstGeom prst="rect">
+            <a:avLst/>
+          </a:prstGeom>
+          <a:noFill/>
+        </p:spPr>
+        <p:txBody>
+          <a:bodyPr wrap="square" lIns="0" tIns="0" rIns="0" bIns="0">
+            <a:spAutoFit/>
+          </a:bodyPr>
+          <a:lstStyle/>
+          <a:p>
+            <a:pPr algn="l">
+              <a:spcAft>
+                <a:spcPts val="600"/>
+              </a:spcAft>
+            </a:pPr>
+            <a:r>
+              <a:rPr sz="1300" b="0">
+                <a:solidFill>
+                  <a:srgbClr val="6B6B70"/>
+                </a:solidFill>
+                <a:latin typeface="Noto Sans CJK TC"/>
+              </a:rPr>
+              <a:t>附錄：端點自身的併發比較　·　Llama-3.1-8B · chatbot_flat · 100 請求</a:t>
+            </a:r>
+          </a:p>
+        </p:txBody>
+      </p:sp>
+      <p:sp>
+        <p:nvSpPr>
+          <p:cNvPr id="3" name="TextBox 2"/>
+          <p:cNvSpPr txBox="1"/>
+          <p:nvPr/>
+        </p:nvSpPr>
+        <p:spPr>
+          <a:xfrm>
+            <a:off x="822960" y="841248"/>
+            <a:ext cx="10515600" cy="640080"/>
+          </a:xfrm>
+          <a:prstGeom prst="rect">
+            <a:avLst/>
+          </a:prstGeom>
+          <a:noFill/>
+        </p:spPr>
+        <p:txBody>
+          <a:bodyPr wrap="square" lIns="0" tIns="0" rIns="0" bIns="0">
+            <a:spAutoFit/>
+          </a:bodyPr>
+          <a:lstStyle/>
+          <a:p>
+            <a:pPr algn="l">
+              <a:spcAft>
+                <a:spcPts val="600"/>
+              </a:spcAft>
+            </a:pPr>
+            <a:r>
+              <a:rPr sz="3000" b="1">
+                <a:solidFill>
+                  <a:srgbClr val="26262A"/>
+                </a:solidFill>
+                <a:latin typeface="Noto Sans CJK TC"/>
+              </a:rPr>
+              <a:t>Dynamo 端點：併發 1 vs 併發 2</a:t>
+            </a:r>
+          </a:p>
+        </p:txBody>
+      </p:sp>
+      <p:sp>
+        <p:nvSpPr>
+          <p:cNvPr id="4" name="Rectangle 3"/>
+          <p:cNvSpPr/>
+          <p:nvPr/>
+        </p:nvSpPr>
+        <p:spPr>
+          <a:xfrm>
+            <a:off x="822960" y="1572768"/>
+            <a:ext cx="10515600" cy="25400"/>
+          </a:xfrm>
+          <a:prstGeom prst="rect">
+            <a:avLst/>
+          </a:prstGeom>
+          <a:solidFill>
+            <a:srgbClr val="E4E4E2"/>
+          </a:solidFill>
+          <a:ln>
+            <a:noFill/>
+          </a:ln>
+          <a:effectLst/>
+        </p:spPr>
+        <p:style>
+          <a:lnRef idx="1">
+            <a:schemeClr val="accent1"/>
+          </a:lnRef>
+          <a:fillRef idx="3">
+            <a:schemeClr val="accent1"/>
+          </a:fillRef>
+          <a:effectRef idx="2">
+            <a:schemeClr val="accent1"/>
+          </a:effectRef>
+          <a:fontRef idx="minor">
+            <a:schemeClr val="lt1"/>
+          </a:fontRef>
+        </p:style>
+        <p:txBody>
+          <a:bodyPr rtlCol="0" anchor="ctr"/>
+          <a:lstStyle/>
+          <a:p>
+            <a:pPr algn="ctr"/>
+          </a:p>
+        </p:txBody>
+      </p:sp>
+      <p:graphicFrame>
+        <p:nvGraphicFramePr>
+          <p:cNvPr id="5" name="Table 4"/>
+          <p:cNvGraphicFramePr>
+            <a:graphicFrameLocks noGrp="1"/>
+          </p:cNvGraphicFramePr>
+          <p:nvPr/>
+        </p:nvGraphicFramePr>
+        <p:xfrm>
+          <a:off x="822960" y="1737360"/>
+          <a:ext cx="10515600" cy="3863340"/>
+        </p:xfrm>
+        <a:graphic>
+          <a:graphicData uri="http://schemas.openxmlformats.org/drawingml/2006/table">
+            <a:tbl>
+              <a:tblPr firstRow="1" bandRow="1">
+                <a:tableStyleId>{5C22544A-7EE6-4342-B048-85BDC9FD1C3A}</a:tableStyleId>
+              </a:tblPr>
+              <a:tblGrid>
+                <a:gridCol w="3931920"/>
+                <a:gridCol w="2286000"/>
+                <a:gridCol w="2286000"/>
+                <a:gridCol w="2011680"/>
+              </a:tblGrid>
+              <a:tr h="297180">
+                <a:tc>
+                  <a:txBody>
+                    <a:bodyPr/>
+                    <a:lstStyle/>
+                    <a:p>
+                      <a:pPr algn="l"/>
+                      <a:r>
+                        <a:rPr sz="1250" b="1">
+                          <a:solidFill>
+                            <a:srgbClr val="26262A"/>
+                          </a:solidFill>
+                          <a:latin typeface="Noto Sans CJK TC"/>
+                        </a:rPr>
+                        <a:t>指標</a:t>
+                      </a:r>
+                    </a:p>
+                  </a:txBody>
+                  <a:tcPr>
+                    <a:solidFill>
+                      <a:srgbClr val="F2F2F0"/>
+                    </a:solidFill>
+                  </a:tcPr>
+                </a:tc>
+                <a:tc>
+                  <a:txBody>
+                    <a:bodyPr/>
+                    <a:lstStyle/>
+                    <a:p>
+                      <a:pPr algn="r"/>
+                      <a:r>
+                        <a:rPr sz="1250" b="1">
+                          <a:solidFill>
+                            <a:srgbClr val="EB6834"/>
+                          </a:solidFill>
+                          <a:latin typeface="Noto Sans CJK TC"/>
+                        </a:rPr>
+                        <a:t>併發 1</a:t>
+                      </a:r>
+                    </a:p>
+                  </a:txBody>
+                  <a:tcPr>
+                    <a:solidFill>
+                      <a:srgbClr val="F2F2F0"/>
+                    </a:solidFill>
+                  </a:tcPr>
+                </a:tc>
+                <a:tc>
+                  <a:txBody>
+                    <a:bodyPr/>
+                    <a:lstStyle/>
+                    <a:p>
+                      <a:pPr algn="r"/>
+                      <a:r>
+                        <a:rPr sz="1250" b="1">
+                          <a:solidFill>
+                            <a:srgbClr val="EB6834"/>
+                          </a:solidFill>
+                          <a:latin typeface="Noto Sans CJK TC"/>
+                        </a:rPr>
+                        <a:t>併發 2</a:t>
+                      </a:r>
+                    </a:p>
+                  </a:txBody>
+                  <a:tcPr>
+                    <a:solidFill>
+                      <a:srgbClr val="F2F2F0"/>
+                    </a:solidFill>
+                  </a:tcPr>
+                </a:tc>
+                <a:tc>
+                  <a:txBody>
+                    <a:bodyPr/>
+                    <a:lstStyle/>
+                    <a:p>
+                      <a:pPr algn="r"/>
+                      <a:r>
+                        <a:rPr sz="1250" b="1">
+                          <a:solidFill>
+                            <a:srgbClr val="26262A"/>
+                          </a:solidFill>
+                          <a:latin typeface="Noto Sans CJK TC"/>
+                        </a:rPr>
+                        <a:t>c2 相對 c1</a:t>
+                      </a:r>
+                    </a:p>
+                  </a:txBody>
+                  <a:tcPr>
+                    <a:solidFill>
+                      <a:srgbClr val="F2F2F0"/>
+                    </a:solidFill>
+                  </a:tcPr>
+                </a:tc>
+              </a:tr>
+              <a:tr h="297180">
+                <a:tc>
+                  <a:txBody>
+                    <a:bodyPr/>
+                    <a:lstStyle/>
+                    <a:p>
+                      <a:pPr algn="l"/>
+                      <a:r>
+                        <a:rPr sz="1250" b="0">
+                          <a:solidFill>
+                            <a:srgbClr val="26262A"/>
+                          </a:solidFill>
+                          <a:latin typeface="Noto Sans CJK TC"/>
+                        </a:rPr>
+                        <a:t>TTFT avg (ms)</a:t>
+                      </a:r>
+                    </a:p>
+                  </a:txBody>
+                  <a:tcPr>
+                    <a:solidFill>
+                      <a:srgbClr val="FCFCFB"/>
+                    </a:solidFill>
+                  </a:tcPr>
+                </a:tc>
+                <a:tc>
+                  <a:txBody>
+                    <a:bodyPr/>
+                    <a:lstStyle/>
+                    <a:p>
+                      <a:pPr algn="r"/>
+                      <a:r>
+                        <a:rPr sz="1250" b="0">
+                          <a:solidFill>
+                            <a:srgbClr val="26262A"/>
+                          </a:solidFill>
+                          <a:latin typeface="Noto Sans CJK TC"/>
+                        </a:rPr>
+                        <a:t>10,970.9</a:t>
+                      </a:r>
+                    </a:p>
+                  </a:txBody>
+                  <a:tcPr>
+                    <a:solidFill>
+                      <a:srgbClr val="FCFCFB"/>
+                    </a:solidFill>
+                  </a:tcPr>
+                </a:tc>
+                <a:tc>
+                  <a:txBody>
+                    <a:bodyPr/>
+                    <a:lstStyle/>
+                    <a:p>
+                      <a:pPr algn="r"/>
+                      <a:r>
+                        <a:rPr sz="1250" b="0">
+                          <a:solidFill>
+                            <a:srgbClr val="26262A"/>
+                          </a:solidFill>
+                          <a:latin typeface="Noto Sans CJK TC"/>
+                        </a:rPr>
+                        <a:t>17,821.7</a:t>
+                      </a:r>
+                    </a:p>
+                  </a:txBody>
+                  <a:tcPr>
+                    <a:solidFill>
+                      <a:srgbClr val="FCFCFB"/>
+                    </a:solidFill>
+                  </a:tcPr>
+                </a:tc>
+                <a:tc>
+                  <a:txBody>
+                    <a:bodyPr/>
+                    <a:lstStyle/>
+                    <a:p>
+                      <a:pPr algn="r"/>
+                      <a:r>
+                        <a:rPr sz="1250" b="1">
+                          <a:solidFill>
+                            <a:srgbClr val="26262A"/>
+                          </a:solidFill>
+                          <a:latin typeface="Noto Sans CJK TC"/>
+                        </a:rPr>
+                        <a:t>1.62×</a:t>
+                      </a:r>
+                    </a:p>
+                  </a:txBody>
+                  <a:tcPr>
+                    <a:solidFill>
+                      <a:srgbClr val="FCFCFB"/>
+                    </a:solidFill>
+                  </a:tcPr>
+                </a:tc>
+              </a:tr>
+              <a:tr h="297180">
+                <a:tc>
+                  <a:txBody>
+                    <a:bodyPr/>
+                    <a:lstStyle/>
+                    <a:p>
+                      <a:pPr algn="l"/>
+                      <a:r>
+                        <a:rPr sz="1250" b="0">
+                          <a:solidFill>
+                            <a:srgbClr val="26262A"/>
+                          </a:solidFill>
+                          <a:latin typeface="Noto Sans CJK TC"/>
+                        </a:rPr>
+                        <a:t>ITL = TPOT avg (ms)</a:t>
+                      </a:r>
+                    </a:p>
+                  </a:txBody>
+                  <a:tcPr>
+                    <a:solidFill>
+                      <a:srgbClr val="FCFCFB"/>
+                    </a:solidFill>
+                  </a:tcPr>
+                </a:tc>
+                <a:tc>
+                  <a:txBody>
+                    <a:bodyPr/>
+                    <a:lstStyle/>
+                    <a:p>
+                      <a:pPr algn="r"/>
+                      <a:r>
+                        <a:rPr sz="1250" b="0">
+                          <a:solidFill>
+                            <a:srgbClr val="26262A"/>
+                          </a:solidFill>
+                          <a:latin typeface="Noto Sans CJK TC"/>
+                        </a:rPr>
+                        <a:t>67.36</a:t>
+                      </a:r>
+                    </a:p>
+                  </a:txBody>
+                  <a:tcPr>
+                    <a:solidFill>
+                      <a:srgbClr val="FCFCFB"/>
+                    </a:solidFill>
+                  </a:tcPr>
+                </a:tc>
+                <a:tc>
+                  <a:txBody>
+                    <a:bodyPr/>
+                    <a:lstStyle/>
+                    <a:p>
+                      <a:pPr algn="r"/>
+                      <a:r>
+                        <a:rPr sz="1250" b="0">
+                          <a:solidFill>
+                            <a:srgbClr val="26262A"/>
+                          </a:solidFill>
+                          <a:latin typeface="Noto Sans CJK TC"/>
+                        </a:rPr>
+                        <a:t>181.71</a:t>
+                      </a:r>
+                    </a:p>
+                  </a:txBody>
+                  <a:tcPr>
+                    <a:solidFill>
+                      <a:srgbClr val="FCFCFB"/>
+                    </a:solidFill>
+                  </a:tcPr>
+                </a:tc>
+                <a:tc>
+                  <a:txBody>
+                    <a:bodyPr/>
+                    <a:lstStyle/>
+                    <a:p>
+                      <a:pPr algn="r"/>
+                      <a:r>
+                        <a:rPr sz="1250" b="1">
+                          <a:solidFill>
+                            <a:srgbClr val="26262A"/>
+                          </a:solidFill>
+                          <a:latin typeface="Noto Sans CJK TC"/>
+                        </a:rPr>
+                        <a:t>2.70×</a:t>
+                      </a:r>
+                    </a:p>
+                  </a:txBody>
+                  <a:tcPr>
+                    <a:solidFill>
+                      <a:srgbClr val="FCFCFB"/>
+                    </a:solidFill>
+                  </a:tcPr>
+                </a:tc>
+              </a:tr>
+              <a:tr h="297180">
+                <a:tc>
+                  <a:txBody>
+                    <a:bodyPr/>
+                    <a:lstStyle/>
+                    <a:p>
+                      <a:pPr algn="l"/>
+                      <a:r>
+                        <a:rPr sz="1250" b="0">
+                          <a:solidFill>
+                            <a:srgbClr val="26262A"/>
+                          </a:solidFill>
+                          <a:latin typeface="Noto Sans CJK TC"/>
+                        </a:rPr>
+                        <a:t>E2E latency avg (ms)</a:t>
+                      </a:r>
+                    </a:p>
+                  </a:txBody>
+                  <a:tcPr>
+                    <a:solidFill>
+                      <a:srgbClr val="FCFCFB"/>
+                    </a:solidFill>
+                  </a:tcPr>
+                </a:tc>
+                <a:tc>
+                  <a:txBody>
+                    <a:bodyPr/>
+                    <a:lstStyle/>
+                    <a:p>
+                      <a:pPr algn="r"/>
+                      <a:r>
+                        <a:rPr sz="1250" b="0">
+                          <a:solidFill>
+                            <a:srgbClr val="26262A"/>
+                          </a:solidFill>
+                          <a:latin typeface="Noto Sans CJK TC"/>
+                        </a:rPr>
+                        <a:t>27,572.8</a:t>
+                      </a:r>
+                    </a:p>
+                  </a:txBody>
+                  <a:tcPr>
+                    <a:solidFill>
+                      <a:srgbClr val="FCFCFB"/>
+                    </a:solidFill>
+                  </a:tcPr>
+                </a:tc>
+                <a:tc>
+                  <a:txBody>
+                    <a:bodyPr/>
+                    <a:lstStyle/>
+                    <a:p>
+                      <a:pPr algn="r"/>
+                      <a:r>
+                        <a:rPr sz="1250" b="0">
+                          <a:solidFill>
+                            <a:srgbClr val="26262A"/>
+                          </a:solidFill>
+                          <a:latin typeface="Noto Sans CJK TC"/>
+                        </a:rPr>
+                        <a:t>62,530.2</a:t>
+                      </a:r>
+                    </a:p>
+                  </a:txBody>
+                  <a:tcPr>
+                    <a:solidFill>
+                      <a:srgbClr val="FCFCFB"/>
+                    </a:solidFill>
+                  </a:tcPr>
+                </a:tc>
+                <a:tc>
+                  <a:txBody>
+                    <a:bodyPr/>
+                    <a:lstStyle/>
+                    <a:p>
+                      <a:pPr algn="r"/>
+                      <a:r>
+                        <a:rPr sz="1250" b="1">
+                          <a:solidFill>
+                            <a:srgbClr val="26262A"/>
+                          </a:solidFill>
+                          <a:latin typeface="Noto Sans CJK TC"/>
+                        </a:rPr>
+                        <a:t>2.27×</a:t>
+                      </a:r>
+                    </a:p>
+                  </a:txBody>
+                  <a:tcPr>
+                    <a:solidFill>
+                      <a:srgbClr val="FCFCFB"/>
+                    </a:solidFill>
+                  </a:tcPr>
+                </a:tc>
+              </a:tr>
+              <a:tr h="297180">
+                <a:tc>
+                  <a:txBody>
+                    <a:bodyPr/>
+                    <a:lstStyle/>
+                    <a:p>
+                      <a:pPr algn="l"/>
+                      <a:r>
+                        <a:rPr sz="1250" b="0">
+                          <a:solidFill>
+                            <a:srgbClr val="26262A"/>
+                          </a:solidFill>
+                          <a:latin typeface="Noto Sans CJK TC"/>
+                        </a:rPr>
+                        <a:t>Prefill throughput (tok/s/user)</a:t>
+                      </a:r>
+                    </a:p>
+                  </a:txBody>
+                  <a:tcPr>
+                    <a:solidFill>
+                      <a:srgbClr val="FCFCFB"/>
+                    </a:solidFill>
+                  </a:tcPr>
+                </a:tc>
+                <a:tc>
+                  <a:txBody>
+                    <a:bodyPr/>
+                    <a:lstStyle/>
+                    <a:p>
+                      <a:pPr algn="r"/>
+                      <a:r>
+                        <a:rPr sz="1250" b="0">
+                          <a:solidFill>
+                            <a:srgbClr val="26262A"/>
+                          </a:solidFill>
+                          <a:latin typeface="Noto Sans CJK TC"/>
+                        </a:rPr>
+                        <a:t>64.8</a:t>
+                      </a:r>
+                    </a:p>
+                  </a:txBody>
+                  <a:tcPr>
+                    <a:solidFill>
+                      <a:srgbClr val="FCFCFB"/>
+                    </a:solidFill>
+                  </a:tcPr>
+                </a:tc>
+                <a:tc>
+                  <a:txBody>
+                    <a:bodyPr/>
+                    <a:lstStyle/>
+                    <a:p>
+                      <a:pPr algn="r"/>
+                      <a:r>
+                        <a:rPr sz="1250" b="0">
+                          <a:solidFill>
+                            <a:srgbClr val="26262A"/>
+                          </a:solidFill>
+                          <a:latin typeface="Noto Sans CJK TC"/>
+                        </a:rPr>
+                        <a:t>48.5</a:t>
+                      </a:r>
+                    </a:p>
+                  </a:txBody>
+                  <a:tcPr>
+                    <a:solidFill>
+                      <a:srgbClr val="FCFCFB"/>
+                    </a:solidFill>
+                  </a:tcPr>
+                </a:tc>
+                <a:tc>
+                  <a:txBody>
+                    <a:bodyPr/>
+                    <a:lstStyle/>
+                    <a:p>
+                      <a:pPr algn="r"/>
+                      <a:r>
+                        <a:rPr sz="1250" b="1">
+                          <a:solidFill>
+                            <a:srgbClr val="26262A"/>
+                          </a:solidFill>
+                          <a:latin typeface="Noto Sans CJK TC"/>
+                        </a:rPr>
+                        <a:t>0.75×</a:t>
+                      </a:r>
+                    </a:p>
+                  </a:txBody>
+                  <a:tcPr>
+                    <a:solidFill>
+                      <a:srgbClr val="FCFCFB"/>
+                    </a:solidFill>
+                  </a:tcPr>
+                </a:tc>
+              </a:tr>
+              <a:tr h="297180">
+                <a:tc>
+                  <a:txBody>
+                    <a:bodyPr/>
+                    <a:lstStyle/>
+                    <a:p>
+                      <a:pPr algn="l"/>
+                      <a:r>
+                        <a:rPr sz="1250" b="0">
+                          <a:solidFill>
+                            <a:srgbClr val="26262A"/>
+                          </a:solidFill>
+                          <a:latin typeface="Noto Sans CJK TC"/>
+                        </a:rPr>
+                        <a:t>Decode throughput (tok/s/user)</a:t>
+                      </a:r>
+                    </a:p>
+                  </a:txBody>
+                  <a:tcPr>
+                    <a:solidFill>
+                      <a:srgbClr val="FCFCFB"/>
+                    </a:solidFill>
+                  </a:tcPr>
+                </a:tc>
+                <a:tc>
+                  <a:txBody>
+                    <a:bodyPr/>
+                    <a:lstStyle/>
+                    <a:p>
+                      <a:pPr algn="r"/>
+                      <a:r>
+                        <a:rPr sz="1250" b="0">
+                          <a:solidFill>
+                            <a:srgbClr val="26262A"/>
+                          </a:solidFill>
+                          <a:latin typeface="Noto Sans CJK TC"/>
+                        </a:rPr>
+                        <a:t>14.86</a:t>
+                      </a:r>
+                    </a:p>
+                  </a:txBody>
+                  <a:tcPr>
+                    <a:solidFill>
+                      <a:srgbClr val="FCFCFB"/>
+                    </a:solidFill>
+                  </a:tcPr>
+                </a:tc>
+                <a:tc>
+                  <a:txBody>
+                    <a:bodyPr/>
+                    <a:lstStyle/>
+                    <a:p>
+                      <a:pPr algn="r"/>
+                      <a:r>
+                        <a:rPr sz="1250" b="0">
+                          <a:solidFill>
+                            <a:srgbClr val="26262A"/>
+                          </a:solidFill>
+                          <a:latin typeface="Noto Sans CJK TC"/>
+                        </a:rPr>
+                        <a:t>6.62</a:t>
+                      </a:r>
+                    </a:p>
+                  </a:txBody>
+                  <a:tcPr>
+                    <a:solidFill>
+                      <a:srgbClr val="FCFCFB"/>
+                    </a:solidFill>
+                  </a:tcPr>
+                </a:tc>
+                <a:tc>
+                  <a:txBody>
+                    <a:bodyPr/>
+                    <a:lstStyle/>
+                    <a:p>
+                      <a:pPr algn="r"/>
+                      <a:r>
+                        <a:rPr sz="1250" b="1">
+                          <a:solidFill>
+                            <a:srgbClr val="26262A"/>
+                          </a:solidFill>
+                          <a:latin typeface="Noto Sans CJK TC"/>
+                        </a:rPr>
+                        <a:t>0.45×</a:t>
+                      </a:r>
+                    </a:p>
+                  </a:txBody>
+                  <a:tcPr>
+                    <a:solidFill>
+                      <a:srgbClr val="FCFCFB"/>
+                    </a:solidFill>
+                  </a:tcPr>
+                </a:tc>
+              </a:tr>
+              <a:tr h="297180">
+                <a:tc>
+                  <a:txBody>
+                    <a:bodyPr/>
+                    <a:lstStyle/>
+                    <a:p>
+                      <a:pPr algn="l"/>
+                      <a:r>
+                        <a:rPr sz="1250" b="0">
+                          <a:solidFill>
+                            <a:srgbClr val="26262A"/>
+                          </a:solidFill>
+                          <a:latin typeface="Noto Sans CJK TC"/>
+                        </a:rPr>
+                        <a:t>Output throughput, system (tok/s)</a:t>
+                      </a:r>
+                    </a:p>
+                  </a:txBody>
+                  <a:tcPr>
+                    <a:solidFill>
+                      <a:srgbClr val="FCFCFB"/>
+                    </a:solidFill>
+                  </a:tcPr>
+                </a:tc>
+                <a:tc>
+                  <a:txBody>
+                    <a:bodyPr/>
+                    <a:lstStyle/>
+                    <a:p>
+                      <a:pPr algn="r"/>
+                      <a:r>
+                        <a:rPr sz="1250" b="0">
+                          <a:solidFill>
+                            <a:srgbClr val="26262A"/>
+                          </a:solidFill>
+                          <a:latin typeface="Noto Sans CJK TC"/>
+                        </a:rPr>
+                        <a:t>8.97</a:t>
+                      </a:r>
+                    </a:p>
+                  </a:txBody>
+                  <a:tcPr>
+                    <a:solidFill>
+                      <a:srgbClr val="FCFCFB"/>
+                    </a:solidFill>
+                  </a:tcPr>
+                </a:tc>
+                <a:tc>
+                  <a:txBody>
+                    <a:bodyPr/>
+                    <a:lstStyle/>
+                    <a:p>
+                      <a:pPr algn="r"/>
+                      <a:r>
+                        <a:rPr sz="1250" b="0">
+                          <a:solidFill>
+                            <a:srgbClr val="26262A"/>
+                          </a:solidFill>
+                          <a:latin typeface="Noto Sans CJK TC"/>
+                        </a:rPr>
+                        <a:t>7.89</a:t>
+                      </a:r>
+                    </a:p>
+                  </a:txBody>
+                  <a:tcPr>
+                    <a:solidFill>
+                      <a:srgbClr val="FCFCFB"/>
+                    </a:solidFill>
+                  </a:tcPr>
+                </a:tc>
+                <a:tc>
+                  <a:txBody>
+                    <a:bodyPr/>
+                    <a:lstStyle/>
+                    <a:p>
+                      <a:pPr algn="r"/>
+                      <a:r>
+                        <a:rPr sz="1250" b="1">
+                          <a:solidFill>
+                            <a:srgbClr val="26262A"/>
+                          </a:solidFill>
+                          <a:latin typeface="Noto Sans CJK TC"/>
+                        </a:rPr>
+                        <a:t>0.88×</a:t>
+                      </a:r>
+                    </a:p>
+                  </a:txBody>
+                  <a:tcPr>
+                    <a:solidFill>
+                      <a:srgbClr val="FCFCFB"/>
+                    </a:solidFill>
+                  </a:tcPr>
+                </a:tc>
+              </a:tr>
+              <a:tr h="297180">
+                <a:tc>
+                  <a:txBody>
+                    <a:bodyPr/>
+                    <a:lstStyle/>
+                    <a:p>
+                      <a:pPr algn="l"/>
+                      <a:r>
+                        <a:rPr sz="1250" b="0">
+                          <a:solidFill>
+                            <a:srgbClr val="26262A"/>
+                          </a:solidFill>
+                          <a:latin typeface="Noto Sans CJK TC"/>
+                        </a:rPr>
+                        <a:t>Request throughput (req/s)</a:t>
+                      </a:r>
+                    </a:p>
+                  </a:txBody>
+                  <a:tcPr>
+                    <a:solidFill>
+                      <a:srgbClr val="FCFCFB"/>
+                    </a:solidFill>
+                  </a:tcPr>
+                </a:tc>
+                <a:tc>
+                  <a:txBody>
+                    <a:bodyPr/>
+                    <a:lstStyle/>
+                    <a:p>
+                      <a:pPr algn="r"/>
+                      <a:r>
+                        <a:rPr sz="1250" b="0">
+                          <a:solidFill>
+                            <a:srgbClr val="26262A"/>
+                          </a:solidFill>
+                          <a:latin typeface="Noto Sans CJK TC"/>
+                        </a:rPr>
+                        <a:t>0.0363</a:t>
+                      </a:r>
+                    </a:p>
+                  </a:txBody>
+                  <a:tcPr>
+                    <a:solidFill>
+                      <a:srgbClr val="FCFCFB"/>
+                    </a:solidFill>
+                  </a:tcPr>
+                </a:tc>
+                <a:tc>
+                  <a:txBody>
+                    <a:bodyPr/>
+                    <a:lstStyle/>
+                    <a:p>
+                      <a:pPr algn="r"/>
+                      <a:r>
+                        <a:rPr sz="1250" b="0">
+                          <a:solidFill>
+                            <a:srgbClr val="26262A"/>
+                          </a:solidFill>
+                          <a:latin typeface="Noto Sans CJK TC"/>
+                        </a:rPr>
+                        <a:t>0.0319</a:t>
+                      </a:r>
+                    </a:p>
+                  </a:txBody>
+                  <a:tcPr>
+                    <a:solidFill>
+                      <a:srgbClr val="FCFCFB"/>
+                    </a:solidFill>
+                  </a:tcPr>
+                </a:tc>
+                <a:tc>
+                  <a:txBody>
+                    <a:bodyPr/>
+                    <a:lstStyle/>
+                    <a:p>
+                      <a:pPr algn="r"/>
+                      <a:r>
+                        <a:rPr sz="1250" b="1">
+                          <a:solidFill>
+                            <a:srgbClr val="26262A"/>
+                          </a:solidFill>
+                          <a:latin typeface="Noto Sans CJK TC"/>
+                        </a:rPr>
+                        <a:t>0.88×</a:t>
+                      </a:r>
+                    </a:p>
+                  </a:txBody>
+                  <a:tcPr>
+                    <a:solidFill>
+                      <a:srgbClr val="FCFCFB"/>
+                    </a:solidFill>
+                  </a:tcPr>
+                </a:tc>
+              </a:tr>
+              <a:tr h="297180">
+                <a:tc>
+                  <a:txBody>
+                    <a:bodyPr/>
+                    <a:lstStyle/>
+                    <a:p>
+                      <a:pPr algn="l"/>
+                      <a:r>
+                        <a:rPr sz="1250" b="0">
+                          <a:solidFill>
+                            <a:srgbClr val="26262A"/>
+                          </a:solidFill>
+                          <a:latin typeface="Noto Sans CJK TC"/>
+                        </a:rPr>
+                        <a:t>Benchmark duration (s)</a:t>
+                      </a:r>
+                    </a:p>
+                  </a:txBody>
+                  <a:tcPr>
+                    <a:solidFill>
+                      <a:srgbClr val="FCFCFB"/>
+                    </a:solidFill>
+                  </a:tcPr>
+                </a:tc>
+                <a:tc>
+                  <a:txBody>
+                    <a:bodyPr/>
+                    <a:lstStyle/>
+                    <a:p>
+                      <a:pPr algn="r"/>
+                      <a:r>
+                        <a:rPr sz="1250" b="0">
+                          <a:solidFill>
+                            <a:srgbClr val="26262A"/>
+                          </a:solidFill>
+                          <a:latin typeface="Noto Sans CJK TC"/>
+                        </a:rPr>
+                        <a:t>2,757.6</a:t>
+                      </a:r>
+                    </a:p>
+                  </a:txBody>
+                  <a:tcPr>
+                    <a:solidFill>
+                      <a:srgbClr val="FCFCFB"/>
+                    </a:solidFill>
+                  </a:tcPr>
+                </a:tc>
+                <a:tc>
+                  <a:txBody>
+                    <a:bodyPr/>
+                    <a:lstStyle/>
+                    <a:p>
+                      <a:pPr algn="r"/>
+                      <a:r>
+                        <a:rPr sz="1250" b="0">
+                          <a:solidFill>
+                            <a:srgbClr val="26262A"/>
+                          </a:solidFill>
+                          <a:latin typeface="Noto Sans CJK TC"/>
+                        </a:rPr>
+                        <a:t>3,132.2</a:t>
+                      </a:r>
+                    </a:p>
+                  </a:txBody>
+                  <a:tcPr>
+                    <a:solidFill>
+                      <a:srgbClr val="FCFCFB"/>
+                    </a:solidFill>
+                  </a:tcPr>
+                </a:tc>
+                <a:tc>
+                  <a:txBody>
+                    <a:bodyPr/>
+                    <a:lstStyle/>
+                    <a:p>
+                      <a:pPr algn="r"/>
+                      <a:r>
+                        <a:rPr sz="1250" b="1">
+                          <a:solidFill>
+                            <a:srgbClr val="26262A"/>
+                          </a:solidFill>
+                          <a:latin typeface="Noto Sans CJK TC"/>
+                        </a:rPr>
+                        <a:t>1.14×</a:t>
+                      </a:r>
+                    </a:p>
+                  </a:txBody>
+                  <a:tcPr>
+                    <a:solidFill>
+                      <a:srgbClr val="FCFCFB"/>
+                    </a:solidFill>
+                  </a:tcPr>
+                </a:tc>
+              </a:tr>
+              <a:tr h="297180">
+                <a:tc>
+                  <a:txBody>
+                    <a:bodyPr/>
+                    <a:lstStyle/>
+                    <a:p>
+                      <a:pPr algn="l"/>
+                      <a:r>
+                        <a:rPr sz="1250" b="0">
+                          <a:solidFill>
+                            <a:srgbClr val="26262A"/>
+                          </a:solidFill>
+                          <a:latin typeface="Noto Sans CJK TC"/>
+                        </a:rPr>
+                        <a:t>Prefix cache 命中率 (%)</a:t>
+                      </a:r>
+                    </a:p>
+                  </a:txBody>
+                  <a:tcPr>
+                    <a:solidFill>
+                      <a:srgbClr val="FCFCFB"/>
+                    </a:solidFill>
+                  </a:tcPr>
+                </a:tc>
+                <a:tc>
+                  <a:txBody>
+                    <a:bodyPr/>
+                    <a:lstStyle/>
+                    <a:p>
+                      <a:pPr algn="r"/>
+                      <a:r>
+                        <a:rPr sz="1250" b="0">
+                          <a:solidFill>
+                            <a:srgbClr val="26262A"/>
+                          </a:solidFill>
+                          <a:latin typeface="Noto Sans CJK TC"/>
+                        </a:rPr>
+                        <a:t>67.04</a:t>
+                      </a:r>
+                    </a:p>
+                  </a:txBody>
+                  <a:tcPr>
+                    <a:solidFill>
+                      <a:srgbClr val="FCFCFB"/>
+                    </a:solidFill>
+                  </a:tcPr>
+                </a:tc>
+                <a:tc>
+                  <a:txBody>
+                    <a:bodyPr/>
+                    <a:lstStyle/>
+                    <a:p>
+                      <a:pPr algn="r"/>
+                      <a:r>
+                        <a:rPr sz="1250" b="0">
+                          <a:solidFill>
+                            <a:srgbClr val="26262A"/>
+                          </a:solidFill>
+                          <a:latin typeface="Noto Sans CJK TC"/>
+                        </a:rPr>
+                        <a:t>46.77</a:t>
+                      </a:r>
+                    </a:p>
+                  </a:txBody>
+                  <a:tcPr>
+                    <a:solidFill>
+                      <a:srgbClr val="FCFCFB"/>
+                    </a:solidFill>
+                  </a:tcPr>
+                </a:tc>
+                <a:tc>
+                  <a:txBody>
+                    <a:bodyPr/>
+                    <a:lstStyle/>
+                    <a:p>
+                      <a:pPr algn="r"/>
+                      <a:r>
+                        <a:rPr sz="1250" b="0">
+                          <a:solidFill>
+                            <a:srgbClr val="26262A"/>
+                          </a:solidFill>
+                          <a:latin typeface="Noto Sans CJK TC"/>
+                        </a:rPr>
+                        <a:t/>
+                      </a:r>
+                    </a:p>
+                  </a:txBody>
+                  <a:tcPr>
+                    <a:solidFill>
+                      <a:srgbClr val="FCFCFB"/>
+                    </a:solidFill>
+                  </a:tcPr>
+                </a:tc>
+              </a:tr>
+              <a:tr h="297180">
+                <a:tc>
+                  <a:txBody>
+                    <a:bodyPr/>
+                    <a:lstStyle/>
+                    <a:p>
+                      <a:pPr algn="l"/>
+                      <a:r>
+                        <a:rPr sz="1250" b="0">
+                          <a:solidFill>
+                            <a:srgbClr val="26262A"/>
+                          </a:solidFill>
+                          <a:latin typeface="Noto Sans CJK TC"/>
+                        </a:rPr>
+                        <a:t>ISL total (tokens)</a:t>
+                      </a:r>
+                    </a:p>
+                  </a:txBody>
+                  <a:tcPr>
+                    <a:solidFill>
+                      <a:srgbClr val="FCFCFB"/>
+                    </a:solidFill>
+                  </a:tcPr>
+                </a:tc>
+                <a:tc>
+                  <a:txBody>
+                    <a:bodyPr/>
+                    <a:lstStyle/>
+                    <a:p>
+                      <a:pPr algn="r"/>
+                      <a:r>
+                        <a:rPr sz="1250" b="0">
+                          <a:solidFill>
+                            <a:srgbClr val="26262A"/>
+                          </a:solidFill>
+                          <a:latin typeface="Noto Sans CJK TC"/>
+                        </a:rPr>
+                        <a:t>65,546</a:t>
+                      </a:r>
+                    </a:p>
+                  </a:txBody>
+                  <a:tcPr>
+                    <a:solidFill>
+                      <a:srgbClr val="FCFCFB"/>
+                    </a:solidFill>
+                  </a:tcPr>
+                </a:tc>
+                <a:tc>
+                  <a:txBody>
+                    <a:bodyPr/>
+                    <a:lstStyle/>
+                    <a:p>
+                      <a:pPr algn="r"/>
+                      <a:r>
+                        <a:rPr sz="1250" b="0">
+                          <a:solidFill>
+                            <a:srgbClr val="26262A"/>
+                          </a:solidFill>
+                          <a:latin typeface="Noto Sans CJK TC"/>
+                        </a:rPr>
+                        <a:t>65,546</a:t>
+                      </a:r>
+                    </a:p>
+                  </a:txBody>
+                  <a:tcPr>
+                    <a:solidFill>
+                      <a:srgbClr val="FCFCFB"/>
+                    </a:solidFill>
+                  </a:tcPr>
+                </a:tc>
+                <a:tc>
+                  <a:txBody>
+                    <a:bodyPr/>
+                    <a:lstStyle/>
+                    <a:p>
+                      <a:pPr algn="r"/>
+                      <a:r>
+                        <a:rPr sz="1250" b="1">
+                          <a:solidFill>
+                            <a:srgbClr val="1BAF7A"/>
+                          </a:solidFill>
+                          <a:latin typeface="Noto Sans CJK TC"/>
+                        </a:rPr>
+                        <a:t>相同</a:t>
+                      </a:r>
+                    </a:p>
+                  </a:txBody>
+                  <a:tcPr>
+                    <a:solidFill>
+                      <a:srgbClr val="FCFCFB"/>
+                    </a:solidFill>
+                  </a:tcPr>
+                </a:tc>
+              </a:tr>
+              <a:tr h="297180">
+                <a:tc>
+                  <a:txBody>
+                    <a:bodyPr/>
+                    <a:lstStyle/>
+                    <a:p>
+                      <a:pPr algn="l"/>
+                      <a:r>
+                        <a:rPr sz="1250" b="0">
+                          <a:solidFill>
+                            <a:srgbClr val="26262A"/>
+                          </a:solidFill>
+                          <a:latin typeface="Noto Sans CJK TC"/>
+                        </a:rPr>
+                        <a:t>OSL total (tokens)</a:t>
+                      </a:r>
+                    </a:p>
+                  </a:txBody>
+                  <a:tcPr>
+                    <a:solidFill>
+                      <a:srgbClr val="FCFCFB"/>
+                    </a:solidFill>
+                  </a:tcPr>
+                </a:tc>
+                <a:tc>
+                  <a:txBody>
+                    <a:bodyPr/>
+                    <a:lstStyle/>
+                    <a:p>
+                      <a:pPr algn="r"/>
+                      <a:r>
+                        <a:rPr sz="1250" b="0">
+                          <a:solidFill>
+                            <a:srgbClr val="26262A"/>
+                          </a:solidFill>
+                          <a:latin typeface="Noto Sans CJK TC"/>
+                        </a:rPr>
+                        <a:t>24,723</a:t>
+                      </a:r>
+                    </a:p>
+                  </a:txBody>
+                  <a:tcPr>
+                    <a:solidFill>
+                      <a:srgbClr val="FCFCFB"/>
+                    </a:solidFill>
+                  </a:tcPr>
+                </a:tc>
+                <a:tc>
+                  <a:txBody>
+                    <a:bodyPr/>
+                    <a:lstStyle/>
+                    <a:p>
+                      <a:pPr algn="r"/>
+                      <a:r>
+                        <a:rPr sz="1250" b="0">
+                          <a:solidFill>
+                            <a:srgbClr val="26262A"/>
+                          </a:solidFill>
+                          <a:latin typeface="Noto Sans CJK TC"/>
+                        </a:rPr>
+                        <a:t>24,723</a:t>
+                      </a:r>
+                    </a:p>
+                  </a:txBody>
+                  <a:tcPr>
+                    <a:solidFill>
+                      <a:srgbClr val="FCFCFB"/>
+                    </a:solidFill>
+                  </a:tcPr>
+                </a:tc>
+                <a:tc>
+                  <a:txBody>
+                    <a:bodyPr/>
+                    <a:lstStyle/>
+                    <a:p>
+                      <a:pPr algn="r"/>
+                      <a:r>
+                        <a:rPr sz="1250" b="1">
+                          <a:solidFill>
+                            <a:srgbClr val="1BAF7A"/>
+                          </a:solidFill>
+                          <a:latin typeface="Noto Sans CJK TC"/>
+                        </a:rPr>
+                        <a:t>相同</a:t>
+                      </a:r>
+                    </a:p>
+                  </a:txBody>
+                  <a:tcPr>
+                    <a:solidFill>
+                      <a:srgbClr val="FCFCFB"/>
+                    </a:solidFill>
+                  </a:tcPr>
+                </a:tc>
+              </a:tr>
+              <a:tr h="297180">
+                <a:tc>
+                  <a:txBody>
+                    <a:bodyPr/>
+                    <a:lstStyle/>
+                    <a:p>
+                      <a:pPr algn="l"/>
+                      <a:r>
+                        <a:rPr sz="1250" b="0">
+                          <a:solidFill>
+                            <a:srgbClr val="26262A"/>
+                          </a:solidFill>
+                          <a:latin typeface="Noto Sans CJK TC"/>
+                        </a:rPr>
+                        <a:t>Successful requests</a:t>
+                      </a:r>
+                    </a:p>
+                  </a:txBody>
+                  <a:tcPr>
+                    <a:solidFill>
+                      <a:srgbClr val="FCFCFB"/>
+                    </a:solidFill>
+                  </a:tcPr>
+                </a:tc>
+                <a:tc>
+                  <a:txBody>
+                    <a:bodyPr/>
+                    <a:lstStyle/>
+                    <a:p>
+                      <a:pPr algn="r"/>
+                      <a:r>
+                        <a:rPr sz="1250" b="0">
+                          <a:solidFill>
+                            <a:srgbClr val="26262A"/>
+                          </a:solidFill>
+                          <a:latin typeface="Noto Sans CJK TC"/>
+                        </a:rPr>
+                        <a:t>100 / 100</a:t>
+                      </a:r>
+                    </a:p>
+                  </a:txBody>
+                  <a:tcPr>
+                    <a:solidFill>
+                      <a:srgbClr val="FCFCFB"/>
+                    </a:solidFill>
+                  </a:tcPr>
+                </a:tc>
+                <a:tc>
+                  <a:txBody>
+                    <a:bodyPr/>
+                    <a:lstStyle/>
+                    <a:p>
+                      <a:pPr algn="r"/>
+                      <a:r>
+                        <a:rPr sz="1250" b="0">
+                          <a:solidFill>
+                            <a:srgbClr val="26262A"/>
+                          </a:solidFill>
+                          <a:latin typeface="Noto Sans CJK TC"/>
+                        </a:rPr>
+                        <a:t>100 / 100</a:t>
+                      </a:r>
+                    </a:p>
+                  </a:txBody>
+                  <a:tcPr>
+                    <a:solidFill>
+                      <a:srgbClr val="FCFCFB"/>
+                    </a:solidFill>
+                  </a:tcPr>
+                </a:tc>
+                <a:tc>
+                  <a:txBody>
+                    <a:bodyPr/>
+                    <a:lstStyle/>
+                    <a:p>
+                      <a:pPr algn="r"/>
+                      <a:r>
+                        <a:rPr sz="1250" b="0">
+                          <a:solidFill>
+                            <a:srgbClr val="26262A"/>
+                          </a:solidFill>
+                          <a:latin typeface="Noto Sans CJK TC"/>
+                        </a:rPr>
+                        <a:t/>
+                      </a:r>
+                    </a:p>
+                  </a:txBody>
+                  <a:tcPr>
+                    <a:solidFill>
+                      <a:srgbClr val="FCFCFB"/>
+                    </a:solidFill>
+                  </a:tcPr>
+                </a:tc>
+              </a:tr>
+            </a:tbl>
+          </a:graphicData>
+        </a:graphic>
+      </p:graphicFrame>
+      <p:sp>
+        <p:nvSpPr>
+          <p:cNvPr id="6" name="TextBox 5"/>
+          <p:cNvSpPr txBox="1"/>
+          <p:nvPr/>
+        </p:nvSpPr>
+        <p:spPr>
+          <a:xfrm>
+            <a:off x="822960" y="5765292"/>
+            <a:ext cx="10515600" cy="457200"/>
+          </a:xfrm>
+          <a:prstGeom prst="rect">
+            <a:avLst/>
+          </a:prstGeom>
+          <a:noFill/>
+        </p:spPr>
+        <p:txBody>
+          <a:bodyPr wrap="square" lIns="0" tIns="0" rIns="0" bIns="0">
+            <a:spAutoFit/>
+          </a:bodyPr>
+          <a:lstStyle/>
+          <a:p>
+            <a:pPr algn="l">
+              <a:spcAft>
+                <a:spcPts val="600"/>
+              </a:spcAft>
+            </a:pPr>
+            <a:r>
+              <a:rPr sz="1300" b="1">
+                <a:solidFill>
+                  <a:srgbClr val="26262A"/>
+                </a:solidFill>
+                <a:latin typeface="Noto Sans CJK TC"/>
+              </a:rPr>
+              <a:t>總工作量固定 100 個請求，併發加倍後端點卻多花 13.6% 的時間才跑完 —— 加大併發是負效益。</a:t>
+            </a:r>
+          </a:p>
+        </p:txBody>
+      </p:sp>
+      <p:sp>
+        <p:nvSpPr>
+          <p:cNvPr id="7" name="TextBox 6"/>
+          <p:cNvSpPr txBox="1"/>
+          <p:nvPr/>
+        </p:nvSpPr>
+        <p:spPr>
+          <a:xfrm>
+            <a:off x="822960" y="6076188"/>
+            <a:ext cx="10515600" cy="365760"/>
+          </a:xfrm>
+          <a:prstGeom prst="rect">
+            <a:avLst/>
+          </a:prstGeom>
+          <a:noFill/>
+        </p:spPr>
+        <p:txBody>
+          <a:bodyPr wrap="square" lIns="0" tIns="0" rIns="0" bIns="0">
+            <a:spAutoFit/>
+          </a:bodyPr>
+          <a:lstStyle/>
+          <a:p>
+            <a:pPr algn="l">
+              <a:spcAft>
+                <a:spcPts val="600"/>
+              </a:spcAft>
+            </a:pPr>
+            <a:r>
+              <a:rPr sz="1100" b="0">
+                <a:solidFill>
+                  <a:srgbClr val="6B6B70"/>
+                </a:solidFill>
+                <a:latin typeface="Noto Sans CJK TC"/>
+              </a:rPr>
+              <a:t>比值欄一律為 c2 ÷ c1：延遲類 &gt; 1 代表變慢，吞吐類 &lt; 1 代表變差。</a:t>
+            </a:r>
+          </a:p>
+        </p:txBody>
+      </p:sp>
+      <p:sp>
+        <p:nvSpPr>
+          <p:cNvPr id="8" name="TextBox 7"/>
+          <p:cNvSpPr txBox="1"/>
+          <p:nvPr/>
+        </p:nvSpPr>
+        <p:spPr>
+          <a:xfrm>
+            <a:off x="822960" y="6405372"/>
+            <a:ext cx="10515600" cy="731520"/>
+          </a:xfrm>
+          <a:prstGeom prst="rect">
+            <a:avLst/>
+          </a:prstGeom>
+          <a:noFill/>
+        </p:spPr>
+        <p:txBody>
+          <a:bodyPr wrap="square" lIns="0" tIns="0" rIns="0" bIns="0">
+            <a:spAutoFit/>
+          </a:bodyPr>
+          <a:lstStyle/>
+          <a:p>
+            <a:pPr algn="l">
+              <a:spcAft>
+                <a:spcPts val="300"/>
+              </a:spcAft>
+            </a:pPr>
+            <a:r>
+              <a:rPr sz="1150" b="0">
+                <a:solidFill>
+                  <a:srgbClr val="6B6B70"/>
+                </a:solidFill>
+                <a:latin typeface="Noto Sans CJK TC"/>
+              </a:rPr>
+              <a:t>機制在 decode：ITL 67.4 → 181.7 ms（+170%），per-user decode 掉到 6.62 tok/s，系統輸出從 8.97 降到 7.89。</a:t>
+            </a:r>
+          </a:p>
+          <a:p>
+            <a:pPr algn="l">
+              <a:spcAft>
+                <a:spcPts val="300"/>
+              </a:spcAft>
+            </a:pPr>
+            <a:r>
+              <a:rPr sz="1150" b="0">
+                <a:solidFill>
+                  <a:srgbClr val="6B6B70"/>
+                </a:solidFill>
+                <a:latin typeface="Noto Sans CJK TC"/>
+              </a:rPr>
+              <a:t>同一組測試在 spark 本機是加速 2.09×、系統輸出 13.74 → 28.75 tok/s（見第 5 頁）。</a:t>
+            </a:r>
+          </a:p>
+        </p:txBody>
+      </p:sp>
+    </p:spTree>
+  </p:cSld>
+  <p:clrMapOvr>
+    <a:masterClrMapping/>
+  </p:clrMapOvr>
+</p:sld>
+</file>
+
 <file path=ppt/slides/slide4.xml><?xml version="1.0" encoding="utf-8"?>
 <p:sld xmlns:a="http://schemas.openxmlformats.org/drawingml/2006/main" xmlns:p="http://schemas.openxmlformats.org/presentationml/2006/main" xmlns:r="http://schemas.openxmlformats.org/officeDocument/2006/relationships">
   <p:cSld>
@@ -39305,6 +40838,558 @@
                 <a:latin typeface="Noto Sans CJK TC"/>
               </a:rPr>
               <a:t>Llama 兩邊幾乎相同（0.93–0.98×，本機甚至略慢），代表 GB10 的 decode 速度是硬體實況。Qwen 慢 1.5–1.7×。最上面兩筆是 c2 併發點。</a:t>
+            </a:r>
+          </a:p>
+        </p:txBody>
+      </p:sp>
+    </p:spTree>
+  </p:cSld>
+  <p:clrMapOvr>
+    <a:masterClrMapping/>
+  </p:clrMapOvr>
+</p:sld>
+</file>
+
+<file path=ppt/slides/slide40.xml><?xml version="1.0" encoding="utf-8"?>
+<p:sld xmlns:a="http://schemas.openxmlformats.org/drawingml/2006/main" xmlns:p="http://schemas.openxmlformats.org/presentationml/2006/main" xmlns:r="http://schemas.openxmlformats.org/officeDocument/2006/relationships">
+  <p:cSld>
+    <p:bg>
+      <p:bgPr>
+        <a:solidFill>
+          <a:srgbClr val="FCFCFB"/>
+        </a:solidFill>
+        <a:effectLst/>
+      </p:bgPr>
+    </p:bg>
+    <p:spTree>
+      <p:nvGrpSpPr>
+        <p:cNvPr id="1" name=""/>
+        <p:cNvGrpSpPr/>
+        <p:nvPr/>
+      </p:nvGrpSpPr>
+      <p:grpSpPr/>
+      <p:sp>
+        <p:nvSpPr>
+          <p:cNvPr id="2" name="TextBox 1"/>
+          <p:cNvSpPr txBox="1"/>
+          <p:nvPr/>
+        </p:nvSpPr>
+        <p:spPr>
+          <a:xfrm>
+            <a:off x="822960" y="502920"/>
+            <a:ext cx="10515600" cy="320040"/>
+          </a:xfrm>
+          <a:prstGeom prst="rect">
+            <a:avLst/>
+          </a:prstGeom>
+          <a:noFill/>
+        </p:spPr>
+        <p:txBody>
+          <a:bodyPr wrap="square" lIns="0" tIns="0" rIns="0" bIns="0">
+            <a:spAutoFit/>
+          </a:bodyPr>
+          <a:lstStyle/>
+          <a:p>
+            <a:pPr algn="l">
+              <a:spcAft>
+                <a:spcPts val="600"/>
+              </a:spcAft>
+            </a:pPr>
+            <a:r>
+              <a:rPr sz="1300" b="0">
+                <a:solidFill>
+                  <a:srgbClr val="6B6B70"/>
+                </a:solidFill>
+                <a:latin typeface="Noto Sans CJK TC"/>
+              </a:rPr>
+              <a:t>附錄：端點自身的併發比較</a:t>
+            </a:r>
+          </a:p>
+        </p:txBody>
+      </p:sp>
+      <p:sp>
+        <p:nvSpPr>
+          <p:cNvPr id="3" name="TextBox 2"/>
+          <p:cNvSpPr txBox="1"/>
+          <p:nvPr/>
+        </p:nvSpPr>
+        <p:spPr>
+          <a:xfrm>
+            <a:off x="822960" y="841248"/>
+            <a:ext cx="10515600" cy="640080"/>
+          </a:xfrm>
+          <a:prstGeom prst="rect">
+            <a:avLst/>
+          </a:prstGeom>
+          <a:noFill/>
+        </p:spPr>
+        <p:txBody>
+          <a:bodyPr wrap="square" lIns="0" tIns="0" rIns="0" bIns="0">
+            <a:spAutoFit/>
+          </a:bodyPr>
+          <a:lstStyle/>
+          <a:p>
+            <a:pPr algn="l">
+              <a:spcAft>
+                <a:spcPts val="600"/>
+              </a:spcAft>
+            </a:pPr>
+            <a:r>
+              <a:rPr sz="3000" b="1">
+                <a:solidFill>
+                  <a:srgbClr val="26262A"/>
+                </a:solidFill>
+                <a:latin typeface="Noto Sans CJK TC"/>
+              </a:rPr>
+              <a:t>端點其餘 c1 / c2 組合為何不可比</a:t>
+            </a:r>
+          </a:p>
+        </p:txBody>
+      </p:sp>
+      <p:sp>
+        <p:nvSpPr>
+          <p:cNvPr id="4" name="Rectangle 3"/>
+          <p:cNvSpPr/>
+          <p:nvPr/>
+        </p:nvSpPr>
+        <p:spPr>
+          <a:xfrm>
+            <a:off x="822960" y="1572768"/>
+            <a:ext cx="10515600" cy="25400"/>
+          </a:xfrm>
+          <a:prstGeom prst="rect">
+            <a:avLst/>
+          </a:prstGeom>
+          <a:solidFill>
+            <a:srgbClr val="E4E4E2"/>
+          </a:solidFill>
+          <a:ln>
+            <a:noFill/>
+          </a:ln>
+          <a:effectLst/>
+        </p:spPr>
+        <p:style>
+          <a:lnRef idx="1">
+            <a:schemeClr val="accent1"/>
+          </a:lnRef>
+          <a:fillRef idx="3">
+            <a:schemeClr val="accent1"/>
+          </a:fillRef>
+          <a:effectRef idx="2">
+            <a:schemeClr val="accent1"/>
+          </a:effectRef>
+          <a:fontRef idx="minor">
+            <a:schemeClr val="lt1"/>
+          </a:fontRef>
+        </p:style>
+        <p:txBody>
+          <a:bodyPr rtlCol="0" anchor="ctr"/>
+          <a:lstStyle/>
+          <a:p>
+            <a:pPr algn="ctr"/>
+          </a:p>
+        </p:txBody>
+      </p:sp>
+      <p:sp>
+        <p:nvSpPr>
+          <p:cNvPr id="5" name="TextBox 4"/>
+          <p:cNvSpPr txBox="1"/>
+          <p:nvPr/>
+        </p:nvSpPr>
+        <p:spPr>
+          <a:xfrm>
+            <a:off x="822960" y="1920240"/>
+            <a:ext cx="10515600" cy="457200"/>
+          </a:xfrm>
+          <a:prstGeom prst="rect">
+            <a:avLst/>
+          </a:prstGeom>
+          <a:noFill/>
+        </p:spPr>
+        <p:txBody>
+          <a:bodyPr wrap="square" lIns="0" tIns="0" rIns="0" bIns="0">
+            <a:spAutoFit/>
+          </a:bodyPr>
+          <a:lstStyle/>
+          <a:p>
+            <a:pPr algn="l">
+              <a:spcAft>
+                <a:spcPts val="600"/>
+              </a:spcAft>
+            </a:pPr>
+            <a:r>
+              <a:rPr sz="1500" b="0">
+                <a:solidFill>
+                  <a:srgbClr val="26262A"/>
+                </a:solidFill>
+                <a:latin typeface="Noto Sans CJK TC"/>
+              </a:rPr>
+              <a:t>端點側只有上一頁那一組是乾淨的併發對照。其餘三組各有不同問題：</a:t>
+            </a:r>
+          </a:p>
+        </p:txBody>
+      </p:sp>
+      <p:sp>
+        <p:nvSpPr>
+          <p:cNvPr id="6" name="TextBox 5"/>
+          <p:cNvSpPr txBox="1"/>
+          <p:nvPr/>
+        </p:nvSpPr>
+        <p:spPr>
+          <a:xfrm>
+            <a:off x="822960" y="2514600"/>
+            <a:ext cx="10515600" cy="365760"/>
+          </a:xfrm>
+          <a:prstGeom prst="rect">
+            <a:avLst/>
+          </a:prstGeom>
+          <a:noFill/>
+        </p:spPr>
+        <p:txBody>
+          <a:bodyPr wrap="square" lIns="0" tIns="0" rIns="0" bIns="0">
+            <a:spAutoFit/>
+          </a:bodyPr>
+          <a:lstStyle/>
+          <a:p>
+            <a:pPr algn="l">
+              <a:spcAft>
+                <a:spcPts val="600"/>
+              </a:spcAft>
+            </a:pPr>
+            <a:r>
+              <a:rPr sz="1400" b="1">
+                <a:solidFill>
+                  <a:srgbClr val="26262A"/>
+                </a:solidFill>
+                <a:latin typeface="Noto Sans CJK TC"/>
+              </a:rPr>
+              <a:t>Qwen3-VL · w2 chatbot c1 / c2</a:t>
+            </a:r>
+          </a:p>
+        </p:txBody>
+      </p:sp>
+      <p:sp>
+        <p:nvSpPr>
+          <p:cNvPr id="7" name="TextBox 6"/>
+          <p:cNvSpPr txBox="1"/>
+          <p:nvPr/>
+        </p:nvSpPr>
+        <p:spPr>
+          <a:xfrm>
+            <a:off x="822960" y="2898648"/>
+            <a:ext cx="10515600" cy="731520"/>
+          </a:xfrm>
+          <a:prstGeom prst="rect">
+            <a:avLst/>
+          </a:prstGeom>
+          <a:noFill/>
+        </p:spPr>
+        <p:txBody>
+          <a:bodyPr wrap="square" lIns="0" tIns="0" rIns="0" bIns="0">
+            <a:spAutoFit/>
+          </a:bodyPr>
+          <a:lstStyle/>
+          <a:p>
+            <a:pPr algn="l">
+              <a:spcAft>
+                <a:spcPts val="200"/>
+              </a:spcAft>
+            </a:pPr>
+            <a:r>
+              <a:rPr sz="1200" b="0">
+                <a:solidFill>
+                  <a:srgbClr val="6B6B70"/>
+                </a:solidFill>
+                <a:latin typeface="Noto Sans CJK TC"/>
+              </a:rPr>
+              <a:t>兩點的請求數與 trace 切片不同（10 筆 entries[2:12] 對 20 筆 entries[2:22]），ISL 總和 5,937 對 12,040。</a:t>
+            </a:r>
+          </a:p>
+          <a:p>
+            <a:pPr algn="l">
+              <a:spcAft>
+                <a:spcPts val="200"/>
+              </a:spcAft>
+            </a:pPr>
+            <a:r>
+              <a:rPr sz="1200" b="0">
+                <a:solidFill>
+                  <a:srgbClr val="6B6B70"/>
+                </a:solidFill>
+                <a:latin typeface="Noto Sans CJK TC"/>
+              </a:rPr>
+              <a:t>這是兩個不同的 workload，不是同一工作量的併發比較。</a:t>
+            </a:r>
+          </a:p>
+        </p:txBody>
+      </p:sp>
+      <p:sp>
+        <p:nvSpPr>
+          <p:cNvPr id="8" name="TextBox 7"/>
+          <p:cNvSpPr txBox="1"/>
+          <p:nvPr/>
+        </p:nvSpPr>
+        <p:spPr>
+          <a:xfrm>
+            <a:off x="822960" y="3721608"/>
+            <a:ext cx="10515600" cy="365760"/>
+          </a:xfrm>
+          <a:prstGeom prst="rect">
+            <a:avLst/>
+          </a:prstGeom>
+          <a:noFill/>
+        </p:spPr>
+        <p:txBody>
+          <a:bodyPr wrap="square" lIns="0" tIns="0" rIns="0" bIns="0">
+            <a:spAutoFit/>
+          </a:bodyPr>
+          <a:lstStyle/>
+          <a:p>
+            <a:pPr algn="l">
+              <a:spcAft>
+                <a:spcPts val="600"/>
+              </a:spcAft>
+            </a:pPr>
+            <a:r>
+              <a:rPr sz="1400" b="1">
+                <a:solidFill>
+                  <a:srgbClr val="26262A"/>
+                </a:solidFill>
+                <a:latin typeface="Noto Sans CJK TC"/>
+              </a:rPr>
+              <a:t>Qwen3-VL · w0 agent c1 / c2</a:t>
+            </a:r>
+          </a:p>
+        </p:txBody>
+      </p:sp>
+      <p:sp>
+        <p:nvSpPr>
+          <p:cNvPr id="9" name="TextBox 8"/>
+          <p:cNvSpPr txBox="1"/>
+          <p:nvPr/>
+        </p:nvSpPr>
+        <p:spPr>
+          <a:xfrm>
+            <a:off x="822960" y="4105656"/>
+            <a:ext cx="10515600" cy="731520"/>
+          </a:xfrm>
+          <a:prstGeom prst="rect">
+            <a:avLst/>
+          </a:prstGeom>
+          <a:noFill/>
+        </p:spPr>
+        <p:txBody>
+          <a:bodyPr wrap="square" lIns="0" tIns="0" rIns="0" bIns="0">
+            <a:spAutoFit/>
+          </a:bodyPr>
+          <a:lstStyle/>
+          <a:p>
+            <a:pPr algn="l">
+              <a:spcAft>
+                <a:spcPts val="200"/>
+              </a:spcAft>
+            </a:pPr>
+            <a:r>
+              <a:rPr sz="1200" b="0">
+                <a:solidFill>
+                  <a:srgbClr val="6B6B70"/>
+                </a:solidFill>
+                <a:latin typeface="Noto Sans CJK TC"/>
+              </a:rPr>
+              <a:t>c2 的 20 筆中有 6 筆撞上 ngrok 月流量配額（403 ERR_NGROK_725），實際只完成 14 筆，</a:t>
+            </a:r>
+          </a:p>
+          <a:p>
+            <a:pPr algn="l">
+              <a:spcAft>
+                <a:spcPts val="200"/>
+              </a:spcAft>
+            </a:pPr>
+            <a:r>
+              <a:rPr sz="1200" b="0">
+                <a:solidFill>
+                  <a:srgbClr val="6B6B70"/>
+                </a:solidFill>
+                <a:latin typeface="Noto Sans CJK TC"/>
+              </a:rPr>
+              <a:t>ISL 總和因此變成 21,714 對 c1 的 33,160。工作量不同，無法比較。</a:t>
+            </a:r>
+          </a:p>
+        </p:txBody>
+      </p:sp>
+      <p:sp>
+        <p:nvSpPr>
+          <p:cNvPr id="10" name="TextBox 9"/>
+          <p:cNvSpPr txBox="1"/>
+          <p:nvPr/>
+        </p:nvSpPr>
+        <p:spPr>
+          <a:xfrm>
+            <a:off x="822960" y="4928616"/>
+            <a:ext cx="10515600" cy="365760"/>
+          </a:xfrm>
+          <a:prstGeom prst="rect">
+            <a:avLst/>
+          </a:prstGeom>
+          <a:noFill/>
+        </p:spPr>
+        <p:txBody>
+          <a:bodyPr wrap="square" lIns="0" tIns="0" rIns="0" bIns="0">
+            <a:spAutoFit/>
+          </a:bodyPr>
+          <a:lstStyle/>
+          <a:p>
+            <a:pPr algn="l">
+              <a:spcAft>
+                <a:spcPts val="600"/>
+              </a:spcAft>
+            </a:pPr>
+            <a:r>
+              <a:rPr sz="1400" b="1">
+                <a:solidFill>
+                  <a:srgbClr val="26262A"/>
+                </a:solidFill>
+                <a:latin typeface="Noto Sans CJK TC"/>
+              </a:rPr>
+              <a:t>Llama-3.1-8B · r100 agent c1 / c2</a:t>
+            </a:r>
+          </a:p>
+        </p:txBody>
+      </p:sp>
+      <p:sp>
+        <p:nvSpPr>
+          <p:cNvPr id="11" name="TextBox 10"/>
+          <p:cNvSpPr txBox="1"/>
+          <p:nvPr/>
+        </p:nvSpPr>
+        <p:spPr>
+          <a:xfrm>
+            <a:off x="822960" y="5312664"/>
+            <a:ext cx="10515600" cy="731520"/>
+          </a:xfrm>
+          <a:prstGeom prst="rect">
+            <a:avLst/>
+          </a:prstGeom>
+          <a:noFill/>
+        </p:spPr>
+        <p:txBody>
+          <a:bodyPr wrap="square" lIns="0" tIns="0" rIns="0" bIns="0">
+            <a:spAutoFit/>
+          </a:bodyPr>
+          <a:lstStyle/>
+          <a:p>
+            <a:pPr algn="l">
+              <a:spcAft>
+                <a:spcPts val="200"/>
+              </a:spcAft>
+            </a:pPr>
+            <a:r>
+              <a:rPr sz="1200" b="0">
+                <a:solidFill>
+                  <a:srgbClr val="6B6B70"/>
+                </a:solidFill>
+                <a:latin typeface="Noto Sans CJK TC"/>
+              </a:rPr>
+              <a:t>兩點分別遺失 3 筆與 10 筆 Cloudflare 524 逾時，ISL 總和 155,303 對 135,900。</a:t>
+            </a:r>
+          </a:p>
+          <a:p>
+            <a:pPr algn="l">
+              <a:spcAft>
+                <a:spcPts val="200"/>
+              </a:spcAft>
+            </a:pPr>
+            <a:r>
+              <a:rPr sz="1200" b="0">
+                <a:solidFill>
+                  <a:srgbClr val="6B6B70"/>
+                </a:solidFill>
+                <a:latin typeface="Noto Sans CJK TC"/>
+              </a:rPr>
+              <a:t>524 砍掉的是最慢的請求，兩邊被砍掉的比例還不同，比較會雙重失真。</a:t>
+            </a:r>
+          </a:p>
+        </p:txBody>
+      </p:sp>
+      <p:sp>
+        <p:nvSpPr>
+          <p:cNvPr id="12" name="Rectangle 11"/>
+          <p:cNvSpPr/>
+          <p:nvPr/>
+        </p:nvSpPr>
+        <p:spPr>
+          <a:xfrm>
+            <a:off x="822960" y="6181344"/>
+            <a:ext cx="10515600" cy="25400"/>
+          </a:xfrm>
+          <a:prstGeom prst="rect">
+            <a:avLst/>
+          </a:prstGeom>
+          <a:solidFill>
+            <a:srgbClr val="E4E4E2"/>
+          </a:solidFill>
+          <a:ln>
+            <a:noFill/>
+          </a:ln>
+          <a:effectLst/>
+        </p:spPr>
+        <p:style>
+          <a:lnRef idx="1">
+            <a:schemeClr val="accent1"/>
+          </a:lnRef>
+          <a:fillRef idx="3">
+            <a:schemeClr val="accent1"/>
+          </a:fillRef>
+          <a:effectRef idx="2">
+            <a:schemeClr val="accent1"/>
+          </a:effectRef>
+          <a:fontRef idx="minor">
+            <a:schemeClr val="lt1"/>
+          </a:fontRef>
+        </p:style>
+        <p:txBody>
+          <a:bodyPr rtlCol="0" anchor="ctr"/>
+          <a:lstStyle/>
+          <a:p>
+            <a:pPr algn="ctr"/>
+          </a:p>
+        </p:txBody>
+      </p:sp>
+      <p:sp>
+        <p:nvSpPr>
+          <p:cNvPr id="13" name="TextBox 12"/>
+          <p:cNvSpPr txBox="1"/>
+          <p:nvPr/>
+        </p:nvSpPr>
+        <p:spPr>
+          <a:xfrm>
+            <a:off x="822960" y="6409944"/>
+            <a:ext cx="10515600" cy="548640"/>
+          </a:xfrm>
+          <a:prstGeom prst="rect">
+            <a:avLst/>
+          </a:prstGeom>
+          <a:noFill/>
+        </p:spPr>
+        <p:txBody>
+          <a:bodyPr wrap="square" lIns="0" tIns="0" rIns="0" bIns="0">
+            <a:spAutoFit/>
+          </a:bodyPr>
+          <a:lstStyle/>
+          <a:p>
+            <a:pPr algn="l">
+              <a:spcAft>
+                <a:spcPts val="600"/>
+              </a:spcAft>
+            </a:pPr>
+            <a:r>
+              <a:rPr sz="1300" b="1">
+                <a:solidFill>
+                  <a:srgbClr val="26262A"/>
+                </a:solidFill>
+                <a:latin typeface="Noto Sans CJK TC"/>
+              </a:rPr>
+              <a:t>spark 本機四組 c1 / c2 全部有效（ISL 逐點相同、0 錯誤），加速倍率 1.50× 至 2.09×。</a:t>
             </a:r>
           </a:p>
         </p:txBody>
